--- a/docs/export/中間発表_柴尾.pptx
+++ b/docs/export/中間発表_柴尾.pptx
@@ -26,6 +26,7 @@
     <p:sldId id="274" r:id="rId26"/>
     <p:sldId id="275" r:id="rId27"/>
     <p:sldId id="276" r:id="rId28"/>
+    <p:sldId id="277" r:id="rId29"/>
   </p:sldIdLst>
   <p:sldSz cx="12191695" cy="6858000" type="screen4x3"/>
   <p:notesSz cx="6858000" cy="9144000"/>
@@ -852,7 +853,7 @@
           </a:p>
           <a:p>
             <a:r>
-              <a:t>まず段階Cとして、司会役のAIを導入します。文脈に応じて次に話すAIを決めることで、発言の偏りを制御したいと考えています。</a:t>
+              <a:t>本研究で取り組む範囲は、図の「次段階」までです。まず段階Cとして司会役のAIを導入し、文脈に応じて次に話すAIを決めることで、発言の偏りを制御したいと考えています。</a:t>
             </a:r>
           </a:p>
           <a:p>
@@ -862,7 +863,97 @@
           </a:p>
           <a:p>
             <a:r>
-              <a:t>その先では、センサーで取得した客観データと会話から得た主観を組み合わせた評価、そして実データを扱う際の通信の暗号化が課題になります。</a:t>
+              <a:t>中期以降は本研究の完了範囲の外で、発展の方向性としてお示ししているものです。その中期の位置づけを、次のスライドで説明します。</a:t>
+            </a:r>
+          </a:p>
+        </p:txBody>
+      </p:sp>
+      <p:sp>
+        <p:nvSpPr>
+          <p:cNvPr id="4" name="Slide Number Placeholder 3"/>
+          <p:cNvSpPr>
+            <a:spLocks noGrp="1"/>
+          </p:cNvSpPr>
+          <p:nvPr>
+            <p:ph type="sldNum" idx="5" sz="quarter"/>
+          </p:nvPr>
+        </p:nvSpPr>
+        <p:spPr/>
+      </p:sp>
+    </p:spTree>
+  </p:cSld>
+  <p:clrMapOvr>
+    <a:masterClrMapping/>
+  </p:clrMapOvr>
+</p:notes>
+</file>
+
+<file path=ppt/notesSlides/notesSlide14.xml><?xml version="1.0" encoding="utf-8"?>
+<p:notes xmlns:a="http://schemas.openxmlformats.org/drawingml/2006/main" xmlns:p="http://schemas.openxmlformats.org/presentationml/2006/main" xmlns:r="http://schemas.openxmlformats.org/officeDocument/2006/relationships">
+  <p:cSld>
+    <p:spTree>
+      <p:nvGrpSpPr>
+        <p:cNvPr id="1" name=""/>
+        <p:cNvGrpSpPr/>
+        <p:nvPr/>
+      </p:nvGrpSpPr>
+      <p:grpSpPr>
+        <a:xfrm>
+          <a:off x="0" y="0"/>
+          <a:ext cx="0" cy="0"/>
+          <a:chOff x="0" y="0"/>
+          <a:chExt cx="0" cy="0"/>
+        </a:xfrm>
+      </p:grpSpPr>
+      <p:sp>
+        <p:nvSpPr>
+          <p:cNvPr id="2" name="Slide Image Placeholder 1"/>
+          <p:cNvSpPr>
+            <a:spLocks noGrp="1"/>
+          </p:cNvSpPr>
+          <p:nvPr>
+            <p:ph type="sldImg" idx="2"/>
+          </p:nvPr>
+        </p:nvSpPr>
+        <p:spPr/>
+      </p:sp>
+      <p:sp>
+        <p:nvSpPr>
+          <p:cNvPr id="3" name="Notes Placeholder 2"/>
+          <p:cNvSpPr>
+            <a:spLocks noGrp="1"/>
+          </p:cNvSpPr>
+          <p:nvPr>
+            <p:ph type="body" idx="3" sz="quarter"/>
+          </p:nvPr>
+        </p:nvSpPr>
+        <p:spPr/>
+        <p:txBody>
+          <a:bodyPr/>
+          <a:lstStyle/>
+          <a:p>
+            <a:r>
+              <a:t>最後に、本研究の位置づけを整理します。</a:t>
+            </a:r>
+          </a:p>
+          <a:p>
+            <a:r>
+              <a:t>この研究室の既存研究は、リハビリ用デバイスにしてもハードウェア制御にしても、いずれもLabVIEWが窓口になっています。</a:t>
+            </a:r>
+          </a:p>
+          <a:p>
+            <a:r>
+              <a:t>本研究が作ったのは、そのLabVIEWから1回投げるだけでLLMを使える接続基盤です。つまり、既存の計測系を作り変えずにLLMを利用できるようになります。</a:t>
+            </a:r>
+          </a:p>
+          <a:p>
+            <a:r>
+              <a:t>この意味で本研究は、研究室の既存研究にLLMを接続する共通の入口、ゲートウェイになり得ると考えています。</a:t>
+            </a:r>
+          </a:p>
+          <a:p>
+            <a:r>
+              <a:t>なお、センサーデータとの統合そのものは中期の目標であり、本研究の完了範囲は接続基盤の構築までです。</a:t>
             </a:r>
           </a:p>
           <a:p>
@@ -7172,6 +7263,24 @@
               <a:t>ペルソナの動的な切り替え</a:t>
             </a:r>
           </a:p>
+          <a:p>
+            <a:pPr algn="ctr">
+              <a:spcAft>
+                <a:spcPts val="300"/>
+              </a:spcAft>
+            </a:pPr>
+            <a:r>
+              <a:rPr sz="1300" b="0">
+                <a:solidFill>
+                  <a:srgbClr val="222222"/>
+                </a:solidFill>
+                <a:latin typeface="Yu Gothic"/>
+                <a:ea typeface="Yu Gothic"/>
+                <a:cs typeface="Yu Gothic"/>
+              </a:rPr>
+              <a:t>（本研究で取り組む範囲）</a:t>
+            </a:r>
+          </a:p>
         </p:txBody>
       </p:sp>
       <p:sp>
@@ -7248,7 +7357,7 @@
                 <a:ea typeface="Yu Gothic"/>
                 <a:cs typeface="Yu Gothic"/>
               </a:rPr>
-              <a:t>センサーデータと会話の統合</a:t>
+              <a:t>研究室の既存研究とLLMを</a:t>
             </a:r>
           </a:p>
           <a:p>
@@ -7266,7 +7375,25 @@
                 <a:ea typeface="Yu Gothic"/>
                 <a:cs typeface="Yu Gothic"/>
               </a:rPr>
-              <a:t>時系列データの自動解析</a:t>
+              <a:t>繋ぐゲートウェイ化</a:t>
+            </a:r>
+          </a:p>
+          <a:p>
+            <a:pPr algn="ctr">
+              <a:spcAft>
+                <a:spcPts val="300"/>
+              </a:spcAft>
+            </a:pPr>
+            <a:r>
+              <a:rPr sz="1300" b="0">
+                <a:solidFill>
+                  <a:srgbClr val="222222"/>
+                </a:solidFill>
+                <a:latin typeface="Yu Gothic"/>
+                <a:ea typeface="Yu Gothic"/>
+                <a:cs typeface="Yu Gothic"/>
+              </a:rPr>
+              <a:t>センサーデータとの統合</a:t>
             </a:r>
           </a:p>
         </p:txBody>
@@ -7327,7 +7454,7 @@
                 <a:ea typeface="Yu Gothic"/>
                 <a:cs typeface="Yu Gothic"/>
               </a:rPr>
-              <a:t>長期</a:t>
+              <a:t>長期［ビジョン］</a:t>
             </a:r>
           </a:p>
           <a:p>
@@ -7345,7 +7472,7 @@
                 <a:ea typeface="Yu Gothic"/>
                 <a:cs typeface="Yu Gothic"/>
               </a:rPr>
-              <a:t>偏らないマルチエージェント</a:t>
+              <a:t>客観データと主観データを</a:t>
             </a:r>
           </a:p>
           <a:p>
@@ -7363,7 +7490,7 @@
                 <a:ea typeface="Yu Gothic"/>
                 <a:cs typeface="Yu Gothic"/>
               </a:rPr>
-              <a:t>評価空間の実現</a:t>
+              <a:t>組み合わせた評価空間</a:t>
             </a:r>
           </a:p>
         </p:txBody>
@@ -7404,7 +7531,7 @@
                 <a:ea typeface="Yu Gothic"/>
                 <a:cs typeface="Yu Gothic"/>
               </a:rPr>
-              <a:t>直近で取り組むこと</a:t>
+              <a:t>本研究で取り組む範囲（次段階）</a:t>
             </a:r>
           </a:p>
         </p:txBody>
@@ -7418,7 +7545,7 @@
         <p:spPr>
           <a:xfrm>
             <a:off x="640080" y="3977639"/>
-            <a:ext cx="2606040" cy="1600200"/>
+            <a:ext cx="3474720" cy="1463040"/>
           </a:xfrm>
           <a:prstGeom prst="roundRect">
             <a:avLst/>
@@ -7457,7 +7584,7 @@
               </a:spcAft>
             </a:pPr>
             <a:r>
-              <a:rPr sz="1500" b="1">
+              <a:rPr sz="1700" b="1">
                 <a:solidFill>
                   <a:srgbClr val="0E7C86"/>
                 </a:solidFill>
@@ -7475,7 +7602,7 @@
               </a:spcAft>
             </a:pPr>
             <a:r>
-              <a:rPr sz="1200" b="0">
+              <a:rPr sz="1400" b="0">
                 <a:solidFill>
                   <a:srgbClr val="222222"/>
                 </a:solidFill>
@@ -7493,7 +7620,7 @@
               </a:spcAft>
             </a:pPr>
             <a:r>
-              <a:rPr sz="1200" b="0">
+              <a:rPr sz="1400" b="0">
                 <a:solidFill>
                   <a:srgbClr val="222222"/>
                 </a:solidFill>
@@ -7514,8 +7641,8 @@
         </p:nvSpPr>
         <p:spPr>
           <a:xfrm>
-            <a:off x="3429000" y="3977639"/>
-            <a:ext cx="2606040" cy="1600200"/>
+            <a:off x="4389119" y="3977639"/>
+            <a:ext cx="3474720" cy="1463040"/>
           </a:xfrm>
           <a:prstGeom prst="roundRect">
             <a:avLst/>
@@ -7554,7 +7681,7 @@
               </a:spcAft>
             </a:pPr>
             <a:r>
-              <a:rPr sz="1500" b="1">
+              <a:rPr sz="1700" b="1">
                 <a:solidFill>
                   <a:srgbClr val="0E7C86"/>
                 </a:solidFill>
@@ -7572,7 +7699,7 @@
               </a:spcAft>
             </a:pPr>
             <a:r>
-              <a:rPr sz="1200" b="0">
+              <a:rPr sz="1400" b="0">
                 <a:solidFill>
                   <a:srgbClr val="222222"/>
                 </a:solidFill>
@@ -7590,7 +7717,7 @@
               </a:spcAft>
             </a:pPr>
             <a:r>
-              <a:rPr sz="1200" b="0">
+              <a:rPr sz="1400" b="0">
                 <a:solidFill>
                   <a:srgbClr val="222222"/>
                 </a:solidFill>
@@ -7611,8 +7738,8 @@
         </p:nvSpPr>
         <p:spPr>
           <a:xfrm>
-            <a:off x="6217920" y="3977639"/>
-            <a:ext cx="2606040" cy="1600200"/>
+            <a:off x="8138158" y="3977639"/>
+            <a:ext cx="3474720" cy="1463040"/>
           </a:xfrm>
           <a:prstGeom prst="roundRect">
             <a:avLst/>
@@ -7651,7 +7778,7 @@
               </a:spcAft>
             </a:pPr>
             <a:r>
-              <a:rPr sz="1500" b="1">
+              <a:rPr sz="1700" b="1">
                 <a:solidFill>
                   <a:srgbClr val="0E7C86"/>
                 </a:solidFill>
@@ -7659,7 +7786,7 @@
                 <a:ea typeface="Yu Gothic"/>
                 <a:cs typeface="Yu Gothic"/>
               </a:rPr>
-              <a:t>センサーデータとの統合</a:t>
+              <a:t>通信の暗号化</a:t>
             </a:r>
           </a:p>
           <a:p>
@@ -7669,7 +7796,7 @@
               </a:spcAft>
             </a:pPr>
             <a:r>
-              <a:rPr sz="1200" b="0">
+              <a:rPr sz="1400" b="0">
                 <a:solidFill>
                   <a:srgbClr val="222222"/>
                 </a:solidFill>
@@ -7677,7 +7804,7 @@
                 <a:ea typeface="Yu Gothic"/>
                 <a:cs typeface="Yu Gothic"/>
               </a:rPr>
-              <a:t>屈曲角・脈波などの客観データと</a:t>
+              <a:t>実データを扱う段階では</a:t>
             </a:r>
           </a:p>
           <a:p>
@@ -7687,7 +7814,7 @@
               </a:spcAft>
             </a:pPr>
             <a:r>
-              <a:rPr sz="1200" b="0">
+              <a:rPr sz="1400" b="0">
                 <a:solidFill>
                   <a:srgbClr val="222222"/>
                 </a:solidFill>
@@ -7695,104 +7822,48 @@
                 <a:ea typeface="Yu Gothic"/>
                 <a:cs typeface="Yu Gothic"/>
               </a:rPr>
-              <a:t>会話を組み合わせた評価</a:t>
-            </a:r>
-          </a:p>
-        </p:txBody>
-      </p:sp>
-      <p:sp>
-        <p:nvSpPr>
-          <p:cNvPr id="13" name="Rounded Rectangle 12"/>
-          <p:cNvSpPr/>
+              <a:t>HTTPS化が必須</a:t>
+            </a:r>
+          </a:p>
+        </p:txBody>
+      </p:sp>
+      <p:sp>
+        <p:nvSpPr>
+          <p:cNvPr id="13" name="TextBox 12"/>
+          <p:cNvSpPr txBox="1"/>
           <p:nvPr/>
         </p:nvSpPr>
         <p:spPr>
           <a:xfrm>
-            <a:off x="9006840" y="3977639"/>
-            <a:ext cx="2606040" cy="1600200"/>
+            <a:off x="640080" y="5623560"/>
+            <a:ext cx="10881360" cy="457200"/>
           </a:xfrm>
-          <a:prstGeom prst="roundRect">
+          <a:prstGeom prst="rect">
             <a:avLst/>
           </a:prstGeom>
-          <a:solidFill>
-            <a:srgbClr val="EFF3F7"/>
-          </a:solidFill>
-          <a:ln w="19050">
-            <a:solidFill>
-              <a:srgbClr val="0E7C86"/>
-            </a:solidFill>
-          </a:ln>
-          <a:effectLst/>
+          <a:noFill/>
         </p:spPr>
-        <p:style>
-          <a:lnRef idx="1">
-            <a:schemeClr val="accent1"/>
-          </a:lnRef>
-          <a:fillRef idx="3">
-            <a:schemeClr val="accent1"/>
-          </a:fillRef>
-          <a:effectRef idx="2">
-            <a:schemeClr val="accent1"/>
-          </a:effectRef>
-          <a:fontRef idx="minor">
-            <a:schemeClr val="lt1"/>
-          </a:fontRef>
-        </p:style>
-        <p:txBody>
-          <a:bodyPr rtlCol="0" anchor="ctr" wrap="square" lIns="228600" rIns="228600" tIns="164592"/>
+        <p:txBody>
+          <a:bodyPr wrap="square" anchor="t">
+            <a:spAutoFit/>
+          </a:bodyPr>
           <a:lstStyle/>
           <a:p>
             <a:pPr algn="l">
               <a:spcAft>
-                <a:spcPts val="800"/>
-              </a:spcAft>
-            </a:pPr>
-            <a:r>
-              <a:rPr sz="1500" b="1">
-                <a:solidFill>
-                  <a:srgbClr val="0E7C86"/>
-                </a:solidFill>
-                <a:latin typeface="Yu Gothic"/>
-                <a:ea typeface="Yu Gothic"/>
-                <a:cs typeface="Yu Gothic"/>
-              </a:rPr>
-              <a:t>通信の暗号化</a:t>
-            </a:r>
-          </a:p>
-          <a:p>
-            <a:pPr algn="l">
-              <a:spcAft>
-                <a:spcPts val="500"/>
-              </a:spcAft>
-            </a:pPr>
-            <a:r>
-              <a:rPr sz="1200" b="0">
-                <a:solidFill>
-                  <a:srgbClr val="222222"/>
-                </a:solidFill>
-                <a:latin typeface="Yu Gothic"/>
-                <a:ea typeface="Yu Gothic"/>
-                <a:cs typeface="Yu Gothic"/>
-              </a:rPr>
-              <a:t>実データを扱う段階では</a:t>
-            </a:r>
-          </a:p>
-          <a:p>
-            <a:pPr algn="l">
-              <a:spcAft>
-                <a:spcPts val="500"/>
-              </a:spcAft>
-            </a:pPr>
-            <a:r>
-              <a:rPr sz="1200" b="0">
-                <a:solidFill>
-                  <a:srgbClr val="222222"/>
-                </a:solidFill>
-                <a:latin typeface="Yu Gothic"/>
-                <a:ea typeface="Yu Gothic"/>
-                <a:cs typeface="Yu Gothic"/>
-              </a:rPr>
-              <a:t>HTTPS化が必須</a:t>
+                <a:spcPts val="600"/>
+              </a:spcAft>
+            </a:pPr>
+            <a:r>
+              <a:rPr sz="1500" b="0">
+                <a:solidFill>
+                  <a:srgbClr val="595A5C"/>
+                </a:solidFill>
+                <a:latin typeface="Yu Gothic"/>
+                <a:ea typeface="Yu Gothic"/>
+                <a:cs typeface="Yu Gothic"/>
+              </a:rPr>
+              <a:t>中期以降は本研究の完了範囲の外にあり、発展の方向性として示している</a:t>
             </a:r>
           </a:p>
         </p:txBody>
@@ -7823,8 +7894,8 @@
         </p:nvSpPr>
         <p:spPr>
           <a:xfrm>
-            <a:off x="0" y="2468880"/>
-            <a:ext cx="12191695" cy="1920240"/>
+            <a:off x="0" y="0"/>
+            <a:ext cx="12191695" cy="868680"/>
           </a:xfrm>
           <a:prstGeom prst="rect">
             <a:avLst/>
@@ -7852,16 +7923,752 @@
           </a:fontRef>
         </p:style>
         <p:txBody>
+          <a:bodyPr rtlCol="0" anchor="ctr" lIns="457200"/>
+          <a:lstStyle/>
+          <a:p>
+            <a:pPr algn="l">
+              <a:spcAft>
+                <a:spcPts val="600"/>
+              </a:spcAft>
+            </a:pPr>
+            <a:r>
+              <a:rPr sz="3000" b="1">
+                <a:solidFill>
+                  <a:srgbClr val="FFFFFF"/>
+                </a:solidFill>
+                <a:latin typeface="Yu Gothic"/>
+                <a:ea typeface="Yu Gothic"/>
+                <a:cs typeface="Yu Gothic"/>
+              </a:rPr>
+              <a:t>本研究の位置づけ ― 既存研究とLLMを繋ぐゲートウェイ</a:t>
+            </a:r>
+          </a:p>
+        </p:txBody>
+      </p:sp>
+      <p:sp>
+        <p:nvSpPr>
+          <p:cNvPr id="3" name="TextBox 2"/>
+          <p:cNvSpPr txBox="1"/>
+          <p:nvPr/>
+        </p:nvSpPr>
+        <p:spPr>
+          <a:xfrm>
+            <a:off x="11277295" y="6355080"/>
+            <a:ext cx="640080" cy="365760"/>
+          </a:xfrm>
+          <a:prstGeom prst="rect">
+            <a:avLst/>
+          </a:prstGeom>
+          <a:noFill/>
+        </p:spPr>
+        <p:txBody>
+          <a:bodyPr wrap="square" anchor="t">
+            <a:spAutoFit/>
+          </a:bodyPr>
+          <a:lstStyle/>
+          <a:p>
+            <a:pPr algn="r">
+              <a:spcAft>
+                <a:spcPts val="600"/>
+              </a:spcAft>
+            </a:pPr>
+            <a:r>
+              <a:rPr sz="1400" b="0">
+                <a:solidFill>
+                  <a:srgbClr val="595A5C"/>
+                </a:solidFill>
+                <a:latin typeface="Yu Gothic"/>
+                <a:ea typeface="Yu Gothic"/>
+                <a:cs typeface="Yu Gothic"/>
+              </a:rPr>
+              <a:t>13</a:t>
+            </a:r>
+          </a:p>
+        </p:txBody>
+      </p:sp>
+      <p:sp>
+        <p:nvSpPr>
+          <p:cNvPr id="4" name="TextBox 3"/>
+          <p:cNvSpPr txBox="1"/>
+          <p:nvPr/>
+        </p:nvSpPr>
+        <p:spPr>
+          <a:xfrm>
+            <a:off x="640080" y="960120"/>
+            <a:ext cx="10881360" cy="457200"/>
+          </a:xfrm>
+          <a:prstGeom prst="rect">
+            <a:avLst/>
+          </a:prstGeom>
+          <a:noFill/>
+        </p:spPr>
+        <p:txBody>
+          <a:bodyPr wrap="square" anchor="t">
+            <a:spAutoFit/>
+          </a:bodyPr>
+          <a:lstStyle/>
+          <a:p>
+            <a:pPr algn="l">
+              <a:spcAft>
+                <a:spcPts val="600"/>
+              </a:spcAft>
+            </a:pPr>
+            <a:r>
+              <a:rPr sz="1700" b="0">
+                <a:solidFill>
+                  <a:srgbClr val="595A5C"/>
+                </a:solidFill>
+                <a:latin typeface="Yu Gothic"/>
+                <a:ea typeface="Yu Gothic"/>
+                <a:cs typeface="Yu Gothic"/>
+              </a:rPr>
+              <a:t>研究室の既存研究はすでにLabVIEWで動いている。本研究はその共通の出口としてLLMを繋ぐ役割を担える。</a:t>
+            </a:r>
+          </a:p>
+        </p:txBody>
+      </p:sp>
+      <p:sp>
+        <p:nvSpPr>
+          <p:cNvPr id="5" name="Rounded Rectangle 4"/>
+          <p:cNvSpPr/>
+          <p:nvPr/>
+        </p:nvSpPr>
+        <p:spPr>
+          <a:xfrm>
+            <a:off x="548640" y="1508760"/>
+            <a:ext cx="3200400" cy="2377440"/>
+          </a:xfrm>
+          <a:prstGeom prst="roundRect">
+            <a:avLst/>
+          </a:prstGeom>
+          <a:solidFill>
+            <a:srgbClr val="EFF3F7"/>
+          </a:solidFill>
+          <a:ln w="19050">
+            <a:solidFill>
+              <a:srgbClr val="595A5C"/>
+            </a:solidFill>
+          </a:ln>
+          <a:effectLst/>
+        </p:spPr>
+        <p:style>
+          <a:lnRef idx="1">
+            <a:schemeClr val="accent1"/>
+          </a:lnRef>
+          <a:fillRef idx="3">
+            <a:schemeClr val="accent1"/>
+          </a:fillRef>
+          <a:effectRef idx="2">
+            <a:schemeClr val="accent1"/>
+          </a:effectRef>
+          <a:fontRef idx="minor">
+            <a:schemeClr val="lt1"/>
+          </a:fontRef>
+        </p:style>
+        <p:txBody>
+          <a:bodyPr rtlCol="0" anchor="ctr" wrap="square" lIns="228600" rIns="228600" tIns="164592"/>
+          <a:lstStyle/>
+          <a:p>
+            <a:pPr algn="l">
+              <a:spcAft>
+                <a:spcPts val="800"/>
+              </a:spcAft>
+            </a:pPr>
+            <a:r>
+              <a:rPr sz="1800" b="1">
+                <a:solidFill>
+                  <a:srgbClr val="595A5C"/>
+                </a:solidFill>
+                <a:latin typeface="Yu Gothic"/>
+                <a:ea typeface="Yu Gothic"/>
+                <a:cs typeface="Yu Gothic"/>
+              </a:rPr>
+              <a:t>松田研の既存研究</a:t>
+            </a:r>
+          </a:p>
+          <a:p>
+            <a:pPr algn="l">
+              <a:spcAft>
+                <a:spcPts val="500"/>
+              </a:spcAft>
+            </a:pPr>
+            <a:r>
+              <a:rPr sz="1400" b="0">
+                <a:solidFill>
+                  <a:srgbClr val="222222"/>
+                </a:solidFill>
+                <a:latin typeface="Yu Gothic"/>
+                <a:ea typeface="Yu Gothic"/>
+                <a:cs typeface="Yu Gothic"/>
+              </a:rPr>
+              <a:t>・リハビリ用デバイス</a:t>
+            </a:r>
+          </a:p>
+          <a:p>
+            <a:pPr algn="l">
+              <a:spcAft>
+                <a:spcPts val="500"/>
+              </a:spcAft>
+            </a:pPr>
+            <a:r>
+              <a:rPr sz="1400" b="0">
+                <a:solidFill>
+                  <a:srgbClr val="222222"/>
+                </a:solidFill>
+                <a:latin typeface="Yu Gothic"/>
+                <a:ea typeface="Yu Gothic"/>
+                <a:cs typeface="Yu Gothic"/>
+              </a:rPr>
+              <a:t>　（力覚・屈曲データ）</a:t>
+            </a:r>
+          </a:p>
+          <a:p>
+            <a:pPr algn="l">
+              <a:spcAft>
+                <a:spcPts val="500"/>
+              </a:spcAft>
+            </a:pPr>
+            <a:r>
+              <a:rPr sz="1400" b="0">
+                <a:solidFill>
+                  <a:srgbClr val="222222"/>
+                </a:solidFill>
+                <a:latin typeface="Yu Gothic"/>
+                <a:ea typeface="Yu Gothic"/>
+                <a:cs typeface="Yu Gothic"/>
+              </a:rPr>
+              <a:t>・ハードウェア制御</a:t>
+            </a:r>
+          </a:p>
+          <a:p>
+            <a:pPr algn="l">
+              <a:spcAft>
+                <a:spcPts val="500"/>
+              </a:spcAft>
+            </a:pPr>
+            <a:r>
+              <a:rPr sz="1400" b="0">
+                <a:solidFill>
+                  <a:srgbClr val="222222"/>
+                </a:solidFill>
+                <a:latin typeface="Yu Gothic"/>
+                <a:ea typeface="Yu Gothic"/>
+                <a:cs typeface="Yu Gothic"/>
+              </a:rPr>
+              <a:t>　（PWM / AD・DA変換）</a:t>
+            </a:r>
+          </a:p>
+          <a:p>
+            <a:pPr algn="l">
+              <a:spcAft>
+                <a:spcPts val="500"/>
+              </a:spcAft>
+            </a:pPr>
+            <a:r>
+              <a:rPr sz="1400" b="0">
+                <a:solidFill>
+                  <a:srgbClr val="222222"/>
+                </a:solidFill>
+                <a:latin typeface="Yu Gothic"/>
+                <a:ea typeface="Yu Gothic"/>
+                <a:cs typeface="Yu Gothic"/>
+              </a:rPr>
+              <a:t>・電動車椅子・計測系</a:t>
+            </a:r>
+          </a:p>
+          <a:p>
+            <a:pPr algn="l">
+              <a:spcAft>
+                <a:spcPts val="500"/>
+              </a:spcAft>
+            </a:pPr>
+            <a:r>
+              <a:rPr sz="1400" b="0">
+                <a:solidFill>
+                  <a:srgbClr val="222222"/>
+                </a:solidFill>
+                <a:latin typeface="Yu Gothic"/>
+                <a:ea typeface="Yu Gothic"/>
+                <a:cs typeface="Yu Gothic"/>
+              </a:rPr>
+              <a:t/>
+            </a:r>
+          </a:p>
+          <a:p>
+            <a:pPr algn="l">
+              <a:spcAft>
+                <a:spcPts val="500"/>
+              </a:spcAft>
+            </a:pPr>
+            <a:r>
+              <a:rPr sz="1400" b="0">
+                <a:solidFill>
+                  <a:srgbClr val="222222"/>
+                </a:solidFill>
+                <a:latin typeface="Yu Gothic"/>
+                <a:ea typeface="Yu Gothic"/>
+                <a:cs typeface="Yu Gothic"/>
+              </a:rPr>
+              <a:t>いずれもLabVIEWが窓口</a:t>
+            </a:r>
+          </a:p>
+        </p:txBody>
+      </p:sp>
+      <p:sp>
+        <p:nvSpPr>
+          <p:cNvPr id="6" name="Rounded Rectangle 5"/>
+          <p:cNvSpPr/>
+          <p:nvPr/>
+        </p:nvSpPr>
+        <p:spPr>
+          <a:xfrm>
+            <a:off x="4480560" y="1508760"/>
+            <a:ext cx="3291840" cy="2377440"/>
+          </a:xfrm>
+          <a:prstGeom prst="roundRect">
+            <a:avLst/>
+          </a:prstGeom>
+          <a:solidFill>
+            <a:srgbClr val="EFF3F7"/>
+          </a:solidFill>
+          <a:ln w="19050">
+            <a:solidFill>
+              <a:srgbClr val="0E7C86"/>
+            </a:solidFill>
+          </a:ln>
+          <a:effectLst/>
+        </p:spPr>
+        <p:style>
+          <a:lnRef idx="1">
+            <a:schemeClr val="accent1"/>
+          </a:lnRef>
+          <a:fillRef idx="3">
+            <a:schemeClr val="accent1"/>
+          </a:fillRef>
+          <a:effectRef idx="2">
+            <a:schemeClr val="accent1"/>
+          </a:effectRef>
+          <a:fontRef idx="minor">
+            <a:schemeClr val="lt1"/>
+          </a:fontRef>
+        </p:style>
+        <p:txBody>
+          <a:bodyPr rtlCol="0" anchor="ctr" wrap="square" lIns="228600" rIns="228600" tIns="164592"/>
+          <a:lstStyle/>
+          <a:p>
+            <a:pPr algn="l">
+              <a:spcAft>
+                <a:spcPts val="800"/>
+              </a:spcAft>
+            </a:pPr>
+            <a:r>
+              <a:rPr sz="1800" b="1">
+                <a:solidFill>
+                  <a:srgbClr val="0E7C86"/>
+                </a:solidFill>
+                <a:latin typeface="Yu Gothic"/>
+                <a:ea typeface="Yu Gothic"/>
+                <a:cs typeface="Yu Gothic"/>
+              </a:rPr>
+              <a:t>本研究：接続基盤</a:t>
+            </a:r>
+          </a:p>
+          <a:p>
+            <a:pPr algn="l">
+              <a:spcAft>
+                <a:spcPts val="500"/>
+              </a:spcAft>
+            </a:pPr>
+            <a:r>
+              <a:rPr sz="1400" b="0">
+                <a:solidFill>
+                  <a:srgbClr val="222222"/>
+                </a:solidFill>
+                <a:latin typeface="Yu Gothic"/>
+                <a:ea typeface="Yu Gothic"/>
+                <a:cs typeface="Yu Gothic"/>
+              </a:rPr>
+              <a:t>・LabVIEWから1回投げるだけ</a:t>
+            </a:r>
+          </a:p>
+          <a:p>
+            <a:pPr algn="l">
+              <a:spcAft>
+                <a:spcPts val="500"/>
+              </a:spcAft>
+            </a:pPr>
+            <a:r>
+              <a:rPr sz="1400" b="0">
+                <a:solidFill>
+                  <a:srgbClr val="222222"/>
+                </a:solidFill>
+                <a:latin typeface="Yu Gothic"/>
+                <a:ea typeface="Yu Gothic"/>
+                <a:cs typeface="Yu Gothic"/>
+              </a:rPr>
+              <a:t>・サーバーが会話を制御</a:t>
+            </a:r>
+          </a:p>
+          <a:p>
+            <a:pPr algn="l">
+              <a:spcAft>
+                <a:spcPts val="500"/>
+              </a:spcAft>
+            </a:pPr>
+            <a:r>
+              <a:rPr sz="1400" b="0">
+                <a:solidFill>
+                  <a:srgbClr val="222222"/>
+                </a:solidFill>
+                <a:latin typeface="Yu Gothic"/>
+                <a:ea typeface="Yu Gothic"/>
+                <a:cs typeface="Yu Gothic"/>
+              </a:rPr>
+              <a:t>・LabVIEW側に追加実装は不要</a:t>
+            </a:r>
+          </a:p>
+          <a:p>
+            <a:pPr algn="l">
+              <a:spcAft>
+                <a:spcPts val="500"/>
+              </a:spcAft>
+            </a:pPr>
+            <a:r>
+              <a:rPr sz="1400" b="0">
+                <a:solidFill>
+                  <a:srgbClr val="222222"/>
+                </a:solidFill>
+                <a:latin typeface="Yu Gothic"/>
+                <a:ea typeface="Yu Gothic"/>
+                <a:cs typeface="Yu Gothic"/>
+              </a:rPr>
+              <a:t/>
+            </a:r>
+          </a:p>
+          <a:p>
+            <a:pPr algn="l">
+              <a:spcAft>
+                <a:spcPts val="500"/>
+              </a:spcAft>
+            </a:pPr>
+            <a:r>
+              <a:rPr sz="1400" b="0">
+                <a:solidFill>
+                  <a:srgbClr val="222222"/>
+                </a:solidFill>
+                <a:latin typeface="Yu Gothic"/>
+                <a:ea typeface="Yu Gothic"/>
+                <a:cs typeface="Yu Gothic"/>
+              </a:rPr>
+              <a:t>計測系を作り変えずに</a:t>
+            </a:r>
+          </a:p>
+          <a:p>
+            <a:pPr algn="l">
+              <a:spcAft>
+                <a:spcPts val="500"/>
+              </a:spcAft>
+            </a:pPr>
+            <a:r>
+              <a:rPr sz="1400" b="0">
+                <a:solidFill>
+                  <a:srgbClr val="222222"/>
+                </a:solidFill>
+                <a:latin typeface="Yu Gothic"/>
+                <a:ea typeface="Yu Gothic"/>
+                <a:cs typeface="Yu Gothic"/>
+              </a:rPr>
+              <a:t>LLMを利用できる</a:t>
+            </a:r>
+          </a:p>
+        </p:txBody>
+      </p:sp>
+      <p:sp>
+        <p:nvSpPr>
+          <p:cNvPr id="7" name="Rounded Rectangle 6"/>
+          <p:cNvSpPr/>
+          <p:nvPr/>
+        </p:nvSpPr>
+        <p:spPr>
+          <a:xfrm>
+            <a:off x="8503920" y="1508760"/>
+            <a:ext cx="3108960" cy="2377440"/>
+          </a:xfrm>
+          <a:prstGeom prst="roundRect">
+            <a:avLst/>
+          </a:prstGeom>
+          <a:solidFill>
+            <a:srgbClr val="EFF3F7"/>
+          </a:solidFill>
+          <a:ln w="19050">
+            <a:solidFill>
+              <a:srgbClr val="1F3A5F"/>
+            </a:solidFill>
+          </a:ln>
+          <a:effectLst/>
+        </p:spPr>
+        <p:style>
+          <a:lnRef idx="1">
+            <a:schemeClr val="accent1"/>
+          </a:lnRef>
+          <a:fillRef idx="3">
+            <a:schemeClr val="accent1"/>
+          </a:fillRef>
+          <a:effectRef idx="2">
+            <a:schemeClr val="accent1"/>
+          </a:effectRef>
+          <a:fontRef idx="minor">
+            <a:schemeClr val="lt1"/>
+          </a:fontRef>
+        </p:style>
+        <p:txBody>
+          <a:bodyPr rtlCol="0" anchor="ctr" wrap="square" lIns="228600" rIns="228600" tIns="164592"/>
+          <a:lstStyle/>
+          <a:p>
+            <a:pPr algn="l">
+              <a:spcAft>
+                <a:spcPts val="800"/>
+              </a:spcAft>
+            </a:pPr>
+            <a:r>
+              <a:rPr sz="1800" b="1">
+                <a:solidFill>
+                  <a:srgbClr val="1F3A5F"/>
+                </a:solidFill>
+                <a:latin typeface="Yu Gothic"/>
+                <a:ea typeface="Yu Gothic"/>
+                <a:cs typeface="Yu Gothic"/>
+              </a:rPr>
+              <a:t>LLM / マルチエージェント</a:t>
+            </a:r>
+          </a:p>
+          <a:p>
+            <a:pPr algn="l">
+              <a:spcAft>
+                <a:spcPts val="500"/>
+              </a:spcAft>
+            </a:pPr>
+            <a:r>
+              <a:rPr sz="1400" b="0">
+                <a:solidFill>
+                  <a:srgbClr val="222222"/>
+                </a:solidFill>
+                <a:latin typeface="Yu Gothic"/>
+                <a:ea typeface="Yu Gothic"/>
+                <a:cs typeface="Yu Gothic"/>
+              </a:rPr>
+              <a:t>・複数AIによる対話</a:t>
+            </a:r>
+          </a:p>
+          <a:p>
+            <a:pPr algn="l">
+              <a:spcAft>
+                <a:spcPts val="500"/>
+              </a:spcAft>
+            </a:pPr>
+            <a:r>
+              <a:rPr sz="1400" b="0">
+                <a:solidFill>
+                  <a:srgbClr val="222222"/>
+                </a:solidFill>
+                <a:latin typeface="Yu Gothic"/>
+                <a:ea typeface="Yu Gothic"/>
+                <a:cs typeface="Yu Gothic"/>
+              </a:rPr>
+              <a:t>・主観情報の引き出し</a:t>
+            </a:r>
+          </a:p>
+          <a:p>
+            <a:pPr algn="l">
+              <a:spcAft>
+                <a:spcPts val="500"/>
+              </a:spcAft>
+            </a:pPr>
+            <a:r>
+              <a:rPr sz="1400" b="0">
+                <a:solidFill>
+                  <a:srgbClr val="222222"/>
+                </a:solidFill>
+                <a:latin typeface="Yu Gothic"/>
+                <a:ea typeface="Yu Gothic"/>
+                <a:cs typeface="Yu Gothic"/>
+              </a:rPr>
+              <a:t>・司会AIによる発言順の制御</a:t>
+            </a:r>
+          </a:p>
+          <a:p>
+            <a:pPr algn="l">
+              <a:spcAft>
+                <a:spcPts val="500"/>
+              </a:spcAft>
+            </a:pPr>
+            <a:r>
+              <a:rPr sz="1400" b="0">
+                <a:solidFill>
+                  <a:srgbClr val="222222"/>
+                </a:solidFill>
+                <a:latin typeface="Yu Gothic"/>
+                <a:ea typeface="Yu Gothic"/>
+                <a:cs typeface="Yu Gothic"/>
+              </a:rPr>
+              <a:t/>
+            </a:r>
+          </a:p>
+          <a:p>
+            <a:pPr algn="l">
+              <a:spcAft>
+                <a:spcPts val="500"/>
+              </a:spcAft>
+            </a:pPr>
+            <a:r>
+              <a:rPr sz="1400" b="0">
+                <a:solidFill>
+                  <a:srgbClr val="222222"/>
+                </a:solidFill>
+                <a:latin typeface="Yu Gothic"/>
+                <a:ea typeface="Yu Gothic"/>
+                <a:cs typeface="Yu Gothic"/>
+              </a:rPr>
+              <a:t>（外部API / 将来は院内）</a:t>
+            </a:r>
+          </a:p>
+        </p:txBody>
+      </p:sp>
+      <p:sp>
+        <p:nvSpPr>
+          <p:cNvPr id="8" name="Right Arrow 7"/>
+          <p:cNvSpPr/>
+          <p:nvPr/>
+        </p:nvSpPr>
+        <p:spPr>
+          <a:xfrm>
+            <a:off x="3886200" y="2468880"/>
+            <a:ext cx="502920" cy="411480"/>
+          </a:xfrm>
+          <a:prstGeom prst="rightArrow">
+            <a:avLst/>
+          </a:prstGeom>
+          <a:solidFill>
+            <a:srgbClr val="0E7C86"/>
+          </a:solidFill>
+          <a:ln>
+            <a:noFill/>
+          </a:ln>
+          <a:effectLst/>
+        </p:spPr>
+        <p:style>
+          <a:lnRef idx="1">
+            <a:schemeClr val="accent1"/>
+          </a:lnRef>
+          <a:fillRef idx="3">
+            <a:schemeClr val="accent1"/>
+          </a:fillRef>
+          <a:effectRef idx="2">
+            <a:schemeClr val="accent1"/>
+          </a:effectRef>
+          <a:fontRef idx="minor">
+            <a:schemeClr val="lt1"/>
+          </a:fontRef>
+        </p:style>
+        <p:txBody>
           <a:bodyPr rtlCol="0" anchor="ctr"/>
           <a:lstStyle/>
           <a:p>
+            <a:pPr algn="ctr"/>
+          </a:p>
+        </p:txBody>
+      </p:sp>
+      <p:sp>
+        <p:nvSpPr>
+          <p:cNvPr id="9" name="Right Arrow 8"/>
+          <p:cNvSpPr/>
+          <p:nvPr/>
+        </p:nvSpPr>
+        <p:spPr>
+          <a:xfrm>
+            <a:off x="7909560" y="2468880"/>
+            <a:ext cx="502920" cy="411480"/>
+          </a:xfrm>
+          <a:prstGeom prst="rightArrow">
+            <a:avLst/>
+          </a:prstGeom>
+          <a:solidFill>
+            <a:srgbClr val="0E7C86"/>
+          </a:solidFill>
+          <a:ln>
+            <a:noFill/>
+          </a:ln>
+          <a:effectLst/>
+        </p:spPr>
+        <p:style>
+          <a:lnRef idx="1">
+            <a:schemeClr val="accent1"/>
+          </a:lnRef>
+          <a:fillRef idx="3">
+            <a:schemeClr val="accent1"/>
+          </a:fillRef>
+          <a:effectRef idx="2">
+            <a:schemeClr val="accent1"/>
+          </a:effectRef>
+          <a:fontRef idx="minor">
+            <a:schemeClr val="lt1"/>
+          </a:fontRef>
+        </p:style>
+        <p:txBody>
+          <a:bodyPr rtlCol="0" anchor="ctr"/>
+          <a:lstStyle/>
+          <a:p>
+            <a:pPr algn="ctr"/>
+          </a:p>
+        </p:txBody>
+      </p:sp>
+      <p:sp>
+        <p:nvSpPr>
+          <p:cNvPr id="10" name="Rounded Rectangle 9"/>
+          <p:cNvSpPr/>
+          <p:nvPr/>
+        </p:nvSpPr>
+        <p:spPr>
+          <a:xfrm>
+            <a:off x="548640" y="4160520"/>
+            <a:ext cx="11064240" cy="1005840"/>
+          </a:xfrm>
+          <a:prstGeom prst="roundRect">
+            <a:avLst/>
+          </a:prstGeom>
+          <a:solidFill>
+            <a:srgbClr val="1F3A5F"/>
+          </a:solidFill>
+          <a:ln>
+            <a:noFill/>
+          </a:ln>
+          <a:effectLst/>
+        </p:spPr>
+        <p:style>
+          <a:lnRef idx="1">
+            <a:schemeClr val="accent1"/>
+          </a:lnRef>
+          <a:fillRef idx="3">
+            <a:schemeClr val="accent1"/>
+          </a:fillRef>
+          <a:effectRef idx="2">
+            <a:schemeClr val="accent1"/>
+          </a:effectRef>
+          <a:fontRef idx="minor">
+            <a:schemeClr val="lt1"/>
+          </a:fontRef>
+        </p:style>
+        <p:txBody>
+          <a:bodyPr rtlCol="0" anchor="ctr" wrap="square"/>
+          <a:lstStyle/>
+          <a:p>
             <a:pPr algn="ctr">
               <a:spcAft>
                 <a:spcPts val="600"/>
               </a:spcAft>
             </a:pPr>
             <a:r>
-              <a:rPr sz="4000" b="1">
+              <a:rPr sz="2200" b="1">
                 <a:solidFill>
                   <a:srgbClr val="FFFFFF"/>
                 </a:solidFill>
@@ -7869,7 +8676,48 @@
                 <a:ea typeface="Yu Gothic"/>
                 <a:cs typeface="Yu Gothic"/>
               </a:rPr>
-              <a:t>ご清聴ありがとうございました</a:t>
+              <a:t>本研究は、研究室の既存研究にLLMを接続する共通の入口（ゲートウェイ）になり得る</a:t>
+            </a:r>
+          </a:p>
+        </p:txBody>
+      </p:sp>
+      <p:sp>
+        <p:nvSpPr>
+          <p:cNvPr id="11" name="TextBox 10"/>
+          <p:cNvSpPr txBox="1"/>
+          <p:nvPr/>
+        </p:nvSpPr>
+        <p:spPr>
+          <a:xfrm>
+            <a:off x="548640" y="5349240"/>
+            <a:ext cx="11064240" cy="548640"/>
+          </a:xfrm>
+          <a:prstGeom prst="rect">
+            <a:avLst/>
+          </a:prstGeom>
+          <a:noFill/>
+        </p:spPr>
+        <p:txBody>
+          <a:bodyPr wrap="square" anchor="t">
+            <a:spAutoFit/>
+          </a:bodyPr>
+          <a:lstStyle/>
+          <a:p>
+            <a:pPr algn="ctr">
+              <a:spcAft>
+                <a:spcPts val="600"/>
+              </a:spcAft>
+            </a:pPr>
+            <a:r>
+              <a:rPr sz="1500" b="0">
+                <a:solidFill>
+                  <a:srgbClr val="C0392B"/>
+                </a:solidFill>
+                <a:latin typeface="Yu Gothic"/>
+                <a:ea typeface="Yu Gothic"/>
+                <a:cs typeface="Yu Gothic"/>
+              </a:rPr>
+              <a:t>※ センサーデータとの統合は中期の目標。本研究の完了範囲は接続基盤の構築まで。</a:t>
             </a:r>
           </a:p>
         </p:txBody>
@@ -7900,6 +8748,83 @@
         </p:nvSpPr>
         <p:spPr>
           <a:xfrm>
+            <a:off x="0" y="2468880"/>
+            <a:ext cx="12191695" cy="1920240"/>
+          </a:xfrm>
+          <a:prstGeom prst="rect">
+            <a:avLst/>
+          </a:prstGeom>
+          <a:solidFill>
+            <a:srgbClr val="1F3A5F"/>
+          </a:solidFill>
+          <a:ln>
+            <a:noFill/>
+          </a:ln>
+          <a:effectLst/>
+        </p:spPr>
+        <p:style>
+          <a:lnRef idx="1">
+            <a:schemeClr val="accent1"/>
+          </a:lnRef>
+          <a:fillRef idx="3">
+            <a:schemeClr val="accent1"/>
+          </a:fillRef>
+          <a:effectRef idx="2">
+            <a:schemeClr val="accent1"/>
+          </a:effectRef>
+          <a:fontRef idx="minor">
+            <a:schemeClr val="lt1"/>
+          </a:fontRef>
+        </p:style>
+        <p:txBody>
+          <a:bodyPr rtlCol="0" anchor="ctr"/>
+          <a:lstStyle/>
+          <a:p>
+            <a:pPr algn="ctr">
+              <a:spcAft>
+                <a:spcPts val="600"/>
+              </a:spcAft>
+            </a:pPr>
+            <a:r>
+              <a:rPr sz="4000" b="1">
+                <a:solidFill>
+                  <a:srgbClr val="FFFFFF"/>
+                </a:solidFill>
+                <a:latin typeface="Yu Gothic"/>
+                <a:ea typeface="Yu Gothic"/>
+                <a:cs typeface="Yu Gothic"/>
+              </a:rPr>
+              <a:t>ご清聴ありがとうございました</a:t>
+            </a:r>
+          </a:p>
+        </p:txBody>
+      </p:sp>
+    </p:spTree>
+  </p:cSld>
+  <p:clrMapOvr>
+    <a:masterClrMapping/>
+  </p:clrMapOvr>
+</p:sld>
+</file>
+
+<file path=ppt/slides/slide16.xml><?xml version="1.0" encoding="utf-8"?>
+<p:sld xmlns:a="http://schemas.openxmlformats.org/drawingml/2006/main" xmlns:p="http://schemas.openxmlformats.org/presentationml/2006/main" xmlns:r="http://schemas.openxmlformats.org/officeDocument/2006/relationships">
+  <p:cSld>
+    <p:spTree>
+      <p:nvGrpSpPr>
+        <p:cNvPr id="1" name=""/>
+        <p:cNvGrpSpPr/>
+        <p:nvPr/>
+      </p:nvGrpSpPr>
+      <p:grpSpPr/>
+      <p:sp>
+        <p:nvSpPr>
+          <p:cNvPr id="2" name="Rectangle 1"/>
+          <p:cNvSpPr/>
+          <p:nvPr/>
+        </p:nvSpPr>
+        <p:spPr>
+          <a:xfrm>
             <a:off x="0" y="0"/>
             <a:ext cx="12191695" cy="868680"/>
           </a:xfrm>
@@ -8090,7 +9015,7 @@
 </p:sld>
 </file>
 
-<file path=ppt/slides/slide16.xml><?xml version="1.0" encoding="utf-8"?>
+<file path=ppt/slides/slide17.xml><?xml version="1.0" encoding="utf-8"?>
 <p:sld xmlns:a="http://schemas.openxmlformats.org/drawingml/2006/main" xmlns:p="http://schemas.openxmlformats.org/presentationml/2006/main" xmlns:r="http://schemas.openxmlformats.org/officeDocument/2006/relationships">
   <p:cSld>
     <p:spTree>
@@ -8232,7 +9157,7 @@
 </p:sld>
 </file>
 
-<file path=ppt/slides/slide17.xml><?xml version="1.0" encoding="utf-8"?>
+<file path=ppt/slides/slide18.xml><?xml version="1.0" encoding="utf-8"?>
 <p:sld xmlns:a="http://schemas.openxmlformats.org/drawingml/2006/main" xmlns:p="http://schemas.openxmlformats.org/presentationml/2006/main" xmlns:r="http://schemas.openxmlformats.org/officeDocument/2006/relationships">
   <p:cSld>
     <p:spTree>
@@ -8697,7 +9622,7 @@
 </p:sld>
 </file>
 
-<file path=ppt/slides/slide18.xml><?xml version="1.0" encoding="utf-8"?>
+<file path=ppt/slides/slide19.xml><?xml version="1.0" encoding="utf-8"?>
 <p:sld xmlns:a="http://schemas.openxmlformats.org/drawingml/2006/main" xmlns:p="http://schemas.openxmlformats.org/presentationml/2006/main" xmlns:r="http://schemas.openxmlformats.org/officeDocument/2006/relationships">
   <p:cSld>
     <p:spTree>
@@ -9376,7 +10301,274 @@
 </p:sld>
 </file>
 
-<file path=ppt/slides/slide19.xml><?xml version="1.0" encoding="utf-8"?>
+<file path=ppt/slides/slide2.xml><?xml version="1.0" encoding="utf-8"?>
+<p:sld xmlns:a="http://schemas.openxmlformats.org/drawingml/2006/main" xmlns:p="http://schemas.openxmlformats.org/presentationml/2006/main" xmlns:r="http://schemas.openxmlformats.org/officeDocument/2006/relationships">
+  <p:cSld>
+    <p:spTree>
+      <p:nvGrpSpPr>
+        <p:cNvPr id="1" name=""/>
+        <p:cNvGrpSpPr/>
+        <p:nvPr/>
+      </p:nvGrpSpPr>
+      <p:grpSpPr/>
+      <p:sp>
+        <p:nvSpPr>
+          <p:cNvPr id="2" name="Rectangle 1"/>
+          <p:cNvSpPr/>
+          <p:nvPr/>
+        </p:nvSpPr>
+        <p:spPr>
+          <a:xfrm>
+            <a:off x="0" y="0"/>
+            <a:ext cx="12191695" cy="868680"/>
+          </a:xfrm>
+          <a:prstGeom prst="rect">
+            <a:avLst/>
+          </a:prstGeom>
+          <a:solidFill>
+            <a:srgbClr val="1F3A5F"/>
+          </a:solidFill>
+          <a:ln>
+            <a:noFill/>
+          </a:ln>
+          <a:effectLst/>
+        </p:spPr>
+        <p:style>
+          <a:lnRef idx="1">
+            <a:schemeClr val="accent1"/>
+          </a:lnRef>
+          <a:fillRef idx="3">
+            <a:schemeClr val="accent1"/>
+          </a:fillRef>
+          <a:effectRef idx="2">
+            <a:schemeClr val="accent1"/>
+          </a:effectRef>
+          <a:fontRef idx="minor">
+            <a:schemeClr val="lt1"/>
+          </a:fontRef>
+        </p:style>
+        <p:txBody>
+          <a:bodyPr rtlCol="0" anchor="ctr" lIns="457200"/>
+          <a:lstStyle/>
+          <a:p>
+            <a:pPr algn="l">
+              <a:spcAft>
+                <a:spcPts val="600"/>
+              </a:spcAft>
+            </a:pPr>
+            <a:r>
+              <a:rPr sz="3000" b="1">
+                <a:solidFill>
+                  <a:srgbClr val="FFFFFF"/>
+                </a:solidFill>
+                <a:latin typeface="Yu Gothic"/>
+                <a:ea typeface="Yu Gothic"/>
+                <a:cs typeface="Yu Gothic"/>
+              </a:rPr>
+              <a:t>目次</a:t>
+            </a:r>
+          </a:p>
+        </p:txBody>
+      </p:sp>
+      <p:sp>
+        <p:nvSpPr>
+          <p:cNvPr id="3" name="TextBox 2"/>
+          <p:cNvSpPr txBox="1"/>
+          <p:nvPr/>
+        </p:nvSpPr>
+        <p:spPr>
+          <a:xfrm>
+            <a:off x="11277295" y="6355080"/>
+            <a:ext cx="640080" cy="365760"/>
+          </a:xfrm>
+          <a:prstGeom prst="rect">
+            <a:avLst/>
+          </a:prstGeom>
+          <a:noFill/>
+        </p:spPr>
+        <p:txBody>
+          <a:bodyPr wrap="square" anchor="t">
+            <a:spAutoFit/>
+          </a:bodyPr>
+          <a:lstStyle/>
+          <a:p>
+            <a:pPr algn="r">
+              <a:spcAft>
+                <a:spcPts val="600"/>
+              </a:spcAft>
+            </a:pPr>
+            <a:r>
+              <a:rPr sz="1400" b="0">
+                <a:solidFill>
+                  <a:srgbClr val="595A5C"/>
+                </a:solidFill>
+                <a:latin typeface="Yu Gothic"/>
+                <a:ea typeface="Yu Gothic"/>
+                <a:cs typeface="Yu Gothic"/>
+              </a:rPr>
+              <a:t>1</a:t>
+            </a:r>
+          </a:p>
+        </p:txBody>
+      </p:sp>
+      <p:sp>
+        <p:nvSpPr>
+          <p:cNvPr id="4" name="TextBox 3"/>
+          <p:cNvSpPr txBox="1"/>
+          <p:nvPr/>
+        </p:nvSpPr>
+        <p:spPr>
+          <a:xfrm>
+            <a:off x="731520" y="1554480"/>
+            <a:ext cx="10698480" cy="4937760"/>
+          </a:xfrm>
+          <a:prstGeom prst="rect">
+            <a:avLst/>
+          </a:prstGeom>
+          <a:noFill/>
+        </p:spPr>
+        <p:txBody>
+          <a:bodyPr wrap="square" anchor="t">
+            <a:spAutoFit/>
+          </a:bodyPr>
+          <a:lstStyle/>
+          <a:p>
+            <a:pPr algn="l">
+              <a:spcAft>
+                <a:spcPts val="2000"/>
+              </a:spcAft>
+            </a:pPr>
+            <a:r>
+              <a:rPr sz="2600" b="0">
+                <a:solidFill>
+                  <a:srgbClr val="222222"/>
+                </a:solidFill>
+                <a:latin typeface="Yu Gothic"/>
+                <a:ea typeface="Yu Gothic"/>
+                <a:cs typeface="Yu Gothic"/>
+              </a:rPr>
+              <a:t>1.  研究背景</a:t>
+            </a:r>
+          </a:p>
+          <a:p>
+            <a:pPr algn="l">
+              <a:spcAft>
+                <a:spcPts val="2000"/>
+              </a:spcAft>
+            </a:pPr>
+            <a:r>
+              <a:rPr sz="2600" b="0">
+                <a:solidFill>
+                  <a:srgbClr val="222222"/>
+                </a:solidFill>
+                <a:latin typeface="Yu Gothic"/>
+                <a:ea typeface="Yu Gothic"/>
+                <a:cs typeface="Yu Gothic"/>
+              </a:rPr>
+              <a:t>2.  問題点</a:t>
+            </a:r>
+          </a:p>
+          <a:p>
+            <a:pPr algn="l">
+              <a:spcAft>
+                <a:spcPts val="2000"/>
+              </a:spcAft>
+            </a:pPr>
+            <a:r>
+              <a:rPr sz="2600" b="0">
+                <a:solidFill>
+                  <a:srgbClr val="222222"/>
+                </a:solidFill>
+                <a:latin typeface="Yu Gothic"/>
+                <a:ea typeface="Yu Gothic"/>
+                <a:cs typeface="Yu Gothic"/>
+              </a:rPr>
+              <a:t>3.  研究目的</a:t>
+            </a:r>
+          </a:p>
+          <a:p>
+            <a:pPr algn="l">
+              <a:spcAft>
+                <a:spcPts val="2000"/>
+              </a:spcAft>
+            </a:pPr>
+            <a:r>
+              <a:rPr sz="2600" b="0">
+                <a:solidFill>
+                  <a:srgbClr val="222222"/>
+                </a:solidFill>
+                <a:latin typeface="Yu Gothic"/>
+                <a:ea typeface="Yu Gothic"/>
+                <a:cs typeface="Yu Gothic"/>
+              </a:rPr>
+              <a:t>4.  システム構成</a:t>
+            </a:r>
+          </a:p>
+          <a:p>
+            <a:pPr algn="l">
+              <a:spcAft>
+                <a:spcPts val="2000"/>
+              </a:spcAft>
+            </a:pPr>
+            <a:r>
+              <a:rPr sz="2600" b="0">
+                <a:solidFill>
+                  <a:srgbClr val="222222"/>
+                </a:solidFill>
+                <a:latin typeface="Yu Gothic"/>
+                <a:ea typeface="Yu Gothic"/>
+                <a:cs typeface="Yu Gothic"/>
+              </a:rPr>
+              <a:t>5.  現在までの進捗　― 動作映像 ―</a:t>
+            </a:r>
+          </a:p>
+          <a:p>
+            <a:pPr algn="l">
+              <a:spcAft>
+                <a:spcPts val="2000"/>
+              </a:spcAft>
+            </a:pPr>
+            <a:r>
+              <a:rPr sz="2600" b="0">
+                <a:solidFill>
+                  <a:srgbClr val="222222"/>
+                </a:solidFill>
+                <a:latin typeface="Yu Gothic"/>
+                <a:ea typeface="Yu Gothic"/>
+                <a:cs typeface="Yu Gothic"/>
+              </a:rPr>
+              <a:t>6.  定量評価</a:t>
+            </a:r>
+          </a:p>
+          <a:p>
+            <a:pPr algn="l">
+              <a:spcAft>
+                <a:spcPts val="2000"/>
+              </a:spcAft>
+            </a:pPr>
+            <a:r>
+              <a:rPr sz="2600" b="0">
+                <a:solidFill>
+                  <a:srgbClr val="222222"/>
+                </a:solidFill>
+                <a:latin typeface="Yu Gothic"/>
+                <a:ea typeface="Yu Gothic"/>
+                <a:cs typeface="Yu Gothic"/>
+              </a:rPr>
+              <a:t>7.  今後の方針と本研究の位置づけ</a:t>
+            </a:r>
+          </a:p>
+        </p:txBody>
+      </p:sp>
+    </p:spTree>
+  </p:cSld>
+  <p:clrMapOvr>
+    <a:masterClrMapping/>
+  </p:clrMapOvr>
+</p:sld>
+</file>
+
+<file path=ppt/slides/slide20.xml><?xml version="1.0" encoding="utf-8"?>
 <p:sld xmlns:a="http://schemas.openxmlformats.org/drawingml/2006/main" xmlns:p="http://schemas.openxmlformats.org/presentationml/2006/main" xmlns:r="http://schemas.openxmlformats.org/officeDocument/2006/relationships">
   <p:cSld>
     <p:spTree>
@@ -9780,274 +10972,7 @@
 </p:sld>
 </file>
 
-<file path=ppt/slides/slide2.xml><?xml version="1.0" encoding="utf-8"?>
-<p:sld xmlns:a="http://schemas.openxmlformats.org/drawingml/2006/main" xmlns:p="http://schemas.openxmlformats.org/presentationml/2006/main" xmlns:r="http://schemas.openxmlformats.org/officeDocument/2006/relationships">
-  <p:cSld>
-    <p:spTree>
-      <p:nvGrpSpPr>
-        <p:cNvPr id="1" name=""/>
-        <p:cNvGrpSpPr/>
-        <p:nvPr/>
-      </p:nvGrpSpPr>
-      <p:grpSpPr/>
-      <p:sp>
-        <p:nvSpPr>
-          <p:cNvPr id="2" name="Rectangle 1"/>
-          <p:cNvSpPr/>
-          <p:nvPr/>
-        </p:nvSpPr>
-        <p:spPr>
-          <a:xfrm>
-            <a:off x="0" y="0"/>
-            <a:ext cx="12191695" cy="868680"/>
-          </a:xfrm>
-          <a:prstGeom prst="rect">
-            <a:avLst/>
-          </a:prstGeom>
-          <a:solidFill>
-            <a:srgbClr val="1F3A5F"/>
-          </a:solidFill>
-          <a:ln>
-            <a:noFill/>
-          </a:ln>
-          <a:effectLst/>
-        </p:spPr>
-        <p:style>
-          <a:lnRef idx="1">
-            <a:schemeClr val="accent1"/>
-          </a:lnRef>
-          <a:fillRef idx="3">
-            <a:schemeClr val="accent1"/>
-          </a:fillRef>
-          <a:effectRef idx="2">
-            <a:schemeClr val="accent1"/>
-          </a:effectRef>
-          <a:fontRef idx="minor">
-            <a:schemeClr val="lt1"/>
-          </a:fontRef>
-        </p:style>
-        <p:txBody>
-          <a:bodyPr rtlCol="0" anchor="ctr" lIns="457200"/>
-          <a:lstStyle/>
-          <a:p>
-            <a:pPr algn="l">
-              <a:spcAft>
-                <a:spcPts val="600"/>
-              </a:spcAft>
-            </a:pPr>
-            <a:r>
-              <a:rPr sz="3000" b="1">
-                <a:solidFill>
-                  <a:srgbClr val="FFFFFF"/>
-                </a:solidFill>
-                <a:latin typeface="Yu Gothic"/>
-                <a:ea typeface="Yu Gothic"/>
-                <a:cs typeface="Yu Gothic"/>
-              </a:rPr>
-              <a:t>目次</a:t>
-            </a:r>
-          </a:p>
-        </p:txBody>
-      </p:sp>
-      <p:sp>
-        <p:nvSpPr>
-          <p:cNvPr id="3" name="TextBox 2"/>
-          <p:cNvSpPr txBox="1"/>
-          <p:nvPr/>
-        </p:nvSpPr>
-        <p:spPr>
-          <a:xfrm>
-            <a:off x="11277295" y="6355080"/>
-            <a:ext cx="640080" cy="365760"/>
-          </a:xfrm>
-          <a:prstGeom prst="rect">
-            <a:avLst/>
-          </a:prstGeom>
-          <a:noFill/>
-        </p:spPr>
-        <p:txBody>
-          <a:bodyPr wrap="square" anchor="t">
-            <a:spAutoFit/>
-          </a:bodyPr>
-          <a:lstStyle/>
-          <a:p>
-            <a:pPr algn="r">
-              <a:spcAft>
-                <a:spcPts val="600"/>
-              </a:spcAft>
-            </a:pPr>
-            <a:r>
-              <a:rPr sz="1400" b="0">
-                <a:solidFill>
-                  <a:srgbClr val="595A5C"/>
-                </a:solidFill>
-                <a:latin typeface="Yu Gothic"/>
-                <a:ea typeface="Yu Gothic"/>
-                <a:cs typeface="Yu Gothic"/>
-              </a:rPr>
-              <a:t>1</a:t>
-            </a:r>
-          </a:p>
-        </p:txBody>
-      </p:sp>
-      <p:sp>
-        <p:nvSpPr>
-          <p:cNvPr id="4" name="TextBox 3"/>
-          <p:cNvSpPr txBox="1"/>
-          <p:nvPr/>
-        </p:nvSpPr>
-        <p:spPr>
-          <a:xfrm>
-            <a:off x="731520" y="1554480"/>
-            <a:ext cx="10698480" cy="4937760"/>
-          </a:xfrm>
-          <a:prstGeom prst="rect">
-            <a:avLst/>
-          </a:prstGeom>
-          <a:noFill/>
-        </p:spPr>
-        <p:txBody>
-          <a:bodyPr wrap="square" anchor="t">
-            <a:spAutoFit/>
-          </a:bodyPr>
-          <a:lstStyle/>
-          <a:p>
-            <a:pPr algn="l">
-              <a:spcAft>
-                <a:spcPts val="2000"/>
-              </a:spcAft>
-            </a:pPr>
-            <a:r>
-              <a:rPr sz="2600" b="0">
-                <a:solidFill>
-                  <a:srgbClr val="222222"/>
-                </a:solidFill>
-                <a:latin typeface="Yu Gothic"/>
-                <a:ea typeface="Yu Gothic"/>
-                <a:cs typeface="Yu Gothic"/>
-              </a:rPr>
-              <a:t>1.  研究背景</a:t>
-            </a:r>
-          </a:p>
-          <a:p>
-            <a:pPr algn="l">
-              <a:spcAft>
-                <a:spcPts val="2000"/>
-              </a:spcAft>
-            </a:pPr>
-            <a:r>
-              <a:rPr sz="2600" b="0">
-                <a:solidFill>
-                  <a:srgbClr val="222222"/>
-                </a:solidFill>
-                <a:latin typeface="Yu Gothic"/>
-                <a:ea typeface="Yu Gothic"/>
-                <a:cs typeface="Yu Gothic"/>
-              </a:rPr>
-              <a:t>2.  問題点</a:t>
-            </a:r>
-          </a:p>
-          <a:p>
-            <a:pPr algn="l">
-              <a:spcAft>
-                <a:spcPts val="2000"/>
-              </a:spcAft>
-            </a:pPr>
-            <a:r>
-              <a:rPr sz="2600" b="0">
-                <a:solidFill>
-                  <a:srgbClr val="222222"/>
-                </a:solidFill>
-                <a:latin typeface="Yu Gothic"/>
-                <a:ea typeface="Yu Gothic"/>
-                <a:cs typeface="Yu Gothic"/>
-              </a:rPr>
-              <a:t>3.  研究目的</a:t>
-            </a:r>
-          </a:p>
-          <a:p>
-            <a:pPr algn="l">
-              <a:spcAft>
-                <a:spcPts val="2000"/>
-              </a:spcAft>
-            </a:pPr>
-            <a:r>
-              <a:rPr sz="2600" b="0">
-                <a:solidFill>
-                  <a:srgbClr val="222222"/>
-                </a:solidFill>
-                <a:latin typeface="Yu Gothic"/>
-                <a:ea typeface="Yu Gothic"/>
-                <a:cs typeface="Yu Gothic"/>
-              </a:rPr>
-              <a:t>4.  システム構成</a:t>
-            </a:r>
-          </a:p>
-          <a:p>
-            <a:pPr algn="l">
-              <a:spcAft>
-                <a:spcPts val="2000"/>
-              </a:spcAft>
-            </a:pPr>
-            <a:r>
-              <a:rPr sz="2600" b="0">
-                <a:solidFill>
-                  <a:srgbClr val="222222"/>
-                </a:solidFill>
-                <a:latin typeface="Yu Gothic"/>
-                <a:ea typeface="Yu Gothic"/>
-                <a:cs typeface="Yu Gothic"/>
-              </a:rPr>
-              <a:t>5.  現在までの進捗　― 動作映像 ―</a:t>
-            </a:r>
-          </a:p>
-          <a:p>
-            <a:pPr algn="l">
-              <a:spcAft>
-                <a:spcPts val="2000"/>
-              </a:spcAft>
-            </a:pPr>
-            <a:r>
-              <a:rPr sz="2600" b="0">
-                <a:solidFill>
-                  <a:srgbClr val="222222"/>
-                </a:solidFill>
-                <a:latin typeface="Yu Gothic"/>
-                <a:ea typeface="Yu Gothic"/>
-                <a:cs typeface="Yu Gothic"/>
-              </a:rPr>
-              <a:t>6.  定量評価</a:t>
-            </a:r>
-          </a:p>
-          <a:p>
-            <a:pPr algn="l">
-              <a:spcAft>
-                <a:spcPts val="2000"/>
-              </a:spcAft>
-            </a:pPr>
-            <a:r>
-              <a:rPr sz="2600" b="0">
-                <a:solidFill>
-                  <a:srgbClr val="222222"/>
-                </a:solidFill>
-                <a:latin typeface="Yu Gothic"/>
-                <a:ea typeface="Yu Gothic"/>
-                <a:cs typeface="Yu Gothic"/>
-              </a:rPr>
-              <a:t>7.  今後の方針</a:t>
-            </a:r>
-          </a:p>
-        </p:txBody>
-      </p:sp>
-    </p:spTree>
-  </p:cSld>
-  <p:clrMapOvr>
-    <a:masterClrMapping/>
-  </p:clrMapOvr>
-</p:sld>
-</file>
-
-<file path=ppt/slides/slide20.xml><?xml version="1.0" encoding="utf-8"?>
+<file path=ppt/slides/slide21.xml><?xml version="1.0" encoding="utf-8"?>
 <p:sld xmlns:a="http://schemas.openxmlformats.org/drawingml/2006/main" xmlns:p="http://schemas.openxmlformats.org/presentationml/2006/main" xmlns:r="http://schemas.openxmlformats.org/officeDocument/2006/relationships">
   <p:cSld>
     <p:spTree>
@@ -10774,7 +11699,7 @@
 </p:sld>
 </file>
 
-<file path=ppt/slides/slide21.xml><?xml version="1.0" encoding="utf-8"?>
+<file path=ppt/slides/slide22.xml><?xml version="1.0" encoding="utf-8"?>
 <p:sld xmlns:a="http://schemas.openxmlformats.org/drawingml/2006/main" xmlns:p="http://schemas.openxmlformats.org/presentationml/2006/main" xmlns:r="http://schemas.openxmlformats.org/officeDocument/2006/relationships">
   <p:cSld>
     <p:spTree>

--- a/docs/export/中間発表_柴尾.pptx
+++ b/docs/export/中間発表_柴尾.pptx
@@ -25,8 +25,6 @@
     <p:sldId id="273" r:id="rId25"/>
     <p:sldId id="274" r:id="rId26"/>
     <p:sldId id="275" r:id="rId27"/>
-    <p:sldId id="276" r:id="rId28"/>
-    <p:sldId id="277" r:id="rId29"/>
   </p:sldIdLst>
   <p:sldSz cx="12191695" cy="6858000" type="screen4x3"/>
   <p:notesSz cx="6858000" cy="9144000"/>
@@ -523,7 +521,7 @@
           <a:lstStyle/>
           <a:p>
             <a:r>
-              <a:t>松田研究室の柴尾です。「LabVIEWと大規模言語モデルを接続する、マルチエージェント対話基盤の構築」について発表します。</a:t>
+              <a:t>松田研究室の柴尾です。「既存計測系と大規模言語モデルを繋ぐゲートウェイの構築、LabVIEWによる複数AI対話の実現」について発表します。</a:t>
             </a:r>
           </a:p>
         </p:txBody>
@@ -593,22 +591,22 @@
           <a:lstStyle/>
           <a:p>
             <a:r>
-              <a:t>こちらが今回の中心です。LabVIEWから1回送信するだけで、3体のAIが順番に発言します。</a:t>
-            </a:r>
-          </a:p>
-          <a:p>
-            <a:r>
-              <a:t>（再生）入力するのは、患者さんの感想を想定した1文だけです。実行すると、サーバー側でAIが順番に呼ばれていきます。ログを見ると、3回のやり取りが順に行われているのが分かります。</a:t>
-            </a:r>
-          </a:p>
-          <a:p>
-            <a:r>
-              <a:t>結果がこちらです。注目していただきたいのは、2体目が「ただし」と受けている点です。3体に同じ質問を投げて答えを並べたのではなく、前の発言を読んだうえで発言しているので、内容が重複せず、慎重な視点や発想を広げる視点が加わっています。</a:t>
-            </a:r>
-          </a:p>
-          <a:p>
-            <a:r>
-              <a:t>これは各AIに直前までの発言を文脈として渡し、既出の意見を繰り返さないよう指示しているためです。将来ここに専門領域ごとの役割を割り当てることで、多角的な評価につなげられると考えています。</a:t>
+              <a:t>定量評価として、応答時間を計測しました。</a:t>
+            </a:r>
+          </a:p>
+          <a:p>
+            <a:r>
+              <a:t>AIが3体の場合で約6.3秒です。内訳を見ると、自作サーバー側の処理は7ミリ秒で、残りはすべてLLM側の応答待ちでした。つまり遅延の原因はほぼ外部APIであり、自作部分のオーバーヘッドは無視できる水準です。</a:t>
+            </a:r>
+          </a:p>
+          <a:p>
+            <a:r>
+              <a:t>応答時間は発言数にほぼ比例して伸びます。ただし3体が最適という意味ではなく、この数字は次にお話しする構成の比較で材料として使います。</a:t>
+            </a:r>
+          </a:p>
+          <a:p>
+            <a:r>
+              <a:t>なお、LabVIEWの通信タイムアウトは既定で10秒のため、3体だと危険な水準です。これは実装側で延長して対応しています。</a:t>
             </a:r>
           </a:p>
         </p:txBody>
@@ -678,22 +676,22 @@
           <a:lstStyle/>
           <a:p>
             <a:r>
-              <a:t>3つ目は、このサーバーが他のPCでも動くかという検証です。</a:t>
-            </a:r>
-          </a:p>
-          <a:p>
-            <a:r>
-              <a:t>研究室の資産として引き継げることが重要なので、Dockerで環境ごと固めました。</a:t>
-            </a:r>
-          </a:p>
-          <a:p>
-            <a:r>
-              <a:t>（再生）リポジトリをZIPでダウンロードした状態から、コマンド1行で起動しています。Node.jsもGitもインストールしていません。起動後、そのままAIの応答まで通ることが確認できます。</a:t>
-            </a:r>
-          </a:p>
-          <a:p>
-            <a:r>
-              <a:t>これにより、他のメンバーのPCでも、また数年後に引き継ぐ場合でも、同じ環境を再現できます。</a:t>
+              <a:t>ここまでお見せしたのは3体構成ですが、3体が最適だと考えているわけではありません。現在の構成は比較条件の一つです。</a:t>
+            </a:r>
+          </a:p>
+          <a:p>
+            <a:r>
+              <a:t>最終的には、この表のA〜Dを比較します。条件Aは単体AI、条件Bは1体に複数のペルソナ、条件Cは独立した複数のLLM、条件Dは司会AIによる動的な制御です。</a:t>
+            </a:r>
+          </a:p>
+          <a:p>
+            <a:r>
+              <a:t>今回の動作映像は条件Bにあたります。同一のモデルに3つの異なるペルソナを与えて固定順で回しているためです。エージェントごとにモデルを指定できる構造にしてあるので、条件Cへはコードを変えずに移行できます。</a:t>
+            </a:r>
+          </a:p>
+          <a:p>
+            <a:r>
+              <a:t>比較で見たいのは、重複のない多面的な意見が得られるか、応答時間とのつり合い、そして患者の負担にならない対話の長さです。</a:t>
             </a:r>
           </a:p>
         </p:txBody>
@@ -763,22 +761,22 @@
           <a:lstStyle/>
           <a:p>
             <a:r>
-              <a:t>定量評価として、応答時間を計測しました。</a:t>
-            </a:r>
-          </a:p>
-          <a:p>
-            <a:r>
-              <a:t>AIが3体の場合で約6.3秒です。内訳を見ると、自作サーバー側の処理は7ミリ秒で、残りはすべてLLM側の応答待ちでした。つまり遅延の原因はほぼ外部APIであり、自作部分のオーバーヘッドは無視できる水準です。</a:t>
-            </a:r>
-          </a:p>
-          <a:p>
-            <a:r>
-              <a:t>AIの数にほぼ比例して伸びるため、実際の対話では3体程度が現実的だと考えています。</a:t>
-            </a:r>
-          </a:p>
-          <a:p>
-            <a:r>
-              <a:t>なお、LabVIEWの通信タイムアウトは既定で10秒のため、3体だと危険な水準です。これは実装側で延長して対応しています。</a:t>
+              <a:t>今後の方針です。</a:t>
+            </a:r>
+          </a:p>
+          <a:p>
+            <a:r>
+              <a:t>本研究で取り組む範囲は、図の「次段階」までです。まず段階Cとして司会役のAIを導入し、文脈に応じて次に話すAIを決めることで、発言の偏りを制御したいと考えています。</a:t>
+            </a:r>
+          </a:p>
+          <a:p>
+            <a:r>
+              <a:t>ただし、どのような視点のAIを揃えるべきか、どう質問を投げれば主観を引き出せるかは、臨床的な知見が必要な部分です。ここは相談しながら進めたいと考えています。</a:t>
+            </a:r>
+          </a:p>
+          <a:p>
+            <a:r>
+              <a:t>中期以降は本研究の完了範囲の外で、発展の方向性としてお示ししているものです。その中期の位置づけを、次のスライドで説明します。</a:t>
             </a:r>
           </a:p>
         </p:txBody>
@@ -848,91 +846,6 @@
           <a:lstStyle/>
           <a:p>
             <a:r>
-              <a:t>今後の方針です。</a:t>
-            </a:r>
-          </a:p>
-          <a:p>
-            <a:r>
-              <a:t>本研究で取り組む範囲は、図の「次段階」までです。まず段階Cとして司会役のAIを導入し、文脈に応じて次に話すAIを決めることで、発言の偏りを制御したいと考えています。</a:t>
-            </a:r>
-          </a:p>
-          <a:p>
-            <a:r>
-              <a:t>ただし、どのような視点のAIを揃えるべきか、どう質問を投げれば主観を引き出せるかは、臨床的な知見が必要な部分です。ここは相談しながら進めたいと考えています。</a:t>
-            </a:r>
-          </a:p>
-          <a:p>
-            <a:r>
-              <a:t>中期以降は本研究の完了範囲の外で、発展の方向性としてお示ししているものです。その中期の位置づけを、次のスライドで説明します。</a:t>
-            </a:r>
-          </a:p>
-        </p:txBody>
-      </p:sp>
-      <p:sp>
-        <p:nvSpPr>
-          <p:cNvPr id="4" name="Slide Number Placeholder 3"/>
-          <p:cNvSpPr>
-            <a:spLocks noGrp="1"/>
-          </p:cNvSpPr>
-          <p:nvPr>
-            <p:ph type="sldNum" idx="5" sz="quarter"/>
-          </p:nvPr>
-        </p:nvSpPr>
-        <p:spPr/>
-      </p:sp>
-    </p:spTree>
-  </p:cSld>
-  <p:clrMapOvr>
-    <a:masterClrMapping/>
-  </p:clrMapOvr>
-</p:notes>
-</file>
-
-<file path=ppt/notesSlides/notesSlide14.xml><?xml version="1.0" encoding="utf-8"?>
-<p:notes xmlns:a="http://schemas.openxmlformats.org/drawingml/2006/main" xmlns:p="http://schemas.openxmlformats.org/presentationml/2006/main" xmlns:r="http://schemas.openxmlformats.org/officeDocument/2006/relationships">
-  <p:cSld>
-    <p:spTree>
-      <p:nvGrpSpPr>
-        <p:cNvPr id="1" name=""/>
-        <p:cNvGrpSpPr/>
-        <p:nvPr/>
-      </p:nvGrpSpPr>
-      <p:grpSpPr>
-        <a:xfrm>
-          <a:off x="0" y="0"/>
-          <a:ext cx="0" cy="0"/>
-          <a:chOff x="0" y="0"/>
-          <a:chExt cx="0" cy="0"/>
-        </a:xfrm>
-      </p:grpSpPr>
-      <p:sp>
-        <p:nvSpPr>
-          <p:cNvPr id="2" name="Slide Image Placeholder 1"/>
-          <p:cNvSpPr>
-            <a:spLocks noGrp="1"/>
-          </p:cNvSpPr>
-          <p:nvPr>
-            <p:ph type="sldImg" idx="2"/>
-          </p:nvPr>
-        </p:nvSpPr>
-        <p:spPr/>
-      </p:sp>
-      <p:sp>
-        <p:nvSpPr>
-          <p:cNvPr id="3" name="Notes Placeholder 2"/>
-          <p:cNvSpPr>
-            <a:spLocks noGrp="1"/>
-          </p:cNvSpPr>
-          <p:nvPr>
-            <p:ph type="body" idx="3" sz="quarter"/>
-          </p:nvPr>
-        </p:nvSpPr>
-        <p:spPr/>
-        <p:txBody>
-          <a:bodyPr/>
-          <a:lstStyle/>
-          <a:p>
-            <a:r>
               <a:t>最後に、本研究の位置づけを整理します。</a:t>
             </a:r>
           </a:p>
@@ -948,7 +861,7 @@
           </a:p>
           <a:p>
             <a:r>
-              <a:t>この意味で本研究は、研究室の既存研究にLLMを接続する共通の入口、ゲートウェイになり得ると考えています。</a:t>
+              <a:t>この意味で本研究の価値は、LLMを使ったこと自体ではなく、研究室の様々な研究にLLMを挿せる土台を作ったことにあると考えています。</a:t>
             </a:r>
           </a:p>
           <a:p>
@@ -1258,12 +1171,17 @@
           <a:lstStyle/>
           <a:p>
             <a:r>
-              <a:t>研究目的です。LabVIEWから大規模言語モデルを利用できる接続基盤を構築し、複数のAIが対話する形で主観情報を引き出せるようにすることを目指します。</a:t>
-            </a:r>
-          </a:p>
-          <a:p>
-            <a:r>
-              <a:t>具体的には3点です。1点目、LabVIEWをクライアントにして、画面の変更をLabVIEW側だけで完結できるようにすること。2点目、複数のAIが順番に発言する会話をサーバー側で制御すること。3点目、研究室の他のPCでも動く、引き継ぎ可能な構成にすることです。</a:t>
+              <a:t>研究目的です。本研究で作るのは、LabVIEWから大規模言語モデルを利用できる接続基盤です。</a:t>
+            </a:r>
+          </a:p>
+          <a:p>
+            <a:r>
+              <a:t>そのうえで最終的に目指すのは、主観情報を多面的かつ効率的に収集できるLLMの対話構造を明らかにすることです。AIを何体並べるのが良いかは自明ではないので、構成を比較して見極める必要があると考えています。</a:t>
+            </a:r>
+          </a:p>
+          <a:p>
+            <a:r>
+              <a:t>基盤側の具体目標は3点です。1点目、LabVIEWをクライアントにして、画面の変更をLabVIEW側だけで完結できるようにすること。2点目、複数のAIの会話をサーバー側で制御し、対話構造を差し替えて試せるようにすること。3点目、研究室の他のPCでも動く構成にすることです。</a:t>
             </a:r>
           </a:p>
         </p:txBody>
@@ -1583,17 +1501,27 @@
           <a:lstStyle/>
           <a:p>
             <a:r>
-              <a:t>ここから実際に動いている様子をお見せします。まずは基本となる、1体のAIとの往復です。</a:t>
-            </a:r>
-          </a:p>
-          <a:p>
-            <a:r>
-              <a:t>（再生）LabVIEWのフロントパネルに文章を入力して実行します。右側がサーバーのログで、リクエストが届いているのが見えます。数秒後、AIの返信がLabVIEW側に表示されます。</a:t>
-            </a:r>
-          </a:p>
-          <a:p>
-            <a:r>
-              <a:t>ここまでが基本形で、この上に複数AIの仕組みを載せています。</a:t>
+              <a:t>こちらが今回の中心です。LabVIEWから1回送信するだけで、3体のAIが順番に発言します。</a:t>
+            </a:r>
+          </a:p>
+          <a:p>
+            <a:r>
+              <a:t>（再生）入力するのは、患者さんの感想を想定した1文だけです。実行すると、サーバー側でAIが順番に呼ばれていきます。ログを見ると、3回のやり取りが順に行われているのが分かります。</a:t>
+            </a:r>
+          </a:p>
+          <a:p>
+            <a:r>
+              <a:t>結果がこちらです。注目していただきたいのは、2体目以降が前の発言を受けている点です。3体に同じ質問を投げて答えを並べたのではなく、前の発言を読んだうえで発言しているので、内容が重複せず、慎重な視点や発想を広げる視点が加わっています。</a:t>
+            </a:r>
+          </a:p>
+          <a:p>
+            <a:r>
+              <a:t>なお、この3体構成は比較条件の一つです。後のスライドで比較計画をお話しします。</a:t>
+            </a:r>
+          </a:p>
+          <a:p>
+            <a:r>
+              <a:t>これは各AIに直前までの発言を文脈として渡し、既出の意見を繰り返さないよう指示しているためです。将来ここに専門領域ごとの役割を割り当てることで、多角的な評価につなげられると考えています。</a:t>
             </a:r>
           </a:p>
         </p:txBody>
@@ -4651,8 +4579,8 @@
         </p:nvSpPr>
         <p:spPr>
           <a:xfrm>
-            <a:off x="914400" y="1097280"/>
-            <a:ext cx="10332720" cy="2377440"/>
+            <a:off x="640080" y="960120"/>
+            <a:ext cx="10881360" cy="2651760"/>
           </a:xfrm>
           <a:prstGeom prst="rect">
             <a:avLst/>
@@ -4679,25 +4607,43 @@
                 <a:ea typeface="Yu Gothic"/>
                 <a:cs typeface="Yu Gothic"/>
               </a:rPr>
-              <a:t>LabVIEWと大規模言語モデルを接続する</a:t>
+              <a:t>既存計測系と大規模言語モデルを繋ぐ</a:t>
             </a:r>
           </a:p>
           <a:p>
             <a:pPr algn="ctr">
               <a:spcAft>
+                <a:spcPts val="2200"/>
+              </a:spcAft>
+            </a:pPr>
+            <a:r>
+              <a:rPr sz="3800" b="1">
+                <a:solidFill>
+                  <a:srgbClr val="FFFFFF"/>
+                </a:solidFill>
+                <a:latin typeface="Yu Gothic"/>
+                <a:ea typeface="Yu Gothic"/>
+                <a:cs typeface="Yu Gothic"/>
+              </a:rPr>
+              <a:t>ゲートウェイの構築</a:t>
+            </a:r>
+          </a:p>
+          <a:p>
+            <a:pPr algn="ctr">
+              <a:spcAft>
                 <a:spcPts val="600"/>
               </a:spcAft>
             </a:pPr>
             <a:r>
-              <a:rPr sz="3800" b="1">
-                <a:solidFill>
-                  <a:srgbClr val="FFFFFF"/>
-                </a:solidFill>
-                <a:latin typeface="Yu Gothic"/>
-                <a:ea typeface="Yu Gothic"/>
-                <a:cs typeface="Yu Gothic"/>
-              </a:rPr>
-              <a:t>マルチエージェント対話基盤の構築</a:t>
+              <a:rPr sz="2500" b="0">
+                <a:solidFill>
+                  <a:srgbClr val="C8DAE6"/>
+                </a:solidFill>
+                <a:latin typeface="Yu Gothic"/>
+                <a:ea typeface="Yu Gothic"/>
+                <a:cs typeface="Yu Gothic"/>
+              </a:rPr>
+              <a:t>― LabVIEWによる複数AI対話の実現 ―</a:t>
             </a:r>
           </a:p>
         </p:txBody>
@@ -4756,7 +4702,7 @@
                 <a:ea typeface="Yu Gothic"/>
                 <a:cs typeface="Yu Gothic"/>
               </a:rPr>
-              <a:t>（学籍番号）　柴尾 海渡</a:t>
+              <a:t>2022531028　柴尾 海翔</a:t>
             </a:r>
           </a:p>
           <a:p>
@@ -4774,7 +4720,7 @@
                 <a:ea typeface="Yu Gothic"/>
                 <a:cs typeface="Yu Gothic"/>
               </a:rPr>
-              <a:t>2026年　月　日　　卒業研究 中間発表</a:t>
+              <a:t>2026年 9月 28日　　卒業研究 中間発表</a:t>
             </a:r>
           </a:p>
         </p:txBody>
@@ -4851,7 +4797,7 @@
                 <a:ea typeface="Yu Gothic"/>
                 <a:cs typeface="Yu Gothic"/>
               </a:rPr>
-              <a:t>動作映像 ②　複数AIの会話</a:t>
+              <a:t>定量評価 ― 応答時間</a:t>
             </a:r>
           </a:p>
         </p:txBody>
@@ -4893,1290 +4839,6 @@
                 <a:cs typeface="Yu Gothic"/>
               </a:rPr>
               <a:t>9</a:t>
-            </a:r>
-          </a:p>
-        </p:txBody>
-      </p:sp>
-      <p:sp>
-        <p:nvSpPr>
-          <p:cNvPr id="4" name="Rectangle 3"/>
-          <p:cNvSpPr/>
-          <p:nvPr/>
-        </p:nvSpPr>
-        <p:spPr>
-          <a:xfrm>
-            <a:off x="548640" y="1143000"/>
-            <a:ext cx="6583680" cy="3931920"/>
-          </a:xfrm>
-          <a:prstGeom prst="rect">
-            <a:avLst/>
-          </a:prstGeom>
-          <a:solidFill>
-            <a:srgbClr val="2B2B2B"/>
-          </a:solidFill>
-          <a:ln w="31750">
-            <a:solidFill>
-              <a:srgbClr val="C0392B"/>
-            </a:solidFill>
-            <a:prstDash val="dash"/>
-          </a:ln>
-          <a:effectLst/>
-        </p:spPr>
-        <p:style>
-          <a:lnRef idx="1">
-            <a:schemeClr val="accent1"/>
-          </a:lnRef>
-          <a:fillRef idx="3">
-            <a:schemeClr val="accent1"/>
-          </a:fillRef>
-          <a:effectRef idx="2">
-            <a:schemeClr val="accent1"/>
-          </a:effectRef>
-          <a:fontRef idx="minor">
-            <a:schemeClr val="lt1"/>
-          </a:fontRef>
-        </p:style>
-        <p:txBody>
-          <a:bodyPr rtlCol="0" anchor="ctr" wrap="square"/>
-          <a:lstStyle/>
-          <a:p>
-            <a:pPr algn="ctr">
-              <a:spcAft>
-                <a:spcPts val="1000"/>
-              </a:spcAft>
-            </a:pPr>
-            <a:r>
-              <a:rPr sz="2600" b="1">
-                <a:solidFill>
-                  <a:srgbClr val="FFFFFF"/>
-                </a:solidFill>
-                <a:latin typeface="Yu Gothic"/>
-                <a:ea typeface="Yu Gothic"/>
-                <a:cs typeface="Yu Gothic"/>
-              </a:rPr>
-              <a:t>▶  動画② をここに挿入（60秒）</a:t>
-            </a:r>
-          </a:p>
-          <a:p>
-            <a:pPr algn="ctr">
-              <a:spcAft>
-                <a:spcPts val="600"/>
-              </a:spcAft>
-            </a:pPr>
-            <a:r>
-              <a:rPr sz="1400" b="0">
-                <a:solidFill>
-                  <a:srgbClr val="DDDDDD"/>
-                </a:solidFill>
-                <a:latin typeface="Yu Gothic"/>
-                <a:ea typeface="Yu Gothic"/>
-                <a:cs typeface="Yu Gothic"/>
-              </a:rPr>
-              <a:t>撮影手順: docs/presentation_video_guide.md の 3-4</a:t>
-            </a:r>
-          </a:p>
-          <a:p>
-            <a:pPr algn="ctr">
-              <a:spcAft>
-                <a:spcPts val="600"/>
-              </a:spcAft>
-            </a:pPr>
-            <a:r>
-              <a:rPr sz="1200" b="0">
-                <a:solidFill>
-                  <a:srgbClr val="AAAAAA"/>
-                </a:solidFill>
-                <a:latin typeface="Yu Gothic"/>
-                <a:ea typeface="Yu Gothic"/>
-                <a:cs typeface="Yu Gothic"/>
-              </a:rPr>
-              <a:t>挿入 → ビデオ → このデバイス（埋め込み） / 再生タブ → 開始「自動」</a:t>
-            </a:r>
-          </a:p>
-        </p:txBody>
-      </p:sp>
-      <p:sp>
-        <p:nvSpPr>
-          <p:cNvPr id="5" name="TextBox 4"/>
-          <p:cNvSpPr txBox="1"/>
-          <p:nvPr/>
-        </p:nvSpPr>
-        <p:spPr>
-          <a:xfrm>
-            <a:off x="548640" y="5212080"/>
-            <a:ext cx="6583680" cy="1188720"/>
-          </a:xfrm>
-          <a:prstGeom prst="rect">
-            <a:avLst/>
-          </a:prstGeom>
-          <a:noFill/>
-        </p:spPr>
-        <p:txBody>
-          <a:bodyPr wrap="square" anchor="t">
-            <a:spAutoFit/>
-          </a:bodyPr>
-          <a:lstStyle/>
-          <a:p>
-            <a:pPr algn="l">
-              <a:spcAft>
-                <a:spcPts val="600"/>
-              </a:spcAft>
-            </a:pPr>
-            <a:r>
-              <a:rPr sz="1500" b="1">
-                <a:solidFill>
-                  <a:srgbClr val="595A5C"/>
-                </a:solidFill>
-                <a:latin typeface="Yu Gothic"/>
-                <a:ea typeface="Yu Gothic"/>
-                <a:cs typeface="Yu Gothic"/>
-              </a:rPr>
-              <a:t>入力（LabVIEWから1回送信するだけ）</a:t>
-            </a:r>
-          </a:p>
-          <a:p>
-            <a:pPr algn="l">
-              <a:spcAft>
-                <a:spcPts val="600"/>
-              </a:spcAft>
-            </a:pPr>
-            <a:r>
-              <a:rPr sz="1600" b="0">
-                <a:solidFill>
-                  <a:srgbClr val="222222"/>
-                </a:solidFill>
-                <a:latin typeface="Yu Gothic"/>
-                <a:ea typeface="Yu Gothic"/>
-                <a:cs typeface="Yu Gothic"/>
-              </a:rPr>
-              <a:t>「リハビリのトレーニングを終えました。指が少し動きやすくなった気がして、続けられそうです。」</a:t>
-            </a:r>
-          </a:p>
-        </p:txBody>
-      </p:sp>
-      <p:graphicFrame>
-        <p:nvGraphicFramePr>
-          <p:cNvPr id="6" name="Table 5"/>
-          <p:cNvGraphicFramePr>
-            <a:graphicFrameLocks noGrp="1"/>
-          </p:cNvGraphicFramePr>
-          <p:nvPr/>
-        </p:nvGraphicFramePr>
-        <p:xfrm>
-          <a:off x="7406640" y="1325880"/>
-          <a:ext cx="4206239" cy="2990088"/>
-        </p:xfrm>
-        <a:graphic>
-          <a:graphicData uri="http://schemas.openxmlformats.org/drawingml/2006/table">
-            <a:tbl>
-              <a:tblPr firstRow="1" bandRow="1">
-                <a:tableStyleId>{5C22544A-7EE6-4342-B048-85BDC9FD1C3A}</a:tableStyleId>
-              </a:tblPr>
-              <a:tblGrid>
-                <a:gridCol w="359069"/>
-                <a:gridCol w="769434"/>
-                <a:gridCol w="3077736"/>
-              </a:tblGrid>
-              <a:tr h="384048">
-                <a:tc>
-                  <a:txBody>
-                    <a:bodyPr wrap="square"/>
-                    <a:lstStyle/>
-                    <a:p>
-                      <a:pPr algn="l">
-                        <a:spcAft>
-                          <a:spcPts val="0"/>
-                        </a:spcAft>
-                      </a:pPr>
-                      <a:r>
-                        <a:rPr sz="1400" b="1">
-                          <a:solidFill>
-                            <a:srgbClr val="FFFFFF"/>
-                          </a:solidFill>
-                          <a:latin typeface="Yu Gothic"/>
-                          <a:ea typeface="Yu Gothic"/>
-                          <a:cs typeface="Yu Gothic"/>
-                        </a:rPr>
-                        <a:t>順</a:t>
-                      </a:r>
-                    </a:p>
-                  </a:txBody>
-                  <a:tcPr marL="91440" marR="91440" anchor="ctr">
-                    <a:solidFill>
-                      <a:srgbClr val="1F3A5F"/>
-                    </a:solidFill>
-                  </a:tcPr>
-                </a:tc>
-                <a:tc>
-                  <a:txBody>
-                    <a:bodyPr wrap="square"/>
-                    <a:lstStyle/>
-                    <a:p>
-                      <a:pPr algn="l">
-                        <a:spcAft>
-                          <a:spcPts val="0"/>
-                        </a:spcAft>
-                      </a:pPr>
-                      <a:r>
-                        <a:rPr sz="1400" b="1">
-                          <a:solidFill>
-                            <a:srgbClr val="FFFFFF"/>
-                          </a:solidFill>
-                          <a:latin typeface="Yu Gothic"/>
-                          <a:ea typeface="Yu Gothic"/>
-                          <a:cs typeface="Yu Gothic"/>
-                        </a:rPr>
-                        <a:t>AI</a:t>
-                      </a:r>
-                    </a:p>
-                  </a:txBody>
-                  <a:tcPr marL="91440" marR="91440" anchor="ctr">
-                    <a:solidFill>
-                      <a:srgbClr val="1F3A5F"/>
-                    </a:solidFill>
-                  </a:tcPr>
-                </a:tc>
-                <a:tc>
-                  <a:txBody>
-                    <a:bodyPr wrap="square"/>
-                    <a:lstStyle/>
-                    <a:p>
-                      <a:pPr algn="l">
-                        <a:spcAft>
-                          <a:spcPts val="0"/>
-                        </a:spcAft>
-                      </a:pPr>
-                      <a:r>
-                        <a:rPr sz="1400" b="1">
-                          <a:solidFill>
-                            <a:srgbClr val="FFFFFF"/>
-                          </a:solidFill>
-                          <a:latin typeface="Yu Gothic"/>
-                          <a:ea typeface="Yu Gothic"/>
-                          <a:cs typeface="Yu Gothic"/>
-                        </a:rPr>
-                        <a:t>発言の要旨</a:t>
-                      </a:r>
-                    </a:p>
-                  </a:txBody>
-                  <a:tcPr marL="91440" marR="91440" anchor="ctr">
-                    <a:solidFill>
-                      <a:srgbClr val="1F3A5F"/>
-                    </a:solidFill>
-                  </a:tcPr>
-                </a:tc>
-              </a:tr>
-              <a:tr h="868680">
-                <a:tc>
-                  <a:txBody>
-                    <a:bodyPr wrap="square"/>
-                    <a:lstStyle/>
-                    <a:p>
-                      <a:pPr algn="l">
-                        <a:spcAft>
-                          <a:spcPts val="0"/>
-                        </a:spcAft>
-                      </a:pPr>
-                      <a:r>
-                        <a:rPr sz="1300" b="0">
-                          <a:solidFill>
-                            <a:srgbClr val="222222"/>
-                          </a:solidFill>
-                          <a:latin typeface="Yu Gothic"/>
-                          <a:ea typeface="Yu Gothic"/>
-                          <a:cs typeface="Yu Gothic"/>
-                        </a:rPr>
-                        <a:t>1</a:t>
-                      </a:r>
-                    </a:p>
-                  </a:txBody>
-                  <a:tcPr marL="91440" marR="91440" anchor="ctr">
-                    <a:solidFill>
-                      <a:srgbClr val="FFFFFF"/>
-                    </a:solidFill>
-                  </a:tcPr>
-                </a:tc>
-                <a:tc>
-                  <a:txBody>
-                    <a:bodyPr wrap="square"/>
-                    <a:lstStyle/>
-                    <a:p>
-                      <a:pPr algn="l">
-                        <a:spcAft>
-                          <a:spcPts val="0"/>
-                        </a:spcAft>
-                      </a:pPr>
-                      <a:r>
-                        <a:rPr sz="1300" b="0">
-                          <a:solidFill>
-                            <a:srgbClr val="222222"/>
-                          </a:solidFill>
-                          <a:latin typeface="Yu Gothic"/>
-                          <a:ea typeface="Yu Gothic"/>
-                          <a:cs typeface="Yu Gothic"/>
-                        </a:rPr>
-                        <a:t>Alpha</a:t>
-                      </a:r>
-                    </a:p>
-                  </a:txBody>
-                  <a:tcPr marL="91440" marR="91440" anchor="ctr">
-                    <a:solidFill>
-                      <a:srgbClr val="FFFFFF"/>
-                    </a:solidFill>
-                  </a:tcPr>
-                </a:tc>
-                <a:tc>
-                  <a:txBody>
-                    <a:bodyPr wrap="square"/>
-                    <a:lstStyle/>
-                    <a:p>
-                      <a:pPr algn="l">
-                        <a:spcAft>
-                          <a:spcPts val="0"/>
-                        </a:spcAft>
-                      </a:pPr>
-                      <a:r>
-                        <a:rPr sz="1300" b="0">
-                          <a:solidFill>
-                            <a:srgbClr val="222222"/>
-                          </a:solidFill>
-                          <a:latin typeface="Yu Gothic"/>
-                          <a:ea typeface="Yu Gothic"/>
-                          <a:cs typeface="Yu Gothic"/>
-                        </a:rPr>
-                        <a:t>素晴らしいですね。改善を実感できることは励みになります</a:t>
-                      </a:r>
-                    </a:p>
-                  </a:txBody>
-                  <a:tcPr marL="91440" marR="91440" anchor="ctr">
-                    <a:solidFill>
-                      <a:srgbClr val="FFFFFF"/>
-                    </a:solidFill>
-                  </a:tcPr>
-                </a:tc>
-              </a:tr>
-              <a:tr h="868680">
-                <a:tc>
-                  <a:txBody>
-                    <a:bodyPr wrap="square"/>
-                    <a:lstStyle/>
-                    <a:p>
-                      <a:pPr algn="l">
-                        <a:spcAft>
-                          <a:spcPts val="0"/>
-                        </a:spcAft>
-                      </a:pPr>
-                      <a:r>
-                        <a:rPr sz="1300" b="1">
-                          <a:solidFill>
-                            <a:srgbClr val="C0392B"/>
-                          </a:solidFill>
-                          <a:latin typeface="Yu Gothic"/>
-                          <a:ea typeface="Yu Gothic"/>
-                          <a:cs typeface="Yu Gothic"/>
-                        </a:rPr>
-                        <a:t>2</a:t>
-                      </a:r>
-                    </a:p>
-                  </a:txBody>
-                  <a:tcPr marL="91440" marR="91440" anchor="ctr">
-                    <a:solidFill>
-                      <a:srgbClr val="FDECEA"/>
-                    </a:solidFill>
-                  </a:tcPr>
-                </a:tc>
-                <a:tc>
-                  <a:txBody>
-                    <a:bodyPr wrap="square"/>
-                    <a:lstStyle/>
-                    <a:p>
-                      <a:pPr algn="l">
-                        <a:spcAft>
-                          <a:spcPts val="0"/>
-                        </a:spcAft>
-                      </a:pPr>
-                      <a:r>
-                        <a:rPr sz="1300" b="1">
-                          <a:solidFill>
-                            <a:srgbClr val="C0392B"/>
-                          </a:solidFill>
-                          <a:latin typeface="Yu Gothic"/>
-                          <a:ea typeface="Yu Gothic"/>
-                          <a:cs typeface="Yu Gothic"/>
-                        </a:rPr>
-                        <a:t>Beta</a:t>
-                      </a:r>
-                    </a:p>
-                  </a:txBody>
-                  <a:tcPr marL="91440" marR="91440" anchor="ctr">
-                    <a:solidFill>
-                      <a:srgbClr val="FDECEA"/>
-                    </a:solidFill>
-                  </a:tcPr>
-                </a:tc>
-                <a:tc>
-                  <a:txBody>
-                    <a:bodyPr wrap="square"/>
-                    <a:lstStyle/>
-                    <a:p>
-                      <a:pPr algn="l">
-                        <a:spcAft>
-                          <a:spcPts val="0"/>
-                        </a:spcAft>
-                      </a:pPr>
-                      <a:r>
-                        <a:rPr sz="1300" b="1">
-                          <a:solidFill>
-                            <a:srgbClr val="C0392B"/>
-                          </a:solidFill>
-                          <a:latin typeface="Yu Gothic"/>
-                          <a:ea typeface="Yu Gothic"/>
-                          <a:cs typeface="Yu Gothic"/>
-                        </a:rPr>
-                        <a:t>良い兆候です。ただし無理をせず、専門家の指導を仰ぐことも大切です</a:t>
-                      </a:r>
-                    </a:p>
-                  </a:txBody>
-                  <a:tcPr marL="91440" marR="91440" anchor="ctr">
-                    <a:solidFill>
-                      <a:srgbClr val="FDECEA"/>
-                    </a:solidFill>
-                  </a:tcPr>
-                </a:tc>
-              </a:tr>
-              <a:tr h="868680">
-                <a:tc>
-                  <a:txBody>
-                    <a:bodyPr wrap="square"/>
-                    <a:lstStyle/>
-                    <a:p>
-                      <a:pPr algn="l">
-                        <a:spcAft>
-                          <a:spcPts val="0"/>
-                        </a:spcAft>
-                      </a:pPr>
-                      <a:r>
-                        <a:rPr sz="1300" b="0">
-                          <a:solidFill>
-                            <a:srgbClr val="222222"/>
-                          </a:solidFill>
-                          <a:latin typeface="Yu Gothic"/>
-                          <a:ea typeface="Yu Gothic"/>
-                          <a:cs typeface="Yu Gothic"/>
-                        </a:rPr>
-                        <a:t>3</a:t>
-                      </a:r>
-                    </a:p>
-                  </a:txBody>
-                  <a:tcPr marL="91440" marR="91440" anchor="ctr">
-                    <a:solidFill>
-                      <a:srgbClr val="FFFFFF"/>
-                    </a:solidFill>
-                  </a:tcPr>
-                </a:tc>
-                <a:tc>
-                  <a:txBody>
-                    <a:bodyPr wrap="square"/>
-                    <a:lstStyle/>
-                    <a:p>
-                      <a:pPr algn="l">
-                        <a:spcAft>
-                          <a:spcPts val="0"/>
-                        </a:spcAft>
-                      </a:pPr>
-                      <a:r>
-                        <a:rPr sz="1300" b="0">
-                          <a:solidFill>
-                            <a:srgbClr val="222222"/>
-                          </a:solidFill>
-                          <a:latin typeface="Yu Gothic"/>
-                          <a:ea typeface="Yu Gothic"/>
-                          <a:cs typeface="Yu Gothic"/>
-                        </a:rPr>
-                        <a:t>Gamma</a:t>
-                      </a:r>
-                    </a:p>
-                  </a:txBody>
-                  <a:tcPr marL="91440" marR="91440" anchor="ctr">
-                    <a:solidFill>
-                      <a:srgbClr val="FFFFFF"/>
-                    </a:solidFill>
-                  </a:tcPr>
-                </a:tc>
-                <a:tc>
-                  <a:txBody>
-                    <a:bodyPr wrap="square"/>
-                    <a:lstStyle/>
-                    <a:p>
-                      <a:pPr algn="l">
-                        <a:spcAft>
-                          <a:spcPts val="0"/>
-                        </a:spcAft>
-                      </a:pPr>
-                      <a:r>
-                        <a:rPr sz="1300" b="0">
-                          <a:solidFill>
-                            <a:srgbClr val="222222"/>
-                          </a:solidFill>
-                          <a:latin typeface="Yu Gothic"/>
-                          <a:ea typeface="Yu Gothic"/>
-                          <a:cs typeface="Yu Gothic"/>
-                        </a:rPr>
-                        <a:t>その体験を他の挑戦にも生かすと、日常生活にも可能性が広がります</a:t>
-                      </a:r>
-                    </a:p>
-                  </a:txBody>
-                  <a:tcPr marL="91440" marR="91440" anchor="ctr">
-                    <a:solidFill>
-                      <a:srgbClr val="FFFFFF"/>
-                    </a:solidFill>
-                  </a:tcPr>
-                </a:tc>
-              </a:tr>
-            </a:tbl>
-          </a:graphicData>
-        </a:graphic>
-      </p:graphicFrame>
-      <p:sp>
-        <p:nvSpPr>
-          <p:cNvPr id="7" name="Rounded Rectangle 6"/>
-          <p:cNvSpPr/>
-          <p:nvPr/>
-        </p:nvSpPr>
-        <p:spPr>
-          <a:xfrm>
-            <a:off x="7406640" y="4572000"/>
-            <a:ext cx="4206240" cy="1737360"/>
-          </a:xfrm>
-          <a:prstGeom prst="roundRect">
-            <a:avLst/>
-          </a:prstGeom>
-          <a:solidFill>
-            <a:srgbClr val="EFF3F7"/>
-          </a:solidFill>
-          <a:ln w="19050">
-            <a:solidFill>
-              <a:srgbClr val="C0392B"/>
-            </a:solidFill>
-          </a:ln>
-          <a:effectLst/>
-        </p:spPr>
-        <p:style>
-          <a:lnRef idx="1">
-            <a:schemeClr val="accent1"/>
-          </a:lnRef>
-          <a:fillRef idx="3">
-            <a:schemeClr val="accent1"/>
-          </a:fillRef>
-          <a:effectRef idx="2">
-            <a:schemeClr val="accent1"/>
-          </a:effectRef>
-          <a:fontRef idx="minor">
-            <a:schemeClr val="lt1"/>
-          </a:fontRef>
-        </p:style>
-        <p:txBody>
-          <a:bodyPr rtlCol="0" anchor="ctr" wrap="square" lIns="228600" rIns="228600" tIns="164592"/>
-          <a:lstStyle/>
-          <a:p>
-            <a:pPr algn="l">
-              <a:spcAft>
-                <a:spcPts val="800"/>
-              </a:spcAft>
-            </a:pPr>
-            <a:r>
-              <a:rPr sz="1800" b="1">
-                <a:solidFill>
-                  <a:srgbClr val="C0392B"/>
-                </a:solidFill>
-                <a:latin typeface="Yu Gothic"/>
-                <a:ea typeface="Yu Gothic"/>
-                <a:cs typeface="Yu Gothic"/>
-              </a:rPr>
-              <a:t>注目点</a:t>
-            </a:r>
-          </a:p>
-          <a:p>
-            <a:pPr algn="l">
-              <a:spcAft>
-                <a:spcPts val="500"/>
-              </a:spcAft>
-            </a:pPr>
-            <a:r>
-              <a:rPr sz="1400" b="0">
-                <a:solidFill>
-                  <a:srgbClr val="222222"/>
-                </a:solidFill>
-                <a:latin typeface="Yu Gothic"/>
-                <a:ea typeface="Yu Gothic"/>
-                <a:cs typeface="Yu Gothic"/>
-              </a:rPr>
-              <a:t>2体目が「ただし」と受けている。</a:t>
-            </a:r>
-          </a:p>
-          <a:p>
-            <a:pPr algn="l">
-              <a:spcAft>
-                <a:spcPts val="500"/>
-              </a:spcAft>
-            </a:pPr>
-            <a:r>
-              <a:rPr sz="1400" b="0">
-                <a:solidFill>
-                  <a:srgbClr val="222222"/>
-                </a:solidFill>
-                <a:latin typeface="Yu Gothic"/>
-                <a:ea typeface="Yu Gothic"/>
-                <a:cs typeface="Yu Gothic"/>
-              </a:rPr>
-              <a:t>同じ質問への答えを並べたのではなく、</a:t>
-            </a:r>
-          </a:p>
-          <a:p>
-            <a:pPr algn="l">
-              <a:spcAft>
-                <a:spcPts val="500"/>
-              </a:spcAft>
-            </a:pPr>
-            <a:r>
-              <a:rPr sz="1400" b="0">
-                <a:solidFill>
-                  <a:srgbClr val="222222"/>
-                </a:solidFill>
-                <a:latin typeface="Yu Gothic"/>
-                <a:ea typeface="Yu Gothic"/>
-                <a:cs typeface="Yu Gothic"/>
-              </a:rPr>
-              <a:t>前の発言を読んだうえで発言しているため、</a:t>
-            </a:r>
-          </a:p>
-          <a:p>
-            <a:pPr algn="l">
-              <a:spcAft>
-                <a:spcPts val="500"/>
-              </a:spcAft>
-            </a:pPr>
-            <a:r>
-              <a:rPr sz="1400" b="0">
-                <a:solidFill>
-                  <a:srgbClr val="222222"/>
-                </a:solidFill>
-                <a:latin typeface="Yu Gothic"/>
-                <a:ea typeface="Yu Gothic"/>
-                <a:cs typeface="Yu Gothic"/>
-              </a:rPr>
-              <a:t>内容が重複せず視点が加わっている。</a:t>
-            </a:r>
-          </a:p>
-        </p:txBody>
-      </p:sp>
-    </p:spTree>
-  </p:cSld>
-  <p:clrMapOvr>
-    <a:masterClrMapping/>
-  </p:clrMapOvr>
-</p:sld>
-</file>
-
-<file path=ppt/slides/slide11.xml><?xml version="1.0" encoding="utf-8"?>
-<p:sld xmlns:a="http://schemas.openxmlformats.org/drawingml/2006/main" xmlns:p="http://schemas.openxmlformats.org/presentationml/2006/main" xmlns:r="http://schemas.openxmlformats.org/officeDocument/2006/relationships">
-  <p:cSld>
-    <p:spTree>
-      <p:nvGrpSpPr>
-        <p:cNvPr id="1" name=""/>
-        <p:cNvGrpSpPr/>
-        <p:nvPr/>
-      </p:nvGrpSpPr>
-      <p:grpSpPr/>
-      <p:sp>
-        <p:nvSpPr>
-          <p:cNvPr id="2" name="Rectangle 1"/>
-          <p:cNvSpPr/>
-          <p:nvPr/>
-        </p:nvSpPr>
-        <p:spPr>
-          <a:xfrm>
-            <a:off x="0" y="0"/>
-            <a:ext cx="12191695" cy="868680"/>
-          </a:xfrm>
-          <a:prstGeom prst="rect">
-            <a:avLst/>
-          </a:prstGeom>
-          <a:solidFill>
-            <a:srgbClr val="1F3A5F"/>
-          </a:solidFill>
-          <a:ln>
-            <a:noFill/>
-          </a:ln>
-          <a:effectLst/>
-        </p:spPr>
-        <p:style>
-          <a:lnRef idx="1">
-            <a:schemeClr val="accent1"/>
-          </a:lnRef>
-          <a:fillRef idx="3">
-            <a:schemeClr val="accent1"/>
-          </a:fillRef>
-          <a:effectRef idx="2">
-            <a:schemeClr val="accent1"/>
-          </a:effectRef>
-          <a:fontRef idx="minor">
-            <a:schemeClr val="lt1"/>
-          </a:fontRef>
-        </p:style>
-        <p:txBody>
-          <a:bodyPr rtlCol="0" anchor="ctr" lIns="457200"/>
-          <a:lstStyle/>
-          <a:p>
-            <a:pPr algn="l">
-              <a:spcAft>
-                <a:spcPts val="600"/>
-              </a:spcAft>
-            </a:pPr>
-            <a:r>
-              <a:rPr sz="3000" b="1">
-                <a:solidFill>
-                  <a:srgbClr val="FFFFFF"/>
-                </a:solidFill>
-                <a:latin typeface="Yu Gothic"/>
-                <a:ea typeface="Yu Gothic"/>
-                <a:cs typeface="Yu Gothic"/>
-              </a:rPr>
-              <a:t>動作映像 ③　別PCでの起動（移植性の検証）</a:t>
-            </a:r>
-          </a:p>
-        </p:txBody>
-      </p:sp>
-      <p:sp>
-        <p:nvSpPr>
-          <p:cNvPr id="3" name="TextBox 2"/>
-          <p:cNvSpPr txBox="1"/>
-          <p:nvPr/>
-        </p:nvSpPr>
-        <p:spPr>
-          <a:xfrm>
-            <a:off x="11277295" y="6355080"/>
-            <a:ext cx="640080" cy="365760"/>
-          </a:xfrm>
-          <a:prstGeom prst="rect">
-            <a:avLst/>
-          </a:prstGeom>
-          <a:noFill/>
-        </p:spPr>
-        <p:txBody>
-          <a:bodyPr wrap="square" anchor="t">
-            <a:spAutoFit/>
-          </a:bodyPr>
-          <a:lstStyle/>
-          <a:p>
-            <a:pPr algn="r">
-              <a:spcAft>
-                <a:spcPts val="600"/>
-              </a:spcAft>
-            </a:pPr>
-            <a:r>
-              <a:rPr sz="1400" b="0">
-                <a:solidFill>
-                  <a:srgbClr val="595A5C"/>
-                </a:solidFill>
-                <a:latin typeface="Yu Gothic"/>
-                <a:ea typeface="Yu Gothic"/>
-                <a:cs typeface="Yu Gothic"/>
-              </a:rPr>
-              <a:t>10</a:t>
-            </a:r>
-          </a:p>
-        </p:txBody>
-      </p:sp>
-      <p:sp>
-        <p:nvSpPr>
-          <p:cNvPr id="4" name="Rectangle 3"/>
-          <p:cNvSpPr/>
-          <p:nvPr/>
-        </p:nvSpPr>
-        <p:spPr>
-          <a:xfrm>
-            <a:off x="640080" y="1188720"/>
-            <a:ext cx="7315200" cy="4297680"/>
-          </a:xfrm>
-          <a:prstGeom prst="rect">
-            <a:avLst/>
-          </a:prstGeom>
-          <a:solidFill>
-            <a:srgbClr val="2B2B2B"/>
-          </a:solidFill>
-          <a:ln w="31750">
-            <a:solidFill>
-              <a:srgbClr val="C0392B"/>
-            </a:solidFill>
-            <a:prstDash val="dash"/>
-          </a:ln>
-          <a:effectLst/>
-        </p:spPr>
-        <p:style>
-          <a:lnRef idx="1">
-            <a:schemeClr val="accent1"/>
-          </a:lnRef>
-          <a:fillRef idx="3">
-            <a:schemeClr val="accent1"/>
-          </a:fillRef>
-          <a:effectRef idx="2">
-            <a:schemeClr val="accent1"/>
-          </a:effectRef>
-          <a:fontRef idx="minor">
-            <a:schemeClr val="lt1"/>
-          </a:fontRef>
-        </p:style>
-        <p:txBody>
-          <a:bodyPr rtlCol="0" anchor="ctr" wrap="square"/>
-          <a:lstStyle/>
-          <a:p>
-            <a:pPr algn="ctr">
-              <a:spcAft>
-                <a:spcPts val="1000"/>
-              </a:spcAft>
-            </a:pPr>
-            <a:r>
-              <a:rPr sz="2600" b="1">
-                <a:solidFill>
-                  <a:srgbClr val="FFFFFF"/>
-                </a:solidFill>
-                <a:latin typeface="Yu Gothic"/>
-                <a:ea typeface="Yu Gothic"/>
-                <a:cs typeface="Yu Gothic"/>
-              </a:rPr>
-              <a:t>▶  動画③ をここに挿入（40秒）</a:t>
-            </a:r>
-          </a:p>
-          <a:p>
-            <a:pPr algn="ctr">
-              <a:spcAft>
-                <a:spcPts val="600"/>
-              </a:spcAft>
-            </a:pPr>
-            <a:r>
-              <a:rPr sz="1400" b="0">
-                <a:solidFill>
-                  <a:srgbClr val="DDDDDD"/>
-                </a:solidFill>
-                <a:latin typeface="Yu Gothic"/>
-                <a:ea typeface="Yu Gothic"/>
-                <a:cs typeface="Yu Gothic"/>
-              </a:rPr>
-              <a:t>撮影手順: docs/presentation_video_guide.md の 3-5</a:t>
-            </a:r>
-          </a:p>
-          <a:p>
-            <a:pPr algn="ctr">
-              <a:spcAft>
-                <a:spcPts val="600"/>
-              </a:spcAft>
-            </a:pPr>
-            <a:r>
-              <a:rPr sz="1200" b="0">
-                <a:solidFill>
-                  <a:srgbClr val="AAAAAA"/>
-                </a:solidFill>
-                <a:latin typeface="Yu Gothic"/>
-                <a:ea typeface="Yu Gothic"/>
-                <a:cs typeface="Yu Gothic"/>
-              </a:rPr>
-              <a:t>挿入 → ビデオ → このデバイス（埋め込み） / 再生タブ → 開始「自動」</a:t>
-            </a:r>
-          </a:p>
-        </p:txBody>
-      </p:sp>
-      <p:sp>
-        <p:nvSpPr>
-          <p:cNvPr id="5" name="Rounded Rectangle 4"/>
-          <p:cNvSpPr/>
-          <p:nvPr/>
-        </p:nvSpPr>
-        <p:spPr>
-          <a:xfrm>
-            <a:off x="8321040" y="1280160"/>
-            <a:ext cx="3200400" cy="4114800"/>
-          </a:xfrm>
-          <a:prstGeom prst="roundRect">
-            <a:avLst/>
-          </a:prstGeom>
-          <a:solidFill>
-            <a:srgbClr val="EFF3F7"/>
-          </a:solidFill>
-          <a:ln w="19050">
-            <a:solidFill>
-              <a:srgbClr val="0E7C86"/>
-            </a:solidFill>
-          </a:ln>
-          <a:effectLst/>
-        </p:spPr>
-        <p:style>
-          <a:lnRef idx="1">
-            <a:schemeClr val="accent1"/>
-          </a:lnRef>
-          <a:fillRef idx="3">
-            <a:schemeClr val="accent1"/>
-          </a:fillRef>
-          <a:effectRef idx="2">
-            <a:schemeClr val="accent1"/>
-          </a:effectRef>
-          <a:fontRef idx="minor">
-            <a:schemeClr val="lt1"/>
-          </a:fontRef>
-        </p:style>
-        <p:txBody>
-          <a:bodyPr rtlCol="0" anchor="ctr" wrap="square" lIns="228600" rIns="228600" tIns="164592"/>
-          <a:lstStyle/>
-          <a:p>
-            <a:pPr algn="l">
-              <a:spcAft>
-                <a:spcPts val="800"/>
-              </a:spcAft>
-            </a:pPr>
-            <a:r>
-              <a:rPr sz="2000" b="1">
-                <a:solidFill>
-                  <a:srgbClr val="0E7C86"/>
-                </a:solidFill>
-                <a:latin typeface="Yu Gothic"/>
-                <a:ea typeface="Yu Gothic"/>
-                <a:cs typeface="Yu Gothic"/>
-              </a:rPr>
-              <a:t>検証内容</a:t>
-            </a:r>
-          </a:p>
-          <a:p>
-            <a:pPr algn="l">
-              <a:spcAft>
-                <a:spcPts val="500"/>
-              </a:spcAft>
-            </a:pPr>
-            <a:r>
-              <a:rPr sz="1400" b="0">
-                <a:solidFill>
-                  <a:srgbClr val="222222"/>
-                </a:solidFill>
-                <a:latin typeface="Yu Gothic"/>
-                <a:ea typeface="Yu Gothic"/>
-                <a:cs typeface="Yu Gothic"/>
-              </a:rPr>
-              <a:t>研究室の資産として</a:t>
-            </a:r>
-          </a:p>
-          <a:p>
-            <a:pPr algn="l">
-              <a:spcAft>
-                <a:spcPts val="500"/>
-              </a:spcAft>
-            </a:pPr>
-            <a:r>
-              <a:rPr sz="1400" b="0">
-                <a:solidFill>
-                  <a:srgbClr val="222222"/>
-                </a:solidFill>
-                <a:latin typeface="Yu Gothic"/>
-                <a:ea typeface="Yu Gothic"/>
-                <a:cs typeface="Yu Gothic"/>
-              </a:rPr>
-              <a:t>引き継げることが要件。</a:t>
-            </a:r>
-          </a:p>
-          <a:p>
-            <a:pPr algn="l">
-              <a:spcAft>
-                <a:spcPts val="500"/>
-              </a:spcAft>
-            </a:pPr>
-            <a:r>
-              <a:rPr sz="1400" b="0">
-                <a:solidFill>
-                  <a:srgbClr val="222222"/>
-                </a:solidFill>
-                <a:latin typeface="Yu Gothic"/>
-                <a:ea typeface="Yu Gothic"/>
-                <a:cs typeface="Yu Gothic"/>
-              </a:rPr>
-              <a:t/>
-            </a:r>
-          </a:p>
-          <a:p>
-            <a:pPr algn="l">
-              <a:spcAft>
-                <a:spcPts val="500"/>
-              </a:spcAft>
-            </a:pPr>
-            <a:r>
-              <a:rPr sz="1400" b="0">
-                <a:solidFill>
-                  <a:srgbClr val="222222"/>
-                </a:solidFill>
-                <a:latin typeface="Yu Gothic"/>
-                <a:ea typeface="Yu Gothic"/>
-                <a:cs typeface="Yu Gothic"/>
-              </a:rPr>
-              <a:t>Dockerで環境ごと固めた。</a:t>
-            </a:r>
-          </a:p>
-          <a:p>
-            <a:pPr algn="l">
-              <a:spcAft>
-                <a:spcPts val="500"/>
-              </a:spcAft>
-            </a:pPr>
-            <a:r>
-              <a:rPr sz="1400" b="0">
-                <a:solidFill>
-                  <a:srgbClr val="222222"/>
-                </a:solidFill>
-                <a:latin typeface="Yu Gothic"/>
-                <a:ea typeface="Yu Gothic"/>
-                <a:cs typeface="Yu Gothic"/>
-              </a:rPr>
-              <a:t/>
-            </a:r>
-          </a:p>
-          <a:p>
-            <a:pPr algn="l">
-              <a:spcAft>
-                <a:spcPts val="500"/>
-              </a:spcAft>
-            </a:pPr>
-            <a:r>
-              <a:rPr sz="1400" b="0">
-                <a:solidFill>
-                  <a:srgbClr val="222222"/>
-                </a:solidFill>
-                <a:latin typeface="Yu Gothic"/>
-                <a:ea typeface="Yu Gothic"/>
-                <a:cs typeface="Yu Gothic"/>
-              </a:rPr>
-              <a:t>・Node.js 不要</a:t>
-            </a:r>
-          </a:p>
-          <a:p>
-            <a:pPr algn="l">
-              <a:spcAft>
-                <a:spcPts val="500"/>
-              </a:spcAft>
-            </a:pPr>
-            <a:r>
-              <a:rPr sz="1400" b="0">
-                <a:solidFill>
-                  <a:srgbClr val="222222"/>
-                </a:solidFill>
-                <a:latin typeface="Yu Gothic"/>
-                <a:ea typeface="Yu Gothic"/>
-                <a:cs typeface="Yu Gothic"/>
-              </a:rPr>
-              <a:t>・Git 不要</a:t>
-            </a:r>
-          </a:p>
-          <a:p>
-            <a:pPr algn="l">
-              <a:spcAft>
-                <a:spcPts val="500"/>
-              </a:spcAft>
-            </a:pPr>
-            <a:r>
-              <a:rPr sz="1400" b="0">
-                <a:solidFill>
-                  <a:srgbClr val="222222"/>
-                </a:solidFill>
-                <a:latin typeface="Yu Gothic"/>
-                <a:ea typeface="Yu Gothic"/>
-                <a:cs typeface="Yu Gothic"/>
-              </a:rPr>
-              <a:t>・ZIP展開 → コマンド1行</a:t>
-            </a:r>
-          </a:p>
-          <a:p>
-            <a:pPr algn="l">
-              <a:spcAft>
-                <a:spcPts val="500"/>
-              </a:spcAft>
-            </a:pPr>
-            <a:r>
-              <a:rPr sz="1400" b="0">
-                <a:solidFill>
-                  <a:srgbClr val="222222"/>
-                </a:solidFill>
-                <a:latin typeface="Yu Gothic"/>
-                <a:ea typeface="Yu Gothic"/>
-                <a:cs typeface="Yu Gothic"/>
-              </a:rPr>
-              <a:t/>
-            </a:r>
-          </a:p>
-          <a:p>
-            <a:pPr algn="l">
-              <a:spcAft>
-                <a:spcPts val="500"/>
-              </a:spcAft>
-            </a:pPr>
-            <a:r>
-              <a:rPr sz="1400" b="0">
-                <a:solidFill>
-                  <a:srgbClr val="222222"/>
-                </a:solidFill>
-                <a:latin typeface="Yu Gothic"/>
-                <a:ea typeface="Yu Gothic"/>
-                <a:cs typeface="Yu Gothic"/>
-              </a:rPr>
-              <a:t>他メンバーのPCでも、</a:t>
-            </a:r>
-          </a:p>
-          <a:p>
-            <a:pPr algn="l">
-              <a:spcAft>
-                <a:spcPts val="500"/>
-              </a:spcAft>
-            </a:pPr>
-            <a:r>
-              <a:rPr sz="1400" b="0">
-                <a:solidFill>
-                  <a:srgbClr val="222222"/>
-                </a:solidFill>
-                <a:latin typeface="Yu Gothic"/>
-                <a:ea typeface="Yu Gothic"/>
-                <a:cs typeface="Yu Gothic"/>
-              </a:rPr>
-              <a:t>数年後の引き継ぎでも、</a:t>
-            </a:r>
-          </a:p>
-          <a:p>
-            <a:pPr algn="l">
-              <a:spcAft>
-                <a:spcPts val="500"/>
-              </a:spcAft>
-            </a:pPr>
-            <a:r>
-              <a:rPr sz="1400" b="0">
-                <a:solidFill>
-                  <a:srgbClr val="222222"/>
-                </a:solidFill>
-                <a:latin typeface="Yu Gothic"/>
-                <a:ea typeface="Yu Gothic"/>
-                <a:cs typeface="Yu Gothic"/>
-              </a:rPr>
-              <a:t>同じ環境を再現できる。</a:t>
-            </a:r>
-          </a:p>
-        </p:txBody>
-      </p:sp>
-    </p:spTree>
-  </p:cSld>
-  <p:clrMapOvr>
-    <a:masterClrMapping/>
-  </p:clrMapOvr>
-</p:sld>
-</file>
-
-<file path=ppt/slides/slide12.xml><?xml version="1.0" encoding="utf-8"?>
-<p:sld xmlns:a="http://schemas.openxmlformats.org/drawingml/2006/main" xmlns:p="http://schemas.openxmlformats.org/presentationml/2006/main" xmlns:r="http://schemas.openxmlformats.org/officeDocument/2006/relationships">
-  <p:cSld>
-    <p:spTree>
-      <p:nvGrpSpPr>
-        <p:cNvPr id="1" name=""/>
-        <p:cNvGrpSpPr/>
-        <p:nvPr/>
-      </p:nvGrpSpPr>
-      <p:grpSpPr/>
-      <p:sp>
-        <p:nvSpPr>
-          <p:cNvPr id="2" name="Rectangle 1"/>
-          <p:cNvSpPr/>
-          <p:nvPr/>
-        </p:nvSpPr>
-        <p:spPr>
-          <a:xfrm>
-            <a:off x="0" y="0"/>
-            <a:ext cx="12191695" cy="868680"/>
-          </a:xfrm>
-          <a:prstGeom prst="rect">
-            <a:avLst/>
-          </a:prstGeom>
-          <a:solidFill>
-            <a:srgbClr val="1F3A5F"/>
-          </a:solidFill>
-          <a:ln>
-            <a:noFill/>
-          </a:ln>
-          <a:effectLst/>
-        </p:spPr>
-        <p:style>
-          <a:lnRef idx="1">
-            <a:schemeClr val="accent1"/>
-          </a:lnRef>
-          <a:fillRef idx="3">
-            <a:schemeClr val="accent1"/>
-          </a:fillRef>
-          <a:effectRef idx="2">
-            <a:schemeClr val="accent1"/>
-          </a:effectRef>
-          <a:fontRef idx="minor">
-            <a:schemeClr val="lt1"/>
-          </a:fontRef>
-        </p:style>
-        <p:txBody>
-          <a:bodyPr rtlCol="0" anchor="ctr" lIns="457200"/>
-          <a:lstStyle/>
-          <a:p>
-            <a:pPr algn="l">
-              <a:spcAft>
-                <a:spcPts val="600"/>
-              </a:spcAft>
-            </a:pPr>
-            <a:r>
-              <a:rPr sz="3000" b="1">
-                <a:solidFill>
-                  <a:srgbClr val="FFFFFF"/>
-                </a:solidFill>
-                <a:latin typeface="Yu Gothic"/>
-                <a:ea typeface="Yu Gothic"/>
-                <a:cs typeface="Yu Gothic"/>
-              </a:rPr>
-              <a:t>定量評価 ― 応答時間</a:t>
-            </a:r>
-          </a:p>
-        </p:txBody>
-      </p:sp>
-      <p:sp>
-        <p:nvSpPr>
-          <p:cNvPr id="3" name="TextBox 2"/>
-          <p:cNvSpPr txBox="1"/>
-          <p:nvPr/>
-        </p:nvSpPr>
-        <p:spPr>
-          <a:xfrm>
-            <a:off x="11277295" y="6355080"/>
-            <a:ext cx="640080" cy="365760"/>
-          </a:xfrm>
-          <a:prstGeom prst="rect">
-            <a:avLst/>
-          </a:prstGeom>
-          <a:noFill/>
-        </p:spPr>
-        <p:txBody>
-          <a:bodyPr wrap="square" anchor="t">
-            <a:spAutoFit/>
-          </a:bodyPr>
-          <a:lstStyle/>
-          <a:p>
-            <a:pPr algn="r">
-              <a:spcAft>
-                <a:spcPts val="600"/>
-              </a:spcAft>
-            </a:pPr>
-            <a:r>
-              <a:rPr sz="1400" b="0">
-                <a:solidFill>
-                  <a:srgbClr val="595A5C"/>
-                </a:solidFill>
-                <a:latin typeface="Yu Gothic"/>
-                <a:ea typeface="Yu Gothic"/>
-                <a:cs typeface="Yu Gothic"/>
-              </a:rPr>
-              <a:t>11</a:t>
             </a:r>
           </a:p>
         </p:txBody>
@@ -6717,7 +5379,7 @@
                 <a:ea typeface="Yu Gothic"/>
                 <a:cs typeface="Yu Gothic"/>
               </a:rPr>
-              <a:t>実用上は3体程度</a:t>
+              <a:t>発言数にほぼ比例する</a:t>
             </a:r>
           </a:p>
           <a:p>
@@ -6735,7 +5397,7 @@
                 <a:ea typeface="Yu Gothic"/>
                 <a:cs typeface="Yu Gothic"/>
               </a:rPr>
-              <a:t>AIの数にほぼ比例して伸びる。</a:t>
+              <a:t>3体が最適という意味ではない。</a:t>
             </a:r>
           </a:p>
           <a:p>
@@ -6753,7 +5415,7 @@
                 <a:ea typeface="Yu Gothic"/>
                 <a:cs typeface="Yu Gothic"/>
               </a:rPr>
-              <a:t>会話として成立する範囲で</a:t>
+              <a:t>構成ごとの応答時間を、</a:t>
             </a:r>
           </a:p>
           <a:p>
@@ -6771,7 +5433,7 @@
                 <a:ea typeface="Yu Gothic"/>
                 <a:cs typeface="Yu Gothic"/>
               </a:rPr>
-              <a:t>3体程度が現実的。</a:t>
+              <a:t>次の検証計画で比較材料に使う。</a:t>
             </a:r>
           </a:p>
         </p:txBody>
@@ -6899,7 +5561,7 @@
 </p:sld>
 </file>
 
-<file path=ppt/slides/slide13.xml><?xml version="1.0" encoding="utf-8"?>
+<file path=ppt/slides/slide11.xml><?xml version="1.0" encoding="utf-8"?>
 <p:sld xmlns:a="http://schemas.openxmlformats.org/drawingml/2006/main" xmlns:p="http://schemas.openxmlformats.org/presentationml/2006/main" xmlns:r="http://schemas.openxmlformats.org/officeDocument/2006/relationships">
   <p:cSld>
     <p:spTree>
@@ -6963,7 +5625,7 @@
                 <a:ea typeface="Yu Gothic"/>
                 <a:cs typeface="Yu Gothic"/>
               </a:rPr>
-              <a:t>今後の方針</a:t>
+              <a:t>検証計画 ― 主観情報の収集に適した対話構造の比較</a:t>
             </a:r>
           </a:p>
         </p:txBody>
@@ -7004,7 +5666,1032 @@
                 <a:ea typeface="Yu Gothic"/>
                 <a:cs typeface="Yu Gothic"/>
               </a:rPr>
-              <a:t>12</a:t>
+              <a:t>10</a:t>
+            </a:r>
+          </a:p>
+        </p:txBody>
+      </p:sp>
+      <p:sp>
+        <p:nvSpPr>
+          <p:cNvPr id="4" name="TextBox 3"/>
+          <p:cNvSpPr txBox="1"/>
+          <p:nvPr/>
+        </p:nvSpPr>
+        <p:spPr>
+          <a:xfrm>
+            <a:off x="640080" y="960120"/>
+            <a:ext cx="10881360" cy="457200"/>
+          </a:xfrm>
+          <a:prstGeom prst="rect">
+            <a:avLst/>
+          </a:prstGeom>
+          <a:noFill/>
+        </p:spPr>
+        <p:txBody>
+          <a:bodyPr wrap="square" anchor="t">
+            <a:spAutoFit/>
+          </a:bodyPr>
+          <a:lstStyle/>
+          <a:p>
+            <a:pPr algn="l">
+              <a:spcAft>
+                <a:spcPts val="600"/>
+              </a:spcAft>
+            </a:pPr>
+            <a:r>
+              <a:rPr sz="1700" b="0">
+                <a:solidFill>
+                  <a:srgbClr val="595A5C"/>
+                </a:solidFill>
+                <a:latin typeface="Yu Gothic"/>
+                <a:ea typeface="Yu Gothic"/>
+                <a:cs typeface="Yu Gothic"/>
+              </a:rPr>
+              <a:t>3体が最適という主張ではない。現在の構成は比較条件の一つであり、A〜Dを比較して適した構造を明らかにする。</a:t>
+            </a:r>
+          </a:p>
+        </p:txBody>
+      </p:sp>
+      <p:graphicFrame>
+        <p:nvGraphicFramePr>
+          <p:cNvPr id="5" name="Table 4"/>
+          <p:cNvGraphicFramePr>
+            <a:graphicFrameLocks noGrp="1"/>
+          </p:cNvGraphicFramePr>
+          <p:nvPr/>
+        </p:nvGraphicFramePr>
+        <p:xfrm>
+          <a:off x="640080" y="1554480"/>
+          <a:ext cx="10881358" cy="3090672"/>
+        </p:xfrm>
+        <a:graphic>
+          <a:graphicData uri="http://schemas.openxmlformats.org/drawingml/2006/table">
+            <a:tbl>
+              <a:tblPr firstRow="1" bandRow="1">
+                <a:tableStyleId>{5C22544A-7EE6-4342-B048-85BDC9FD1C3A}</a:tableStyleId>
+              </a:tblPr>
+              <a:tblGrid>
+                <a:gridCol w="922149"/>
+                <a:gridCol w="2950877"/>
+                <a:gridCol w="3319736"/>
+                <a:gridCol w="3688596"/>
+              </a:tblGrid>
+              <a:tr h="457200">
+                <a:tc>
+                  <a:txBody>
+                    <a:bodyPr wrap="square"/>
+                    <a:lstStyle/>
+                    <a:p>
+                      <a:pPr algn="l">
+                        <a:spcAft>
+                          <a:spcPts val="0"/>
+                        </a:spcAft>
+                      </a:pPr>
+                      <a:r>
+                        <a:rPr sz="1700" b="1">
+                          <a:solidFill>
+                            <a:srgbClr val="FFFFFF"/>
+                          </a:solidFill>
+                          <a:latin typeface="Yu Gothic"/>
+                          <a:ea typeface="Yu Gothic"/>
+                          <a:cs typeface="Yu Gothic"/>
+                        </a:rPr>
+                        <a:t>条件</a:t>
+                      </a:r>
+                    </a:p>
+                  </a:txBody>
+                  <a:tcPr marL="91440" marR="91440" anchor="ctr">
+                    <a:solidFill>
+                      <a:srgbClr val="1F3A5F"/>
+                    </a:solidFill>
+                  </a:tcPr>
+                </a:tc>
+                <a:tc>
+                  <a:txBody>
+                    <a:bodyPr wrap="square"/>
+                    <a:lstStyle/>
+                    <a:p>
+                      <a:pPr algn="l">
+                        <a:spcAft>
+                          <a:spcPts val="0"/>
+                        </a:spcAft>
+                      </a:pPr>
+                      <a:r>
+                        <a:rPr sz="1700" b="1">
+                          <a:solidFill>
+                            <a:srgbClr val="FFFFFF"/>
+                          </a:solidFill>
+                          <a:latin typeface="Yu Gothic"/>
+                          <a:ea typeface="Yu Gothic"/>
+                          <a:cs typeface="Yu Gothic"/>
+                        </a:rPr>
+                        <a:t>LLM構成</a:t>
+                      </a:r>
+                    </a:p>
+                  </a:txBody>
+                  <a:tcPr marL="91440" marR="91440" anchor="ctr">
+                    <a:solidFill>
+                      <a:srgbClr val="1F3A5F"/>
+                    </a:solidFill>
+                  </a:tcPr>
+                </a:tc>
+                <a:tc>
+                  <a:txBody>
+                    <a:bodyPr wrap="square"/>
+                    <a:lstStyle/>
+                    <a:p>
+                      <a:pPr algn="l">
+                        <a:spcAft>
+                          <a:spcPts val="0"/>
+                        </a:spcAft>
+                      </a:pPr>
+                      <a:r>
+                        <a:rPr sz="1700" b="1">
+                          <a:solidFill>
+                            <a:srgbClr val="FFFFFF"/>
+                          </a:solidFill>
+                          <a:latin typeface="Yu Gothic"/>
+                          <a:ea typeface="Yu Gothic"/>
+                          <a:cs typeface="Yu Gothic"/>
+                        </a:rPr>
+                        <a:t>狙い</a:t>
+                      </a:r>
+                    </a:p>
+                  </a:txBody>
+                  <a:tcPr marL="91440" marR="91440" anchor="ctr">
+                    <a:solidFill>
+                      <a:srgbClr val="1F3A5F"/>
+                    </a:solidFill>
+                  </a:tcPr>
+                </a:tc>
+                <a:tc>
+                  <a:txBody>
+                    <a:bodyPr wrap="square"/>
+                    <a:lstStyle/>
+                    <a:p>
+                      <a:pPr algn="l">
+                        <a:spcAft>
+                          <a:spcPts val="0"/>
+                        </a:spcAft>
+                      </a:pPr>
+                      <a:r>
+                        <a:rPr sz="1700" b="1">
+                          <a:solidFill>
+                            <a:srgbClr val="FFFFFF"/>
+                          </a:solidFill>
+                          <a:latin typeface="Yu Gothic"/>
+                          <a:ea typeface="Yu Gothic"/>
+                          <a:cs typeface="Yu Gothic"/>
+                        </a:rPr>
+                        <a:t>本研究での状態</a:t>
+                      </a:r>
+                    </a:p>
+                  </a:txBody>
+                  <a:tcPr marL="91440" marR="91440" anchor="ctr">
+                    <a:solidFill>
+                      <a:srgbClr val="1F3A5F"/>
+                    </a:solidFill>
+                  </a:tcPr>
+                </a:tc>
+              </a:tr>
+              <a:tr h="658368">
+                <a:tc>
+                  <a:txBody>
+                    <a:bodyPr wrap="square"/>
+                    <a:lstStyle/>
+                    <a:p>
+                      <a:pPr algn="l">
+                        <a:spcAft>
+                          <a:spcPts val="0"/>
+                        </a:spcAft>
+                      </a:pPr>
+                      <a:r>
+                        <a:rPr sz="1600" b="0">
+                          <a:solidFill>
+                            <a:srgbClr val="222222"/>
+                          </a:solidFill>
+                          <a:latin typeface="Yu Gothic"/>
+                          <a:ea typeface="Yu Gothic"/>
+                          <a:cs typeface="Yu Gothic"/>
+                        </a:rPr>
+                        <a:t>A</a:t>
+                      </a:r>
+                    </a:p>
+                  </a:txBody>
+                  <a:tcPr marL="91440" marR="91440" anchor="ctr">
+                    <a:solidFill>
+                      <a:srgbClr val="FFFFFF"/>
+                    </a:solidFill>
+                  </a:tcPr>
+                </a:tc>
+                <a:tc>
+                  <a:txBody>
+                    <a:bodyPr wrap="square"/>
+                    <a:lstStyle/>
+                    <a:p>
+                      <a:pPr algn="l">
+                        <a:spcAft>
+                          <a:spcPts val="0"/>
+                        </a:spcAft>
+                      </a:pPr>
+                      <a:r>
+                        <a:rPr sz="1600" b="0">
+                          <a:solidFill>
+                            <a:srgbClr val="222222"/>
+                          </a:solidFill>
+                          <a:latin typeface="Yu Gothic"/>
+                          <a:ea typeface="Yu Gothic"/>
+                          <a:cs typeface="Yu Gothic"/>
+                        </a:rPr>
+                        <a:t>LLM 1体</a:t>
+                      </a:r>
+                    </a:p>
+                  </a:txBody>
+                  <a:tcPr marL="91440" marR="91440" anchor="ctr">
+                    <a:solidFill>
+                      <a:srgbClr val="FFFFFF"/>
+                    </a:solidFill>
+                  </a:tcPr>
+                </a:tc>
+                <a:tc>
+                  <a:txBody>
+                    <a:bodyPr wrap="square"/>
+                    <a:lstStyle/>
+                    <a:p>
+                      <a:pPr algn="l">
+                        <a:spcAft>
+                          <a:spcPts val="0"/>
+                        </a:spcAft>
+                      </a:pPr>
+                      <a:r>
+                        <a:rPr sz="1600" b="0">
+                          <a:solidFill>
+                            <a:srgbClr val="222222"/>
+                          </a:solidFill>
+                          <a:latin typeface="Yu Gothic"/>
+                          <a:ea typeface="Yu Gothic"/>
+                          <a:cs typeface="Yu Gothic"/>
+                        </a:rPr>
+                        <a:t>基準条件</a:t>
+                      </a:r>
+                    </a:p>
+                  </a:txBody>
+                  <a:tcPr marL="91440" marR="91440" anchor="ctr">
+                    <a:solidFill>
+                      <a:srgbClr val="FFFFFF"/>
+                    </a:solidFill>
+                  </a:tcPr>
+                </a:tc>
+                <a:tc>
+                  <a:txBody>
+                    <a:bodyPr wrap="square"/>
+                    <a:lstStyle/>
+                    <a:p>
+                      <a:pPr algn="l">
+                        <a:spcAft>
+                          <a:spcPts val="0"/>
+                        </a:spcAft>
+                      </a:pPr>
+                      <a:r>
+                        <a:rPr sz="1600" b="0">
+                          <a:solidFill>
+                            <a:srgbClr val="222222"/>
+                          </a:solidFill>
+                          <a:latin typeface="Yu Gothic"/>
+                          <a:ea typeface="Yu Gothic"/>
+                          <a:cs typeface="Yu Gothic"/>
+                        </a:rPr>
+                        <a:t>実装済み（単体AI版）</a:t>
+                      </a:r>
+                    </a:p>
+                  </a:txBody>
+                  <a:tcPr marL="91440" marR="91440" anchor="ctr">
+                    <a:solidFill>
+                      <a:srgbClr val="FFFFFF"/>
+                    </a:solidFill>
+                  </a:tcPr>
+                </a:tc>
+              </a:tr>
+              <a:tr h="658368">
+                <a:tc>
+                  <a:txBody>
+                    <a:bodyPr wrap="square"/>
+                    <a:lstStyle/>
+                    <a:p>
+                      <a:pPr algn="l">
+                        <a:spcAft>
+                          <a:spcPts val="0"/>
+                        </a:spcAft>
+                      </a:pPr>
+                      <a:r>
+                        <a:rPr sz="1600" b="1">
+                          <a:solidFill>
+                            <a:srgbClr val="C0392B"/>
+                          </a:solidFill>
+                          <a:latin typeface="Yu Gothic"/>
+                          <a:ea typeface="Yu Gothic"/>
+                          <a:cs typeface="Yu Gothic"/>
+                        </a:rPr>
+                        <a:t>B</a:t>
+                      </a:r>
+                    </a:p>
+                  </a:txBody>
+                  <a:tcPr marL="91440" marR="91440" anchor="ctr">
+                    <a:solidFill>
+                      <a:srgbClr val="FDECEA"/>
+                    </a:solidFill>
+                  </a:tcPr>
+                </a:tc>
+                <a:tc>
+                  <a:txBody>
+                    <a:bodyPr wrap="square"/>
+                    <a:lstStyle/>
+                    <a:p>
+                      <a:pPr algn="l">
+                        <a:spcAft>
+                          <a:spcPts val="0"/>
+                        </a:spcAft>
+                      </a:pPr>
+                      <a:r>
+                        <a:rPr sz="1600" b="1">
+                          <a:solidFill>
+                            <a:srgbClr val="C0392B"/>
+                          </a:solidFill>
+                          <a:latin typeface="Yu Gothic"/>
+                          <a:ea typeface="Yu Gothic"/>
+                          <a:cs typeface="Yu Gothic"/>
+                        </a:rPr>
+                        <a:t>1体＋複数ペルソナ</a:t>
+                      </a:r>
+                    </a:p>
+                  </a:txBody>
+                  <a:tcPr marL="91440" marR="91440" anchor="ctr">
+                    <a:solidFill>
+                      <a:srgbClr val="FDECEA"/>
+                    </a:solidFill>
+                  </a:tcPr>
+                </a:tc>
+                <a:tc>
+                  <a:txBody>
+                    <a:bodyPr wrap="square"/>
+                    <a:lstStyle/>
+                    <a:p>
+                      <a:pPr algn="l">
+                        <a:spcAft>
+                          <a:spcPts val="0"/>
+                        </a:spcAft>
+                      </a:pPr>
+                      <a:r>
+                        <a:rPr sz="1600" b="1">
+                          <a:solidFill>
+                            <a:srgbClr val="C0392B"/>
+                          </a:solidFill>
+                          <a:latin typeface="Yu Gothic"/>
+                          <a:ea typeface="Yu Gothic"/>
+                          <a:cs typeface="Yu Gothic"/>
+                        </a:rPr>
+                        <a:t>視点を変える効果</a:t>
+                      </a:r>
+                    </a:p>
+                  </a:txBody>
+                  <a:tcPr marL="91440" marR="91440" anchor="ctr">
+                    <a:solidFill>
+                      <a:srgbClr val="FDECEA"/>
+                    </a:solidFill>
+                  </a:tcPr>
+                </a:tc>
+                <a:tc>
+                  <a:txBody>
+                    <a:bodyPr wrap="square"/>
+                    <a:lstStyle/>
+                    <a:p>
+                      <a:pPr algn="l">
+                        <a:spcAft>
+                          <a:spcPts val="0"/>
+                        </a:spcAft>
+                      </a:pPr>
+                      <a:r>
+                        <a:rPr sz="1600" b="1">
+                          <a:solidFill>
+                            <a:srgbClr val="C0392B"/>
+                          </a:solidFill>
+                          <a:latin typeface="Yu Gothic"/>
+                          <a:ea typeface="Yu Gothic"/>
+                          <a:cs typeface="Yu Gothic"/>
+                        </a:rPr>
+                        <a:t>実装済み ← 今回の動作映像</a:t>
+                      </a:r>
+                    </a:p>
+                  </a:txBody>
+                  <a:tcPr marL="91440" marR="91440" anchor="ctr">
+                    <a:solidFill>
+                      <a:srgbClr val="FDECEA"/>
+                    </a:solidFill>
+                  </a:tcPr>
+                </a:tc>
+              </a:tr>
+              <a:tr h="658368">
+                <a:tc>
+                  <a:txBody>
+                    <a:bodyPr wrap="square"/>
+                    <a:lstStyle/>
+                    <a:p>
+                      <a:pPr algn="l">
+                        <a:spcAft>
+                          <a:spcPts val="0"/>
+                        </a:spcAft>
+                      </a:pPr>
+                      <a:r>
+                        <a:rPr sz="1600" b="0">
+                          <a:solidFill>
+                            <a:srgbClr val="222222"/>
+                          </a:solidFill>
+                          <a:latin typeface="Yu Gothic"/>
+                          <a:ea typeface="Yu Gothic"/>
+                          <a:cs typeface="Yu Gothic"/>
+                        </a:rPr>
+                        <a:t>C</a:t>
+                      </a:r>
+                    </a:p>
+                  </a:txBody>
+                  <a:tcPr marL="91440" marR="91440" anchor="ctr">
+                    <a:solidFill>
+                      <a:srgbClr val="FFFFFF"/>
+                    </a:solidFill>
+                  </a:tcPr>
+                </a:tc>
+                <a:tc>
+                  <a:txBody>
+                    <a:bodyPr wrap="square"/>
+                    <a:lstStyle/>
+                    <a:p>
+                      <a:pPr algn="l">
+                        <a:spcAft>
+                          <a:spcPts val="0"/>
+                        </a:spcAft>
+                      </a:pPr>
+                      <a:r>
+                        <a:rPr sz="1600" b="0">
+                          <a:solidFill>
+                            <a:srgbClr val="222222"/>
+                          </a:solidFill>
+                          <a:latin typeface="Yu Gothic"/>
+                          <a:ea typeface="Yu Gothic"/>
+                          <a:cs typeface="Yu Gothic"/>
+                        </a:rPr>
+                        <a:t>複数LLM＋固定順</a:t>
+                      </a:r>
+                    </a:p>
+                  </a:txBody>
+                  <a:tcPr marL="91440" marR="91440" anchor="ctr">
+                    <a:solidFill>
+                      <a:srgbClr val="FFFFFF"/>
+                    </a:solidFill>
+                  </a:tcPr>
+                </a:tc>
+                <a:tc>
+                  <a:txBody>
+                    <a:bodyPr wrap="square"/>
+                    <a:lstStyle/>
+                    <a:p>
+                      <a:pPr algn="l">
+                        <a:spcAft>
+                          <a:spcPts val="0"/>
+                        </a:spcAft>
+                      </a:pPr>
+                      <a:r>
+                        <a:rPr sz="1600" b="0">
+                          <a:solidFill>
+                            <a:srgbClr val="222222"/>
+                          </a:solidFill>
+                          <a:latin typeface="Yu Gothic"/>
+                          <a:ea typeface="Yu Gothic"/>
+                          <a:cs typeface="Yu Gothic"/>
+                        </a:rPr>
+                        <a:t>独立した役割を持つ効果</a:t>
+                      </a:r>
+                    </a:p>
+                  </a:txBody>
+                  <a:tcPr marL="91440" marR="91440" anchor="ctr">
+                    <a:solidFill>
+                      <a:srgbClr val="FFFFFF"/>
+                    </a:solidFill>
+                  </a:tcPr>
+                </a:tc>
+                <a:tc>
+                  <a:txBody>
+                    <a:bodyPr wrap="square"/>
+                    <a:lstStyle/>
+                    <a:p>
+                      <a:pPr algn="l">
+                        <a:spcAft>
+                          <a:spcPts val="0"/>
+                        </a:spcAft>
+                      </a:pPr>
+                      <a:r>
+                        <a:rPr sz="1600" b="0">
+                          <a:solidFill>
+                            <a:srgbClr val="222222"/>
+                          </a:solidFill>
+                          <a:latin typeface="Yu Gothic"/>
+                          <a:ea typeface="Yu Gothic"/>
+                          <a:cs typeface="Yu Gothic"/>
+                        </a:rPr>
+                        <a:t>設定変更で対応可能</a:t>
+                      </a:r>
+                    </a:p>
+                  </a:txBody>
+                  <a:tcPr marL="91440" marR="91440" anchor="ctr">
+                    <a:solidFill>
+                      <a:srgbClr val="FFFFFF"/>
+                    </a:solidFill>
+                  </a:tcPr>
+                </a:tc>
+              </a:tr>
+              <a:tr h="658368">
+                <a:tc>
+                  <a:txBody>
+                    <a:bodyPr wrap="square"/>
+                    <a:lstStyle/>
+                    <a:p>
+                      <a:pPr algn="l">
+                        <a:spcAft>
+                          <a:spcPts val="0"/>
+                        </a:spcAft>
+                      </a:pPr>
+                      <a:r>
+                        <a:rPr sz="1600" b="0">
+                          <a:solidFill>
+                            <a:srgbClr val="222222"/>
+                          </a:solidFill>
+                          <a:latin typeface="Yu Gothic"/>
+                          <a:ea typeface="Yu Gothic"/>
+                          <a:cs typeface="Yu Gothic"/>
+                        </a:rPr>
+                        <a:t>D</a:t>
+                      </a:r>
+                    </a:p>
+                  </a:txBody>
+                  <a:tcPr marL="91440" marR="91440" anchor="ctr">
+                    <a:solidFill>
+                      <a:srgbClr val="EFF3F7"/>
+                    </a:solidFill>
+                  </a:tcPr>
+                </a:tc>
+                <a:tc>
+                  <a:txBody>
+                    <a:bodyPr wrap="square"/>
+                    <a:lstStyle/>
+                    <a:p>
+                      <a:pPr algn="l">
+                        <a:spcAft>
+                          <a:spcPts val="0"/>
+                        </a:spcAft>
+                      </a:pPr>
+                      <a:r>
+                        <a:rPr sz="1600" b="0">
+                          <a:solidFill>
+                            <a:srgbClr val="222222"/>
+                          </a:solidFill>
+                          <a:latin typeface="Yu Gothic"/>
+                          <a:ea typeface="Yu Gothic"/>
+                          <a:cs typeface="Yu Gothic"/>
+                        </a:rPr>
+                        <a:t>複数LLM＋司会AI</a:t>
+                      </a:r>
+                    </a:p>
+                  </a:txBody>
+                  <a:tcPr marL="91440" marR="91440" anchor="ctr">
+                    <a:solidFill>
+                      <a:srgbClr val="EFF3F7"/>
+                    </a:solidFill>
+                  </a:tcPr>
+                </a:tc>
+                <a:tc>
+                  <a:txBody>
+                    <a:bodyPr wrap="square"/>
+                    <a:lstStyle/>
+                    <a:p>
+                      <a:pPr algn="l">
+                        <a:spcAft>
+                          <a:spcPts val="0"/>
+                        </a:spcAft>
+                      </a:pPr>
+                      <a:r>
+                        <a:rPr sz="1600" b="0">
+                          <a:solidFill>
+                            <a:srgbClr val="222222"/>
+                          </a:solidFill>
+                          <a:latin typeface="Yu Gothic"/>
+                          <a:ea typeface="Yu Gothic"/>
+                          <a:cs typeface="Yu Gothic"/>
+                        </a:rPr>
+                        <a:t>対話を動的に制御する効果</a:t>
+                      </a:r>
+                    </a:p>
+                  </a:txBody>
+                  <a:tcPr marL="91440" marR="91440" anchor="ctr">
+                    <a:solidFill>
+                      <a:srgbClr val="EFF3F7"/>
+                    </a:solidFill>
+                  </a:tcPr>
+                </a:tc>
+                <a:tc>
+                  <a:txBody>
+                    <a:bodyPr wrap="square"/>
+                    <a:lstStyle/>
+                    <a:p>
+                      <a:pPr algn="l">
+                        <a:spcAft>
+                          <a:spcPts val="0"/>
+                        </a:spcAft>
+                      </a:pPr>
+                      <a:r>
+                        <a:rPr sz="1600" b="0">
+                          <a:solidFill>
+                            <a:srgbClr val="222222"/>
+                          </a:solidFill>
+                          <a:latin typeface="Yu Gothic"/>
+                          <a:ea typeface="Yu Gothic"/>
+                          <a:cs typeface="Yu Gothic"/>
+                        </a:rPr>
+                        <a:t>次段階で実装</a:t>
+                      </a:r>
+                    </a:p>
+                  </a:txBody>
+                  <a:tcPr marL="91440" marR="91440" anchor="ctr">
+                    <a:solidFill>
+                      <a:srgbClr val="EFF3F7"/>
+                    </a:solidFill>
+                  </a:tcPr>
+                </a:tc>
+              </a:tr>
+            </a:tbl>
+          </a:graphicData>
+        </a:graphic>
+      </p:graphicFrame>
+      <p:sp>
+        <p:nvSpPr>
+          <p:cNvPr id="6" name="Rounded Rectangle 5"/>
+          <p:cNvSpPr/>
+          <p:nvPr/>
+        </p:nvSpPr>
+        <p:spPr>
+          <a:xfrm>
+            <a:off x="640080" y="4800600"/>
+            <a:ext cx="5303520" cy="1371600"/>
+          </a:xfrm>
+          <a:prstGeom prst="roundRect">
+            <a:avLst/>
+          </a:prstGeom>
+          <a:solidFill>
+            <a:srgbClr val="EFF3F7"/>
+          </a:solidFill>
+          <a:ln w="19050">
+            <a:solidFill>
+              <a:srgbClr val="0E7C86"/>
+            </a:solidFill>
+          </a:ln>
+          <a:effectLst/>
+        </p:spPr>
+        <p:style>
+          <a:lnRef idx="1">
+            <a:schemeClr val="accent1"/>
+          </a:lnRef>
+          <a:fillRef idx="3">
+            <a:schemeClr val="accent1"/>
+          </a:fillRef>
+          <a:effectRef idx="2">
+            <a:schemeClr val="accent1"/>
+          </a:effectRef>
+          <a:fontRef idx="minor">
+            <a:schemeClr val="lt1"/>
+          </a:fontRef>
+        </p:style>
+        <p:txBody>
+          <a:bodyPr rtlCol="0" anchor="ctr" wrap="square" lIns="228600" rIns="228600" tIns="164592"/>
+          <a:lstStyle/>
+          <a:p>
+            <a:pPr algn="l">
+              <a:spcAft>
+                <a:spcPts val="800"/>
+              </a:spcAft>
+            </a:pPr>
+            <a:r>
+              <a:rPr sz="1800" b="1">
+                <a:solidFill>
+                  <a:srgbClr val="0E7C86"/>
+                </a:solidFill>
+                <a:latin typeface="Yu Gothic"/>
+                <a:ea typeface="Yu Gothic"/>
+                <a:cs typeface="Yu Gothic"/>
+              </a:rPr>
+              <a:t>現在の3体の位置づけ</a:t>
+            </a:r>
+          </a:p>
+          <a:p>
+            <a:pPr algn="l">
+              <a:spcAft>
+                <a:spcPts val="500"/>
+              </a:spcAft>
+            </a:pPr>
+            <a:r>
+              <a:rPr sz="1400" b="0">
+                <a:solidFill>
+                  <a:srgbClr val="222222"/>
+                </a:solidFill>
+                <a:latin typeface="Yu Gothic"/>
+                <a:ea typeface="Yu Gothic"/>
+                <a:cs typeface="Yu Gothic"/>
+              </a:rPr>
+              <a:t>同一モデルに3つの異なるペルソナを与え、</a:t>
+            </a:r>
+          </a:p>
+          <a:p>
+            <a:pPr algn="l">
+              <a:spcAft>
+                <a:spcPts val="500"/>
+              </a:spcAft>
+            </a:pPr>
+            <a:r>
+              <a:rPr sz="1400" b="0">
+                <a:solidFill>
+                  <a:srgbClr val="222222"/>
+                </a:solidFill>
+                <a:latin typeface="Yu Gothic"/>
+                <a:ea typeface="Yu Gothic"/>
+                <a:cs typeface="Yu Gothic"/>
+              </a:rPr>
+              <a:t>固定順で回している（＝条件B）。</a:t>
+            </a:r>
+          </a:p>
+          <a:p>
+            <a:pPr algn="l">
+              <a:spcAft>
+                <a:spcPts val="500"/>
+              </a:spcAft>
+            </a:pPr>
+            <a:r>
+              <a:rPr sz="1400" b="0">
+                <a:solidFill>
+                  <a:srgbClr val="222222"/>
+                </a:solidFill>
+                <a:latin typeface="Yu Gothic"/>
+                <a:ea typeface="Yu Gothic"/>
+                <a:cs typeface="Yu Gothic"/>
+              </a:rPr>
+              <a:t>エージェントごとにモデルを指定できる構造なので、</a:t>
+            </a:r>
+          </a:p>
+          <a:p>
+            <a:pPr algn="l">
+              <a:spcAft>
+                <a:spcPts val="500"/>
+              </a:spcAft>
+            </a:pPr>
+            <a:r>
+              <a:rPr sz="1400" b="0">
+                <a:solidFill>
+                  <a:srgbClr val="222222"/>
+                </a:solidFill>
+                <a:latin typeface="Yu Gothic"/>
+                <a:ea typeface="Yu Gothic"/>
+                <a:cs typeface="Yu Gothic"/>
+              </a:rPr>
+              <a:t>条件Cへはコード変更なしで移行できる。</a:t>
+            </a:r>
+          </a:p>
+        </p:txBody>
+      </p:sp>
+      <p:sp>
+        <p:nvSpPr>
+          <p:cNvPr id="7" name="Rounded Rectangle 6"/>
+          <p:cNvSpPr/>
+          <p:nvPr/>
+        </p:nvSpPr>
+        <p:spPr>
+          <a:xfrm>
+            <a:off x="6217920" y="4800600"/>
+            <a:ext cx="5303520" cy="1371600"/>
+          </a:xfrm>
+          <a:prstGeom prst="roundRect">
+            <a:avLst/>
+          </a:prstGeom>
+          <a:solidFill>
+            <a:srgbClr val="EFF3F7"/>
+          </a:solidFill>
+          <a:ln w="19050">
+            <a:solidFill>
+              <a:srgbClr val="C0392B"/>
+            </a:solidFill>
+          </a:ln>
+          <a:effectLst/>
+        </p:spPr>
+        <p:style>
+          <a:lnRef idx="1">
+            <a:schemeClr val="accent1"/>
+          </a:lnRef>
+          <a:fillRef idx="3">
+            <a:schemeClr val="accent1"/>
+          </a:fillRef>
+          <a:effectRef idx="2">
+            <a:schemeClr val="accent1"/>
+          </a:effectRef>
+          <a:fontRef idx="minor">
+            <a:schemeClr val="lt1"/>
+          </a:fontRef>
+        </p:style>
+        <p:txBody>
+          <a:bodyPr rtlCol="0" anchor="ctr" wrap="square" lIns="228600" rIns="228600" tIns="164592"/>
+          <a:lstStyle/>
+          <a:p>
+            <a:pPr algn="l">
+              <a:spcAft>
+                <a:spcPts val="800"/>
+              </a:spcAft>
+            </a:pPr>
+            <a:r>
+              <a:rPr sz="1800" b="1">
+                <a:solidFill>
+                  <a:srgbClr val="C0392B"/>
+                </a:solidFill>
+                <a:latin typeface="Yu Gothic"/>
+                <a:ea typeface="Yu Gothic"/>
+                <a:cs typeface="Yu Gothic"/>
+              </a:rPr>
+              <a:t>比較で見たいこと</a:t>
+            </a:r>
+          </a:p>
+          <a:p>
+            <a:pPr algn="l">
+              <a:spcAft>
+                <a:spcPts val="500"/>
+              </a:spcAft>
+            </a:pPr>
+            <a:r>
+              <a:rPr sz="1400" b="0">
+                <a:solidFill>
+                  <a:srgbClr val="222222"/>
+                </a:solidFill>
+                <a:latin typeface="Yu Gothic"/>
+                <a:ea typeface="Yu Gothic"/>
+                <a:cs typeface="Yu Gothic"/>
+              </a:rPr>
+              <a:t>・重複のない多面的な意見が得られるか</a:t>
+            </a:r>
+          </a:p>
+          <a:p>
+            <a:pPr algn="l">
+              <a:spcAft>
+                <a:spcPts val="500"/>
+              </a:spcAft>
+            </a:pPr>
+            <a:r>
+              <a:rPr sz="1400" b="0">
+                <a:solidFill>
+                  <a:srgbClr val="222222"/>
+                </a:solidFill>
+                <a:latin typeface="Yu Gothic"/>
+                <a:ea typeface="Yu Gothic"/>
+                <a:cs typeface="Yu Gothic"/>
+              </a:rPr>
+              <a:t>・応答時間と発言数のつり合い</a:t>
+            </a:r>
+          </a:p>
+          <a:p>
+            <a:pPr algn="l">
+              <a:spcAft>
+                <a:spcPts val="500"/>
+              </a:spcAft>
+            </a:pPr>
+            <a:r>
+              <a:rPr sz="1400" b="0">
+                <a:solidFill>
+                  <a:srgbClr val="222222"/>
+                </a:solidFill>
+                <a:latin typeface="Yu Gothic"/>
+                <a:ea typeface="Yu Gothic"/>
+                <a:cs typeface="Yu Gothic"/>
+              </a:rPr>
+              <a:t>・患者の負担にならない対話の長さ</a:t>
+            </a:r>
+          </a:p>
+        </p:txBody>
+      </p:sp>
+    </p:spTree>
+  </p:cSld>
+  <p:clrMapOvr>
+    <a:masterClrMapping/>
+  </p:clrMapOvr>
+</p:sld>
+</file>
+
+<file path=ppt/slides/slide12.xml><?xml version="1.0" encoding="utf-8"?>
+<p:sld xmlns:a="http://schemas.openxmlformats.org/drawingml/2006/main" xmlns:p="http://schemas.openxmlformats.org/presentationml/2006/main" xmlns:r="http://schemas.openxmlformats.org/officeDocument/2006/relationships">
+  <p:cSld>
+    <p:spTree>
+      <p:nvGrpSpPr>
+        <p:cNvPr id="1" name=""/>
+        <p:cNvGrpSpPr/>
+        <p:nvPr/>
+      </p:nvGrpSpPr>
+      <p:grpSpPr/>
+      <p:sp>
+        <p:nvSpPr>
+          <p:cNvPr id="2" name="Rectangle 1"/>
+          <p:cNvSpPr/>
+          <p:nvPr/>
+        </p:nvSpPr>
+        <p:spPr>
+          <a:xfrm>
+            <a:off x="0" y="0"/>
+            <a:ext cx="12191695" cy="868680"/>
+          </a:xfrm>
+          <a:prstGeom prst="rect">
+            <a:avLst/>
+          </a:prstGeom>
+          <a:solidFill>
+            <a:srgbClr val="1F3A5F"/>
+          </a:solidFill>
+          <a:ln>
+            <a:noFill/>
+          </a:ln>
+          <a:effectLst/>
+        </p:spPr>
+        <p:style>
+          <a:lnRef idx="1">
+            <a:schemeClr val="accent1"/>
+          </a:lnRef>
+          <a:fillRef idx="3">
+            <a:schemeClr val="accent1"/>
+          </a:fillRef>
+          <a:effectRef idx="2">
+            <a:schemeClr val="accent1"/>
+          </a:effectRef>
+          <a:fontRef idx="minor">
+            <a:schemeClr val="lt1"/>
+          </a:fontRef>
+        </p:style>
+        <p:txBody>
+          <a:bodyPr rtlCol="0" anchor="ctr" lIns="457200"/>
+          <a:lstStyle/>
+          <a:p>
+            <a:pPr algn="l">
+              <a:spcAft>
+                <a:spcPts val="600"/>
+              </a:spcAft>
+            </a:pPr>
+            <a:r>
+              <a:rPr sz="3000" b="1">
+                <a:solidFill>
+                  <a:srgbClr val="FFFFFF"/>
+                </a:solidFill>
+                <a:latin typeface="Yu Gothic"/>
+                <a:ea typeface="Yu Gothic"/>
+                <a:cs typeface="Yu Gothic"/>
+              </a:rPr>
+              <a:t>今後の方針</a:t>
+            </a:r>
+          </a:p>
+        </p:txBody>
+      </p:sp>
+      <p:sp>
+        <p:nvSpPr>
+          <p:cNvPr id="3" name="TextBox 2"/>
+          <p:cNvSpPr txBox="1"/>
+          <p:nvPr/>
+        </p:nvSpPr>
+        <p:spPr>
+          <a:xfrm>
+            <a:off x="11277295" y="6355080"/>
+            <a:ext cx="640080" cy="365760"/>
+          </a:xfrm>
+          <a:prstGeom prst="rect">
+            <a:avLst/>
+          </a:prstGeom>
+          <a:noFill/>
+        </p:spPr>
+        <p:txBody>
+          <a:bodyPr wrap="square" anchor="t">
+            <a:spAutoFit/>
+          </a:bodyPr>
+          <a:lstStyle/>
+          <a:p>
+            <a:pPr algn="r">
+              <a:spcAft>
+                <a:spcPts val="600"/>
+              </a:spcAft>
+            </a:pPr>
+            <a:r>
+              <a:rPr sz="1400" b="0">
+                <a:solidFill>
+                  <a:srgbClr val="595A5C"/>
+                </a:solidFill>
+                <a:latin typeface="Yu Gothic"/>
+                <a:ea typeface="Yu Gothic"/>
+                <a:cs typeface="Yu Gothic"/>
+              </a:rPr>
+              <a:t>11</a:t>
             </a:r>
           </a:p>
         </p:txBody>
@@ -7876,7 +7563,7 @@
 </p:sld>
 </file>
 
-<file path=ppt/slides/slide14.xml><?xml version="1.0" encoding="utf-8"?>
+<file path=ppt/slides/slide13.xml><?xml version="1.0" encoding="utf-8"?>
 <p:sld xmlns:a="http://schemas.openxmlformats.org/drawingml/2006/main" xmlns:p="http://schemas.openxmlformats.org/presentationml/2006/main" xmlns:r="http://schemas.openxmlformats.org/officeDocument/2006/relationships">
   <p:cSld>
     <p:spTree>
@@ -7981,7 +7668,7 @@
                 <a:ea typeface="Yu Gothic"/>
                 <a:cs typeface="Yu Gothic"/>
               </a:rPr>
-              <a:t>13</a:t>
+              <a:t>12</a:t>
             </a:r>
           </a:p>
         </p:txBody>
@@ -8664,11 +8351,29 @@
           <a:p>
             <a:pPr algn="ctr">
               <a:spcAft>
+                <a:spcPts val="400"/>
+              </a:spcAft>
+            </a:pPr>
+            <a:r>
+              <a:rPr sz="1700" b="0">
+                <a:solidFill>
+                  <a:srgbClr val="C8DAE6"/>
+                </a:solidFill>
+                <a:latin typeface="Yu Gothic"/>
+                <a:ea typeface="Yu Gothic"/>
+                <a:cs typeface="Yu Gothic"/>
+              </a:rPr>
+              <a:t>本研究の価値は、LLMを使ったこと自体ではなく</a:t>
+            </a:r>
+          </a:p>
+          <a:p>
+            <a:pPr algn="ctr">
+              <a:spcAft>
                 <a:spcPts val="600"/>
               </a:spcAft>
             </a:pPr>
             <a:r>
-              <a:rPr sz="2200" b="1">
+              <a:rPr sz="2300" b="1">
                 <a:solidFill>
                   <a:srgbClr val="FFFFFF"/>
                 </a:solidFill>
@@ -8676,7 +8381,7 @@
                 <a:ea typeface="Yu Gothic"/>
                 <a:cs typeface="Yu Gothic"/>
               </a:rPr>
-              <a:t>本研究は、研究室の既存研究にLLMを接続する共通の入口（ゲートウェイ）になり得る</a:t>
+              <a:t>研究室の様々な研究にLLMを挿せる土台を作ったことにある</a:t>
             </a:r>
           </a:p>
         </p:txBody>
@@ -8718,6 +8423,83 @@
                 <a:cs typeface="Yu Gothic"/>
               </a:rPr>
               <a:t>※ センサーデータとの統合は中期の目標。本研究の完了範囲は接続基盤の構築まで。</a:t>
+            </a:r>
+          </a:p>
+        </p:txBody>
+      </p:sp>
+    </p:spTree>
+  </p:cSld>
+  <p:clrMapOvr>
+    <a:masterClrMapping/>
+  </p:clrMapOvr>
+</p:sld>
+</file>
+
+<file path=ppt/slides/slide14.xml><?xml version="1.0" encoding="utf-8"?>
+<p:sld xmlns:a="http://schemas.openxmlformats.org/drawingml/2006/main" xmlns:p="http://schemas.openxmlformats.org/presentationml/2006/main" xmlns:r="http://schemas.openxmlformats.org/officeDocument/2006/relationships">
+  <p:cSld>
+    <p:spTree>
+      <p:nvGrpSpPr>
+        <p:cNvPr id="1" name=""/>
+        <p:cNvGrpSpPr/>
+        <p:nvPr/>
+      </p:nvGrpSpPr>
+      <p:grpSpPr/>
+      <p:sp>
+        <p:nvSpPr>
+          <p:cNvPr id="2" name="Rectangle 1"/>
+          <p:cNvSpPr/>
+          <p:nvPr/>
+        </p:nvSpPr>
+        <p:spPr>
+          <a:xfrm>
+            <a:off x="0" y="2468880"/>
+            <a:ext cx="12191695" cy="1920240"/>
+          </a:xfrm>
+          <a:prstGeom prst="rect">
+            <a:avLst/>
+          </a:prstGeom>
+          <a:solidFill>
+            <a:srgbClr val="1F3A5F"/>
+          </a:solidFill>
+          <a:ln>
+            <a:noFill/>
+          </a:ln>
+          <a:effectLst/>
+        </p:spPr>
+        <p:style>
+          <a:lnRef idx="1">
+            <a:schemeClr val="accent1"/>
+          </a:lnRef>
+          <a:fillRef idx="3">
+            <a:schemeClr val="accent1"/>
+          </a:fillRef>
+          <a:effectRef idx="2">
+            <a:schemeClr val="accent1"/>
+          </a:effectRef>
+          <a:fontRef idx="minor">
+            <a:schemeClr val="lt1"/>
+          </a:fontRef>
+        </p:style>
+        <p:txBody>
+          <a:bodyPr rtlCol="0" anchor="ctr"/>
+          <a:lstStyle/>
+          <a:p>
+            <a:pPr algn="ctr">
+              <a:spcAft>
+                <a:spcPts val="600"/>
+              </a:spcAft>
+            </a:pPr>
+            <a:r>
+              <a:rPr sz="4000" b="1">
+                <a:solidFill>
+                  <a:srgbClr val="FFFFFF"/>
+                </a:solidFill>
+                <a:latin typeface="Yu Gothic"/>
+                <a:ea typeface="Yu Gothic"/>
+                <a:cs typeface="Yu Gothic"/>
+              </a:rPr>
+              <a:t>ご清聴ありがとうございました</a:t>
             </a:r>
           </a:p>
         </p:txBody>
@@ -8748,8 +8530,8 @@
         </p:nvSpPr>
         <p:spPr>
           <a:xfrm>
-            <a:off x="0" y="2468880"/>
-            <a:ext cx="12191695" cy="1920240"/>
+            <a:off x="0" y="0"/>
+            <a:ext cx="12191695" cy="868680"/>
           </a:xfrm>
           <a:prstGeom prst="rect">
             <a:avLst/>
@@ -8777,16 +8559,16 @@
           </a:fontRef>
         </p:style>
         <p:txBody>
-          <a:bodyPr rtlCol="0" anchor="ctr"/>
+          <a:bodyPr rtlCol="0" anchor="ctr" lIns="457200"/>
           <a:lstStyle/>
           <a:p>
-            <a:pPr algn="ctr">
+            <a:pPr algn="l">
               <a:spcAft>
                 <a:spcPts val="600"/>
               </a:spcAft>
             </a:pPr>
             <a:r>
-              <a:rPr sz="4000" b="1">
+              <a:rPr sz="3000" b="1">
                 <a:solidFill>
                   <a:srgbClr val="FFFFFF"/>
                 </a:solidFill>
@@ -8794,7 +8576,120 @@
                 <a:ea typeface="Yu Gothic"/>
                 <a:cs typeface="Yu Gothic"/>
               </a:rPr>
-              <a:t>ご清聴ありがとうございました</a:t>
+              <a:t>補足資料</a:t>
+            </a:r>
+          </a:p>
+        </p:txBody>
+      </p:sp>
+      <p:sp>
+        <p:nvSpPr>
+          <p:cNvPr id="3" name="TextBox 2"/>
+          <p:cNvSpPr txBox="1"/>
+          <p:nvPr/>
+        </p:nvSpPr>
+        <p:spPr>
+          <a:xfrm>
+            <a:off x="731520" y="1463040"/>
+            <a:ext cx="10698480" cy="4114800"/>
+          </a:xfrm>
+          <a:prstGeom prst="rect">
+            <a:avLst/>
+          </a:prstGeom>
+          <a:noFill/>
+        </p:spPr>
+        <p:txBody>
+          <a:bodyPr wrap="square" anchor="t">
+            <a:spAutoFit/>
+          </a:bodyPr>
+          <a:lstStyle/>
+          <a:p>
+            <a:pPr algn="l">
+              <a:spcAft>
+                <a:spcPts val="1400"/>
+              </a:spcAft>
+            </a:pPr>
+            <a:r>
+              <a:rPr sz="2200" b="0">
+                <a:solidFill>
+                  <a:srgbClr val="1F3A5F"/>
+                </a:solidFill>
+                <a:latin typeface="Yu Gothic"/>
+                <a:ea typeface="Yu Gothic"/>
+                <a:cs typeface="Yu Gothic"/>
+              </a:rPr>
+              <a:t>補1．JSON の具体例</a:t>
+            </a:r>
+          </a:p>
+          <a:p>
+            <a:pPr algn="l">
+              <a:spcAft>
+                <a:spcPts val="1400"/>
+              </a:spcAft>
+            </a:pPr>
+            <a:r>
+              <a:rPr sz="2200" b="0">
+                <a:solidFill>
+                  <a:srgbClr val="1F3A5F"/>
+                </a:solidFill>
+                <a:latin typeface="Yu Gothic"/>
+                <a:ea typeface="Yu Gothic"/>
+                <a:cs typeface="Yu Gothic"/>
+              </a:rPr>
+              <a:t>補2．自作部分と OSS の線引き</a:t>
+            </a:r>
+          </a:p>
+          <a:p>
+            <a:pPr algn="l">
+              <a:spcAft>
+                <a:spcPts val="1400"/>
+              </a:spcAft>
+            </a:pPr>
+            <a:r>
+              <a:rPr sz="2200" b="0">
+                <a:solidFill>
+                  <a:srgbClr val="1F3A5F"/>
+                </a:solidFill>
+                <a:latin typeface="Yu Gothic"/>
+                <a:ea typeface="Yu Gothic"/>
+                <a:cs typeface="Yu Gothic"/>
+              </a:rPr>
+              <a:t>補3．発言順の制御</a:t>
+            </a:r>
+          </a:p>
+          <a:p>
+            <a:pPr algn="l">
+              <a:spcAft>
+                <a:spcPts val="1400"/>
+              </a:spcAft>
+            </a:pPr>
+            <a:r>
+              <a:rPr sz="2200" b="0">
+                <a:solidFill>
+                  <a:srgbClr val="1F3A5F"/>
+                </a:solidFill>
+                <a:latin typeface="Yu Gothic"/>
+                <a:ea typeface="Yu Gothic"/>
+                <a:cs typeface="Yu Gothic"/>
+              </a:rPr>
+              <a:t>補4．堅牢性への配慮</a:t>
+            </a:r>
+          </a:p>
+          <a:p>
+            <a:pPr algn="l">
+              <a:spcAft>
+                <a:spcPts val="1400"/>
+              </a:spcAft>
+            </a:pPr>
+            <a:r>
+              <a:rPr sz="2200" b="0">
+                <a:solidFill>
+                  <a:srgbClr val="1F3A5F"/>
+                </a:solidFill>
+                <a:latin typeface="Yu Gothic"/>
+                <a:ea typeface="Yu Gothic"/>
+                <a:cs typeface="Yu Gothic"/>
+              </a:rPr>
+              <a:t>補5．開発体制</a:t>
             </a:r>
           </a:p>
         </p:txBody>
@@ -8871,357 +8766,7 @@
                 <a:ea typeface="Yu Gothic"/>
                 <a:cs typeface="Yu Gothic"/>
               </a:rPr>
-              <a:t>補足資料</a:t>
-            </a:r>
-          </a:p>
-        </p:txBody>
-      </p:sp>
-      <p:sp>
-        <p:nvSpPr>
-          <p:cNvPr id="3" name="TextBox 2"/>
-          <p:cNvSpPr txBox="1"/>
-          <p:nvPr/>
-        </p:nvSpPr>
-        <p:spPr>
-          <a:xfrm>
-            <a:off x="731520" y="1463040"/>
-            <a:ext cx="10698480" cy="4114800"/>
-          </a:xfrm>
-          <a:prstGeom prst="rect">
-            <a:avLst/>
-          </a:prstGeom>
-          <a:noFill/>
-        </p:spPr>
-        <p:txBody>
-          <a:bodyPr wrap="square" anchor="t">
-            <a:spAutoFit/>
-          </a:bodyPr>
-          <a:lstStyle/>
-          <a:p>
-            <a:pPr algn="l">
-              <a:spcAft>
-                <a:spcPts val="1400"/>
-              </a:spcAft>
-            </a:pPr>
-            <a:r>
-              <a:rPr sz="2200" b="0">
-                <a:solidFill>
-                  <a:srgbClr val="1F3A5F"/>
-                </a:solidFill>
-                <a:latin typeface="Yu Gothic"/>
-                <a:ea typeface="Yu Gothic"/>
-                <a:cs typeface="Yu Gothic"/>
-              </a:rPr>
-              <a:t>補1．LabVIEW ブロックダイアグラム</a:t>
-            </a:r>
-          </a:p>
-          <a:p>
-            <a:pPr algn="l">
-              <a:spcAft>
-                <a:spcPts val="1400"/>
-              </a:spcAft>
-            </a:pPr>
-            <a:r>
-              <a:rPr sz="2200" b="0">
-                <a:solidFill>
-                  <a:srgbClr val="1F3A5F"/>
-                </a:solidFill>
-                <a:latin typeface="Yu Gothic"/>
-                <a:ea typeface="Yu Gothic"/>
-                <a:cs typeface="Yu Gothic"/>
-              </a:rPr>
-              <a:t>補2．JSON の具体例</a:t>
-            </a:r>
-          </a:p>
-          <a:p>
-            <a:pPr algn="l">
-              <a:spcAft>
-                <a:spcPts val="1400"/>
-              </a:spcAft>
-            </a:pPr>
-            <a:r>
-              <a:rPr sz="2200" b="0">
-                <a:solidFill>
-                  <a:srgbClr val="1F3A5F"/>
-                </a:solidFill>
-                <a:latin typeface="Yu Gothic"/>
-                <a:ea typeface="Yu Gothic"/>
-                <a:cs typeface="Yu Gothic"/>
-              </a:rPr>
-              <a:t>補3．自作部分と OSS の線引き</a:t>
-            </a:r>
-          </a:p>
-          <a:p>
-            <a:pPr algn="l">
-              <a:spcAft>
-                <a:spcPts val="1400"/>
-              </a:spcAft>
-            </a:pPr>
-            <a:r>
-              <a:rPr sz="2200" b="0">
-                <a:solidFill>
-                  <a:srgbClr val="1F3A5F"/>
-                </a:solidFill>
-                <a:latin typeface="Yu Gothic"/>
-                <a:ea typeface="Yu Gothic"/>
-                <a:cs typeface="Yu Gothic"/>
-              </a:rPr>
-              <a:t>補4．発言順の制御</a:t>
-            </a:r>
-          </a:p>
-          <a:p>
-            <a:pPr algn="l">
-              <a:spcAft>
-                <a:spcPts val="1400"/>
-              </a:spcAft>
-            </a:pPr>
-            <a:r>
-              <a:rPr sz="2200" b="0">
-                <a:solidFill>
-                  <a:srgbClr val="1F3A5F"/>
-                </a:solidFill>
-                <a:latin typeface="Yu Gothic"/>
-                <a:ea typeface="Yu Gothic"/>
-                <a:cs typeface="Yu Gothic"/>
-              </a:rPr>
-              <a:t>補5．堅牢性への配慮</a:t>
-            </a:r>
-          </a:p>
-          <a:p>
-            <a:pPr algn="l">
-              <a:spcAft>
-                <a:spcPts val="1400"/>
-              </a:spcAft>
-            </a:pPr>
-            <a:r>
-              <a:rPr sz="2200" b="0">
-                <a:solidFill>
-                  <a:srgbClr val="1F3A5F"/>
-                </a:solidFill>
-                <a:latin typeface="Yu Gothic"/>
-                <a:ea typeface="Yu Gothic"/>
-                <a:cs typeface="Yu Gothic"/>
-              </a:rPr>
-              <a:t>補6．開発体制</a:t>
-            </a:r>
-          </a:p>
-        </p:txBody>
-      </p:sp>
-    </p:spTree>
-  </p:cSld>
-  <p:clrMapOvr>
-    <a:masterClrMapping/>
-  </p:clrMapOvr>
-</p:sld>
-</file>
-
-<file path=ppt/slides/slide17.xml><?xml version="1.0" encoding="utf-8"?>
-<p:sld xmlns:a="http://schemas.openxmlformats.org/drawingml/2006/main" xmlns:p="http://schemas.openxmlformats.org/presentationml/2006/main" xmlns:r="http://schemas.openxmlformats.org/officeDocument/2006/relationships">
-  <p:cSld>
-    <p:spTree>
-      <p:nvGrpSpPr>
-        <p:cNvPr id="1" name=""/>
-        <p:cNvGrpSpPr/>
-        <p:nvPr/>
-      </p:nvGrpSpPr>
-      <p:grpSpPr/>
-      <p:sp>
-        <p:nvSpPr>
-          <p:cNvPr id="2" name="Rectangle 1"/>
-          <p:cNvSpPr/>
-          <p:nvPr/>
-        </p:nvSpPr>
-        <p:spPr>
-          <a:xfrm>
-            <a:off x="0" y="0"/>
-            <a:ext cx="12191695" cy="868680"/>
-          </a:xfrm>
-          <a:prstGeom prst="rect">
-            <a:avLst/>
-          </a:prstGeom>
-          <a:solidFill>
-            <a:srgbClr val="1F3A5F"/>
-          </a:solidFill>
-          <a:ln>
-            <a:noFill/>
-          </a:ln>
-          <a:effectLst/>
-        </p:spPr>
-        <p:style>
-          <a:lnRef idx="1">
-            <a:schemeClr val="accent1"/>
-          </a:lnRef>
-          <a:fillRef idx="3">
-            <a:schemeClr val="accent1"/>
-          </a:fillRef>
-          <a:effectRef idx="2">
-            <a:schemeClr val="accent1"/>
-          </a:effectRef>
-          <a:fontRef idx="minor">
-            <a:schemeClr val="lt1"/>
-          </a:fontRef>
-        </p:style>
-        <p:txBody>
-          <a:bodyPr rtlCol="0" anchor="ctr" lIns="457200"/>
-          <a:lstStyle/>
-          <a:p>
-            <a:pPr algn="l">
-              <a:spcAft>
-                <a:spcPts val="600"/>
-              </a:spcAft>
-            </a:pPr>
-            <a:r>
-              <a:rPr sz="3000" b="1">
-                <a:solidFill>
-                  <a:srgbClr val="FFFFFF"/>
-                </a:solidFill>
-                <a:latin typeface="Yu Gothic"/>
-                <a:ea typeface="Yu Gothic"/>
-                <a:cs typeface="Yu Gothic"/>
-              </a:rPr>
-              <a:t>補1．LabVIEW ブロックダイアグラム</a:t>
-            </a:r>
-          </a:p>
-        </p:txBody>
-      </p:sp>
-      <p:pic>
-        <p:nvPicPr>
-          <p:cNvPr id="3" name="Picture 2" descr="ブロックダイアグラム.png"/>
-          <p:cNvPicPr>
-            <a:picLocks noChangeAspect="1"/>
-          </p:cNvPicPr>
-          <p:nvPr/>
-        </p:nvPicPr>
-        <p:blipFill>
-          <a:blip r:embed="rId2"/>
-          <a:stretch>
-            <a:fillRect/>
-          </a:stretch>
-        </p:blipFill>
-        <p:spPr>
-          <a:xfrm>
-            <a:off x="2098040" y="1143000"/>
-            <a:ext cx="7965440" cy="4480560"/>
-          </a:xfrm>
-          <a:prstGeom prst="rect">
-            <a:avLst/>
-          </a:prstGeom>
-        </p:spPr>
-      </p:pic>
-      <p:sp>
-        <p:nvSpPr>
-          <p:cNvPr id="4" name="TextBox 3"/>
-          <p:cNvSpPr txBox="1"/>
-          <p:nvPr/>
-        </p:nvSpPr>
-        <p:spPr>
-          <a:xfrm>
-            <a:off x="1097280" y="5696712"/>
-            <a:ext cx="9966960" cy="320040"/>
-          </a:xfrm>
-          <a:prstGeom prst="rect">
-            <a:avLst/>
-          </a:prstGeom>
-          <a:noFill/>
-        </p:spPr>
-        <p:txBody>
-          <a:bodyPr wrap="square" anchor="t">
-            <a:spAutoFit/>
-          </a:bodyPr>
-          <a:lstStyle/>
-          <a:p>
-            <a:pPr algn="ctr">
-              <a:spcAft>
-                <a:spcPts val="600"/>
-              </a:spcAft>
-            </a:pPr>
-            <a:r>
-              <a:rPr sz="1300" b="0">
-                <a:solidFill>
-                  <a:srgbClr val="595A5C"/>
-                </a:solidFill>
-                <a:latin typeface="Yu Gothic"/>
-                <a:ea typeface="Yu Gothic"/>
-                <a:cs typeface="Yu Gothic"/>
-              </a:rPr>
-              <a:t>LabVIEW標準の部品のみで構成（HTTP Client VIs / JSON VIs）。追加ツールキットは不使用</a:t>
-            </a:r>
-          </a:p>
-        </p:txBody>
-      </p:sp>
-    </p:spTree>
-  </p:cSld>
-  <p:clrMapOvr>
-    <a:masterClrMapping/>
-  </p:clrMapOvr>
-</p:sld>
-</file>
-
-<file path=ppt/slides/slide18.xml><?xml version="1.0" encoding="utf-8"?>
-<p:sld xmlns:a="http://schemas.openxmlformats.org/drawingml/2006/main" xmlns:p="http://schemas.openxmlformats.org/presentationml/2006/main" xmlns:r="http://schemas.openxmlformats.org/officeDocument/2006/relationships">
-  <p:cSld>
-    <p:spTree>
-      <p:nvGrpSpPr>
-        <p:cNvPr id="1" name=""/>
-        <p:cNvGrpSpPr/>
-        <p:nvPr/>
-      </p:nvGrpSpPr>
-      <p:grpSpPr/>
-      <p:sp>
-        <p:nvSpPr>
-          <p:cNvPr id="2" name="Rectangle 1"/>
-          <p:cNvSpPr/>
-          <p:nvPr/>
-        </p:nvSpPr>
-        <p:spPr>
-          <a:xfrm>
-            <a:off x="0" y="0"/>
-            <a:ext cx="12191695" cy="868680"/>
-          </a:xfrm>
-          <a:prstGeom prst="rect">
-            <a:avLst/>
-          </a:prstGeom>
-          <a:solidFill>
-            <a:srgbClr val="1F3A5F"/>
-          </a:solidFill>
-          <a:ln>
-            <a:noFill/>
-          </a:ln>
-          <a:effectLst/>
-        </p:spPr>
-        <p:style>
-          <a:lnRef idx="1">
-            <a:schemeClr val="accent1"/>
-          </a:lnRef>
-          <a:fillRef idx="3">
-            <a:schemeClr val="accent1"/>
-          </a:fillRef>
-          <a:effectRef idx="2">
-            <a:schemeClr val="accent1"/>
-          </a:effectRef>
-          <a:fontRef idx="minor">
-            <a:schemeClr val="lt1"/>
-          </a:fontRef>
-        </p:style>
-        <p:txBody>
-          <a:bodyPr rtlCol="0" anchor="ctr" lIns="457200"/>
-          <a:lstStyle/>
-          <a:p>
-            <a:pPr algn="l">
-              <a:spcAft>
-                <a:spcPts val="600"/>
-              </a:spcAft>
-            </a:pPr>
-            <a:r>
-              <a:rPr sz="3000" b="1">
-                <a:solidFill>
-                  <a:srgbClr val="FFFFFF"/>
-                </a:solidFill>
-                <a:latin typeface="Yu Gothic"/>
-                <a:ea typeface="Yu Gothic"/>
-                <a:cs typeface="Yu Gothic"/>
-              </a:rPr>
-              <a:t>補2．JSON の具体例</a:t>
+              <a:t>補1．JSON の具体例</a:t>
             </a:r>
           </a:p>
         </p:txBody>
@@ -9336,7 +8881,7 @@
                 <a:ea typeface="Yu Gothic"/>
                 <a:cs typeface="Yu Gothic"/>
               </a:rPr>
-              <a:t>  "agentIds": "alpha,beta,gamma",</a:t>
+              <a:t>  "agentIds": ["alpha","beta","gamma"],</a:t>
             </a:r>
           </a:p>
           <a:p>
@@ -9622,7 +9167,7 @@
 </p:sld>
 </file>
 
-<file path=ppt/slides/slide19.xml><?xml version="1.0" encoding="utf-8"?>
+<file path=ppt/slides/slide17.xml><?xml version="1.0" encoding="utf-8"?>
 <p:sld xmlns:a="http://schemas.openxmlformats.org/drawingml/2006/main" xmlns:p="http://schemas.openxmlformats.org/presentationml/2006/main" xmlns:r="http://schemas.openxmlformats.org/officeDocument/2006/relationships">
   <p:cSld>
     <p:spTree>
@@ -9686,7 +9231,7 @@
                 <a:ea typeface="Yu Gothic"/>
                 <a:cs typeface="Yu Gothic"/>
               </a:rPr>
-              <a:t>補3．自作部分と OSS の線引き</a:t>
+              <a:t>補2．自作部分と OSS の線引き</a:t>
             </a:r>
           </a:p>
         </p:txBody>
@@ -10301,7 +9846,7 @@
 </p:sld>
 </file>
 
-<file path=ppt/slides/slide2.xml><?xml version="1.0" encoding="utf-8"?>
+<file path=ppt/slides/slide18.xml><?xml version="1.0" encoding="utf-8"?>
 <p:sld xmlns:a="http://schemas.openxmlformats.org/drawingml/2006/main" xmlns:p="http://schemas.openxmlformats.org/presentationml/2006/main" xmlns:r="http://schemas.openxmlformats.org/officeDocument/2006/relationships">
   <p:cSld>
     <p:spTree>
@@ -10365,274 +9910,7 @@
                 <a:ea typeface="Yu Gothic"/>
                 <a:cs typeface="Yu Gothic"/>
               </a:rPr>
-              <a:t>目次</a:t>
-            </a:r>
-          </a:p>
-        </p:txBody>
-      </p:sp>
-      <p:sp>
-        <p:nvSpPr>
-          <p:cNvPr id="3" name="TextBox 2"/>
-          <p:cNvSpPr txBox="1"/>
-          <p:nvPr/>
-        </p:nvSpPr>
-        <p:spPr>
-          <a:xfrm>
-            <a:off x="11277295" y="6355080"/>
-            <a:ext cx="640080" cy="365760"/>
-          </a:xfrm>
-          <a:prstGeom prst="rect">
-            <a:avLst/>
-          </a:prstGeom>
-          <a:noFill/>
-        </p:spPr>
-        <p:txBody>
-          <a:bodyPr wrap="square" anchor="t">
-            <a:spAutoFit/>
-          </a:bodyPr>
-          <a:lstStyle/>
-          <a:p>
-            <a:pPr algn="r">
-              <a:spcAft>
-                <a:spcPts val="600"/>
-              </a:spcAft>
-            </a:pPr>
-            <a:r>
-              <a:rPr sz="1400" b="0">
-                <a:solidFill>
-                  <a:srgbClr val="595A5C"/>
-                </a:solidFill>
-                <a:latin typeface="Yu Gothic"/>
-                <a:ea typeface="Yu Gothic"/>
-                <a:cs typeface="Yu Gothic"/>
-              </a:rPr>
-              <a:t>1</a:t>
-            </a:r>
-          </a:p>
-        </p:txBody>
-      </p:sp>
-      <p:sp>
-        <p:nvSpPr>
-          <p:cNvPr id="4" name="TextBox 3"/>
-          <p:cNvSpPr txBox="1"/>
-          <p:nvPr/>
-        </p:nvSpPr>
-        <p:spPr>
-          <a:xfrm>
-            <a:off x="731520" y="1554480"/>
-            <a:ext cx="10698480" cy="4937760"/>
-          </a:xfrm>
-          <a:prstGeom prst="rect">
-            <a:avLst/>
-          </a:prstGeom>
-          <a:noFill/>
-        </p:spPr>
-        <p:txBody>
-          <a:bodyPr wrap="square" anchor="t">
-            <a:spAutoFit/>
-          </a:bodyPr>
-          <a:lstStyle/>
-          <a:p>
-            <a:pPr algn="l">
-              <a:spcAft>
-                <a:spcPts val="2000"/>
-              </a:spcAft>
-            </a:pPr>
-            <a:r>
-              <a:rPr sz="2600" b="0">
-                <a:solidFill>
-                  <a:srgbClr val="222222"/>
-                </a:solidFill>
-                <a:latin typeface="Yu Gothic"/>
-                <a:ea typeface="Yu Gothic"/>
-                <a:cs typeface="Yu Gothic"/>
-              </a:rPr>
-              <a:t>1.  研究背景</a:t>
-            </a:r>
-          </a:p>
-          <a:p>
-            <a:pPr algn="l">
-              <a:spcAft>
-                <a:spcPts val="2000"/>
-              </a:spcAft>
-            </a:pPr>
-            <a:r>
-              <a:rPr sz="2600" b="0">
-                <a:solidFill>
-                  <a:srgbClr val="222222"/>
-                </a:solidFill>
-                <a:latin typeface="Yu Gothic"/>
-                <a:ea typeface="Yu Gothic"/>
-                <a:cs typeface="Yu Gothic"/>
-              </a:rPr>
-              <a:t>2.  問題点</a:t>
-            </a:r>
-          </a:p>
-          <a:p>
-            <a:pPr algn="l">
-              <a:spcAft>
-                <a:spcPts val="2000"/>
-              </a:spcAft>
-            </a:pPr>
-            <a:r>
-              <a:rPr sz="2600" b="0">
-                <a:solidFill>
-                  <a:srgbClr val="222222"/>
-                </a:solidFill>
-                <a:latin typeface="Yu Gothic"/>
-                <a:ea typeface="Yu Gothic"/>
-                <a:cs typeface="Yu Gothic"/>
-              </a:rPr>
-              <a:t>3.  研究目的</a:t>
-            </a:r>
-          </a:p>
-          <a:p>
-            <a:pPr algn="l">
-              <a:spcAft>
-                <a:spcPts val="2000"/>
-              </a:spcAft>
-            </a:pPr>
-            <a:r>
-              <a:rPr sz="2600" b="0">
-                <a:solidFill>
-                  <a:srgbClr val="222222"/>
-                </a:solidFill>
-                <a:latin typeface="Yu Gothic"/>
-                <a:ea typeface="Yu Gothic"/>
-                <a:cs typeface="Yu Gothic"/>
-              </a:rPr>
-              <a:t>4.  システム構成</a:t>
-            </a:r>
-          </a:p>
-          <a:p>
-            <a:pPr algn="l">
-              <a:spcAft>
-                <a:spcPts val="2000"/>
-              </a:spcAft>
-            </a:pPr>
-            <a:r>
-              <a:rPr sz="2600" b="0">
-                <a:solidFill>
-                  <a:srgbClr val="222222"/>
-                </a:solidFill>
-                <a:latin typeface="Yu Gothic"/>
-                <a:ea typeface="Yu Gothic"/>
-                <a:cs typeface="Yu Gothic"/>
-              </a:rPr>
-              <a:t>5.  現在までの進捗　― 動作映像 ―</a:t>
-            </a:r>
-          </a:p>
-          <a:p>
-            <a:pPr algn="l">
-              <a:spcAft>
-                <a:spcPts val="2000"/>
-              </a:spcAft>
-            </a:pPr>
-            <a:r>
-              <a:rPr sz="2600" b="0">
-                <a:solidFill>
-                  <a:srgbClr val="222222"/>
-                </a:solidFill>
-                <a:latin typeface="Yu Gothic"/>
-                <a:ea typeface="Yu Gothic"/>
-                <a:cs typeface="Yu Gothic"/>
-              </a:rPr>
-              <a:t>6.  定量評価</a:t>
-            </a:r>
-          </a:p>
-          <a:p>
-            <a:pPr algn="l">
-              <a:spcAft>
-                <a:spcPts val="2000"/>
-              </a:spcAft>
-            </a:pPr>
-            <a:r>
-              <a:rPr sz="2600" b="0">
-                <a:solidFill>
-                  <a:srgbClr val="222222"/>
-                </a:solidFill>
-                <a:latin typeface="Yu Gothic"/>
-                <a:ea typeface="Yu Gothic"/>
-                <a:cs typeface="Yu Gothic"/>
-              </a:rPr>
-              <a:t>7.  今後の方針と本研究の位置づけ</a:t>
-            </a:r>
-          </a:p>
-        </p:txBody>
-      </p:sp>
-    </p:spTree>
-  </p:cSld>
-  <p:clrMapOvr>
-    <a:masterClrMapping/>
-  </p:clrMapOvr>
-</p:sld>
-</file>
-
-<file path=ppt/slides/slide20.xml><?xml version="1.0" encoding="utf-8"?>
-<p:sld xmlns:a="http://schemas.openxmlformats.org/drawingml/2006/main" xmlns:p="http://schemas.openxmlformats.org/presentationml/2006/main" xmlns:r="http://schemas.openxmlformats.org/officeDocument/2006/relationships">
-  <p:cSld>
-    <p:spTree>
-      <p:nvGrpSpPr>
-        <p:cNvPr id="1" name=""/>
-        <p:cNvGrpSpPr/>
-        <p:nvPr/>
-      </p:nvGrpSpPr>
-      <p:grpSpPr/>
-      <p:sp>
-        <p:nvSpPr>
-          <p:cNvPr id="2" name="Rectangle 1"/>
-          <p:cNvSpPr/>
-          <p:nvPr/>
-        </p:nvSpPr>
-        <p:spPr>
-          <a:xfrm>
-            <a:off x="0" y="0"/>
-            <a:ext cx="12191695" cy="868680"/>
-          </a:xfrm>
-          <a:prstGeom prst="rect">
-            <a:avLst/>
-          </a:prstGeom>
-          <a:solidFill>
-            <a:srgbClr val="1F3A5F"/>
-          </a:solidFill>
-          <a:ln>
-            <a:noFill/>
-          </a:ln>
-          <a:effectLst/>
-        </p:spPr>
-        <p:style>
-          <a:lnRef idx="1">
-            <a:schemeClr val="accent1"/>
-          </a:lnRef>
-          <a:fillRef idx="3">
-            <a:schemeClr val="accent1"/>
-          </a:fillRef>
-          <a:effectRef idx="2">
-            <a:schemeClr val="accent1"/>
-          </a:effectRef>
-          <a:fontRef idx="minor">
-            <a:schemeClr val="lt1"/>
-          </a:fontRef>
-        </p:style>
-        <p:txBody>
-          <a:bodyPr rtlCol="0" anchor="ctr" lIns="457200"/>
-          <a:lstStyle/>
-          <a:p>
-            <a:pPr algn="l">
-              <a:spcAft>
-                <a:spcPts val="600"/>
-              </a:spcAft>
-            </a:pPr>
-            <a:r>
-              <a:rPr sz="3000" b="1">
-                <a:solidFill>
-                  <a:srgbClr val="FFFFFF"/>
-                </a:solidFill>
-                <a:latin typeface="Yu Gothic"/>
-                <a:ea typeface="Yu Gothic"/>
-                <a:cs typeface="Yu Gothic"/>
-              </a:rPr>
-              <a:t>補4．発言順の制御</a:t>
+              <a:t>補3．発言順の制御</a:t>
             </a:r>
           </a:p>
         </p:txBody>
@@ -10972,7 +10250,7 @@
 </p:sld>
 </file>
 
-<file path=ppt/slides/slide21.xml><?xml version="1.0" encoding="utf-8"?>
+<file path=ppt/slides/slide19.xml><?xml version="1.0" encoding="utf-8"?>
 <p:sld xmlns:a="http://schemas.openxmlformats.org/drawingml/2006/main" xmlns:p="http://schemas.openxmlformats.org/presentationml/2006/main" xmlns:r="http://schemas.openxmlformats.org/officeDocument/2006/relationships">
   <p:cSld>
     <p:spTree>
@@ -11036,7 +10314,7 @@
                 <a:ea typeface="Yu Gothic"/>
                 <a:cs typeface="Yu Gothic"/>
               </a:rPr>
-              <a:t>補5．堅牢性への配慮</a:t>
+              <a:t>補4．堅牢性への配慮</a:t>
             </a:r>
           </a:p>
         </p:txBody>
@@ -11699,7 +10977,7 @@
 </p:sld>
 </file>
 
-<file path=ppt/slides/slide22.xml><?xml version="1.0" encoding="utf-8"?>
+<file path=ppt/slides/slide2.xml><?xml version="1.0" encoding="utf-8"?>
 <p:sld xmlns:a="http://schemas.openxmlformats.org/drawingml/2006/main" xmlns:p="http://schemas.openxmlformats.org/presentationml/2006/main" xmlns:r="http://schemas.openxmlformats.org/officeDocument/2006/relationships">
   <p:cSld>
     <p:spTree>
@@ -11763,7 +11041,292 @@
                 <a:ea typeface="Yu Gothic"/>
                 <a:cs typeface="Yu Gothic"/>
               </a:rPr>
-              <a:t>補6．開発体制</a:t>
+              <a:t>目次</a:t>
+            </a:r>
+          </a:p>
+        </p:txBody>
+      </p:sp>
+      <p:sp>
+        <p:nvSpPr>
+          <p:cNvPr id="3" name="TextBox 2"/>
+          <p:cNvSpPr txBox="1"/>
+          <p:nvPr/>
+        </p:nvSpPr>
+        <p:spPr>
+          <a:xfrm>
+            <a:off x="11277295" y="6355080"/>
+            <a:ext cx="640080" cy="365760"/>
+          </a:xfrm>
+          <a:prstGeom prst="rect">
+            <a:avLst/>
+          </a:prstGeom>
+          <a:noFill/>
+        </p:spPr>
+        <p:txBody>
+          <a:bodyPr wrap="square" anchor="t">
+            <a:spAutoFit/>
+          </a:bodyPr>
+          <a:lstStyle/>
+          <a:p>
+            <a:pPr algn="r">
+              <a:spcAft>
+                <a:spcPts val="600"/>
+              </a:spcAft>
+            </a:pPr>
+            <a:r>
+              <a:rPr sz="1400" b="0">
+                <a:solidFill>
+                  <a:srgbClr val="595A5C"/>
+                </a:solidFill>
+                <a:latin typeface="Yu Gothic"/>
+                <a:ea typeface="Yu Gothic"/>
+                <a:cs typeface="Yu Gothic"/>
+              </a:rPr>
+              <a:t>1</a:t>
+            </a:r>
+          </a:p>
+        </p:txBody>
+      </p:sp>
+      <p:sp>
+        <p:nvSpPr>
+          <p:cNvPr id="4" name="TextBox 3"/>
+          <p:cNvSpPr txBox="1"/>
+          <p:nvPr/>
+        </p:nvSpPr>
+        <p:spPr>
+          <a:xfrm>
+            <a:off x="731520" y="1463040"/>
+            <a:ext cx="10698480" cy="4937760"/>
+          </a:xfrm>
+          <a:prstGeom prst="rect">
+            <a:avLst/>
+          </a:prstGeom>
+          <a:noFill/>
+        </p:spPr>
+        <p:txBody>
+          <a:bodyPr wrap="square" anchor="t">
+            <a:spAutoFit/>
+          </a:bodyPr>
+          <a:lstStyle/>
+          <a:p>
+            <a:pPr algn="l">
+              <a:spcAft>
+                <a:spcPts val="1600"/>
+              </a:spcAft>
+            </a:pPr>
+            <a:r>
+              <a:rPr sz="2500" b="0">
+                <a:solidFill>
+                  <a:srgbClr val="222222"/>
+                </a:solidFill>
+                <a:latin typeface="Yu Gothic"/>
+                <a:ea typeface="Yu Gothic"/>
+                <a:cs typeface="Yu Gothic"/>
+              </a:rPr>
+              <a:t>1.  研究背景</a:t>
+            </a:r>
+          </a:p>
+          <a:p>
+            <a:pPr algn="l">
+              <a:spcAft>
+                <a:spcPts val="1600"/>
+              </a:spcAft>
+            </a:pPr>
+            <a:r>
+              <a:rPr sz="2500" b="0">
+                <a:solidFill>
+                  <a:srgbClr val="222222"/>
+                </a:solidFill>
+                <a:latin typeface="Yu Gothic"/>
+                <a:ea typeface="Yu Gothic"/>
+                <a:cs typeface="Yu Gothic"/>
+              </a:rPr>
+              <a:t>2.  問題点</a:t>
+            </a:r>
+          </a:p>
+          <a:p>
+            <a:pPr algn="l">
+              <a:spcAft>
+                <a:spcPts val="1600"/>
+              </a:spcAft>
+            </a:pPr>
+            <a:r>
+              <a:rPr sz="2500" b="0">
+                <a:solidFill>
+                  <a:srgbClr val="222222"/>
+                </a:solidFill>
+                <a:latin typeface="Yu Gothic"/>
+                <a:ea typeface="Yu Gothic"/>
+                <a:cs typeface="Yu Gothic"/>
+              </a:rPr>
+              <a:t>3.  研究目的</a:t>
+            </a:r>
+          </a:p>
+          <a:p>
+            <a:pPr algn="l">
+              <a:spcAft>
+                <a:spcPts val="1600"/>
+              </a:spcAft>
+            </a:pPr>
+            <a:r>
+              <a:rPr sz="2500" b="0">
+                <a:solidFill>
+                  <a:srgbClr val="222222"/>
+                </a:solidFill>
+                <a:latin typeface="Yu Gothic"/>
+                <a:ea typeface="Yu Gothic"/>
+                <a:cs typeface="Yu Gothic"/>
+              </a:rPr>
+              <a:t>4.  システム構成</a:t>
+            </a:r>
+          </a:p>
+          <a:p>
+            <a:pPr algn="l">
+              <a:spcAft>
+                <a:spcPts val="1600"/>
+              </a:spcAft>
+            </a:pPr>
+            <a:r>
+              <a:rPr sz="2500" b="0">
+                <a:solidFill>
+                  <a:srgbClr val="222222"/>
+                </a:solidFill>
+                <a:latin typeface="Yu Gothic"/>
+                <a:ea typeface="Yu Gothic"/>
+                <a:cs typeface="Yu Gothic"/>
+              </a:rPr>
+              <a:t>5.  現在までの進捗　― 動作映像 ―</a:t>
+            </a:r>
+          </a:p>
+          <a:p>
+            <a:pPr algn="l">
+              <a:spcAft>
+                <a:spcPts val="1600"/>
+              </a:spcAft>
+            </a:pPr>
+            <a:r>
+              <a:rPr sz="2500" b="0">
+                <a:solidFill>
+                  <a:srgbClr val="222222"/>
+                </a:solidFill>
+                <a:latin typeface="Yu Gothic"/>
+                <a:ea typeface="Yu Gothic"/>
+                <a:cs typeface="Yu Gothic"/>
+              </a:rPr>
+              <a:t>6.  定量評価</a:t>
+            </a:r>
+          </a:p>
+          <a:p>
+            <a:pPr algn="l">
+              <a:spcAft>
+                <a:spcPts val="1600"/>
+              </a:spcAft>
+            </a:pPr>
+            <a:r>
+              <a:rPr sz="2500" b="0">
+                <a:solidFill>
+                  <a:srgbClr val="222222"/>
+                </a:solidFill>
+                <a:latin typeface="Yu Gothic"/>
+                <a:ea typeface="Yu Gothic"/>
+                <a:cs typeface="Yu Gothic"/>
+              </a:rPr>
+              <a:t>7.  検証計画　― 対話構造の比較 ―</a:t>
+            </a:r>
+          </a:p>
+          <a:p>
+            <a:pPr algn="l">
+              <a:spcAft>
+                <a:spcPts val="1600"/>
+              </a:spcAft>
+            </a:pPr>
+            <a:r>
+              <a:rPr sz="2500" b="0">
+                <a:solidFill>
+                  <a:srgbClr val="222222"/>
+                </a:solidFill>
+                <a:latin typeface="Yu Gothic"/>
+                <a:ea typeface="Yu Gothic"/>
+                <a:cs typeface="Yu Gothic"/>
+              </a:rPr>
+              <a:t>8.  今後の方針と本研究の位置づけ</a:t>
+            </a:r>
+          </a:p>
+        </p:txBody>
+      </p:sp>
+    </p:spTree>
+  </p:cSld>
+  <p:clrMapOvr>
+    <a:masterClrMapping/>
+  </p:clrMapOvr>
+</p:sld>
+</file>
+
+<file path=ppt/slides/slide20.xml><?xml version="1.0" encoding="utf-8"?>
+<p:sld xmlns:a="http://schemas.openxmlformats.org/drawingml/2006/main" xmlns:p="http://schemas.openxmlformats.org/presentationml/2006/main" xmlns:r="http://schemas.openxmlformats.org/officeDocument/2006/relationships">
+  <p:cSld>
+    <p:spTree>
+      <p:nvGrpSpPr>
+        <p:cNvPr id="1" name=""/>
+        <p:cNvGrpSpPr/>
+        <p:nvPr/>
+      </p:nvGrpSpPr>
+      <p:grpSpPr/>
+      <p:sp>
+        <p:nvSpPr>
+          <p:cNvPr id="2" name="Rectangle 1"/>
+          <p:cNvSpPr/>
+          <p:nvPr/>
+        </p:nvSpPr>
+        <p:spPr>
+          <a:xfrm>
+            <a:off x="0" y="0"/>
+            <a:ext cx="12191695" cy="868680"/>
+          </a:xfrm>
+          <a:prstGeom prst="rect">
+            <a:avLst/>
+          </a:prstGeom>
+          <a:solidFill>
+            <a:srgbClr val="1F3A5F"/>
+          </a:solidFill>
+          <a:ln>
+            <a:noFill/>
+          </a:ln>
+          <a:effectLst/>
+        </p:spPr>
+        <p:style>
+          <a:lnRef idx="1">
+            <a:schemeClr val="accent1"/>
+          </a:lnRef>
+          <a:fillRef idx="3">
+            <a:schemeClr val="accent1"/>
+          </a:fillRef>
+          <a:effectRef idx="2">
+            <a:schemeClr val="accent1"/>
+          </a:effectRef>
+          <a:fontRef idx="minor">
+            <a:schemeClr val="lt1"/>
+          </a:fontRef>
+        </p:style>
+        <p:txBody>
+          <a:bodyPr rtlCol="0" anchor="ctr" lIns="457200"/>
+          <a:lstStyle/>
+          <a:p>
+            <a:pPr algn="l">
+              <a:spcAft>
+                <a:spcPts val="600"/>
+              </a:spcAft>
+            </a:pPr>
+            <a:r>
+              <a:rPr sz="3000" b="1">
+                <a:solidFill>
+                  <a:srgbClr val="FFFFFF"/>
+                </a:solidFill>
+                <a:latin typeface="Yu Gothic"/>
+                <a:ea typeface="Yu Gothic"/>
+                <a:cs typeface="Yu Gothic"/>
+              </a:rPr>
+              <a:t>補5．開発体制</a:t>
             </a:r>
           </a:p>
         </p:txBody>
@@ -13240,8 +12803,8 @@
         </p:nvSpPr>
         <p:spPr>
           <a:xfrm>
-            <a:off x="731520" y="1188720"/>
-            <a:ext cx="10698480" cy="1371600"/>
+            <a:off x="731520" y="1097280"/>
+            <a:ext cx="10698480" cy="1051560"/>
           </a:xfrm>
           <a:prstGeom prst="roundRect">
             <a:avLst/>
@@ -13286,25 +12849,7 @@
                 <a:ea typeface="Yu Gothic"/>
                 <a:cs typeface="Yu Gothic"/>
               </a:rPr>
-              <a:t>LabVIEWから大規模言語モデル（LLM）を利用できる接続基盤を構築し、</a:t>
-            </a:r>
-          </a:p>
-          <a:p>
-            <a:pPr algn="ctr">
-              <a:spcAft>
-                <a:spcPts val="600"/>
-              </a:spcAft>
-            </a:pPr>
-            <a:r>
-              <a:rPr sz="2200" b="1">
-                <a:solidFill>
-                  <a:srgbClr val="FFFFFF"/>
-                </a:solidFill>
-                <a:latin typeface="Yu Gothic"/>
-                <a:ea typeface="Yu Gothic"/>
-                <a:cs typeface="Yu Gothic"/>
-              </a:rPr>
-              <a:t>複数のAIが対話する形で主観情報を引き出せるようにする</a:t>
+              <a:t>本研究：LabVIEWから大規模言語モデル（LLM）を利用できる接続基盤を構築する</a:t>
             </a:r>
           </a:p>
         </p:txBody>
@@ -13317,8 +12862,69 @@
         </p:nvSpPr>
         <p:spPr>
           <a:xfrm>
-            <a:off x="731520" y="3017520"/>
-            <a:ext cx="3383280" cy="2194560"/>
+            <a:off x="731520" y="2286000"/>
+            <a:ext cx="10698480" cy="1051560"/>
+          </a:xfrm>
+          <a:prstGeom prst="roundRect">
+            <a:avLst/>
+          </a:prstGeom>
+          <a:solidFill>
+            <a:srgbClr val="EFF3F7"/>
+          </a:solidFill>
+          <a:ln w="25400">
+            <a:solidFill>
+              <a:srgbClr val="0E7C86"/>
+            </a:solidFill>
+          </a:ln>
+          <a:effectLst/>
+        </p:spPr>
+        <p:style>
+          <a:lnRef idx="1">
+            <a:schemeClr val="accent1"/>
+          </a:lnRef>
+          <a:fillRef idx="3">
+            <a:schemeClr val="accent1"/>
+          </a:fillRef>
+          <a:effectRef idx="2">
+            <a:schemeClr val="accent1"/>
+          </a:effectRef>
+          <a:fontRef idx="minor">
+            <a:schemeClr val="lt1"/>
+          </a:fontRef>
+        </p:style>
+        <p:txBody>
+          <a:bodyPr rtlCol="0" anchor="ctr" wrap="square"/>
+          <a:lstStyle/>
+          <a:p>
+            <a:pPr algn="ctr">
+              <a:spcAft>
+                <a:spcPts val="600"/>
+              </a:spcAft>
+            </a:pPr>
+            <a:r>
+              <a:rPr sz="2100" b="1">
+                <a:solidFill>
+                  <a:srgbClr val="0E7C86"/>
+                </a:solidFill>
+                <a:latin typeface="Yu Gothic"/>
+                <a:ea typeface="Yu Gothic"/>
+                <a:cs typeface="Yu Gothic"/>
+              </a:rPr>
+              <a:t>最終目的：主観情報を多面的かつ効率的に収集できるLLM対話構造を明らかにする</a:t>
+            </a:r>
+          </a:p>
+        </p:txBody>
+      </p:sp>
+      <p:sp>
+        <p:nvSpPr>
+          <p:cNvPr id="6" name="Rounded Rectangle 5"/>
+          <p:cNvSpPr/>
+          <p:nvPr/>
+        </p:nvSpPr>
+        <p:spPr>
+          <a:xfrm>
+            <a:off x="731520" y="3520440"/>
+            <a:ext cx="3383280" cy="2103120"/>
           </a:xfrm>
           <a:prstGeom prst="roundRect">
             <a:avLst/>
@@ -13375,7 +12981,7 @@
               </a:spcAft>
             </a:pPr>
             <a:r>
-              <a:rPr sz="1600" b="0">
+              <a:rPr sz="1500" b="0">
                 <a:solidFill>
                   <a:srgbClr val="222222"/>
                 </a:solidFill>
@@ -13393,7 +12999,7 @@
               </a:spcAft>
             </a:pPr>
             <a:r>
-              <a:rPr sz="1600" b="0">
+              <a:rPr sz="1500" b="0">
                 <a:solidFill>
                   <a:srgbClr val="222222"/>
                 </a:solidFill>
@@ -13411,7 +13017,7 @@
               </a:spcAft>
             </a:pPr>
             <a:r>
-              <a:rPr sz="1600" b="0">
+              <a:rPr sz="1500" b="0">
                 <a:solidFill>
                   <a:srgbClr val="222222"/>
                 </a:solidFill>
@@ -13426,14 +13032,14 @@
       </p:sp>
       <p:sp>
         <p:nvSpPr>
-          <p:cNvPr id="6" name="Rounded Rectangle 5"/>
+          <p:cNvPr id="7" name="Rounded Rectangle 6"/>
           <p:cNvSpPr/>
           <p:nvPr/>
         </p:nvSpPr>
         <p:spPr>
           <a:xfrm>
-            <a:off x="4389120" y="3017520"/>
-            <a:ext cx="3383280" cy="2194560"/>
+            <a:off x="4389120" y="3520440"/>
+            <a:ext cx="3383280" cy="2103120"/>
           </a:xfrm>
           <a:prstGeom prst="roundRect">
             <a:avLst/>
@@ -13480,7 +13086,7 @@
                 <a:ea typeface="Yu Gothic"/>
                 <a:cs typeface="Yu Gothic"/>
               </a:rPr>
-              <a:t>② 複数AIの会話制御</a:t>
+              <a:t>② 対話構造を試せる基盤</a:t>
             </a:r>
           </a:p>
           <a:p>
@@ -13490,7 +13096,7 @@
               </a:spcAft>
             </a:pPr>
             <a:r>
-              <a:rPr sz="1600" b="0">
+              <a:rPr sz="1500" b="0">
                 <a:solidFill>
                   <a:srgbClr val="222222"/>
                 </a:solidFill>
@@ -13508,7 +13114,7 @@
               </a:spcAft>
             </a:pPr>
             <a:r>
-              <a:rPr sz="1600" b="0">
+              <a:rPr sz="1500" b="0">
                 <a:solidFill>
                   <a:srgbClr val="222222"/>
                 </a:solidFill>
@@ -13516,21 +13122,39 @@
                 <a:ea typeface="Yu Gothic"/>
                 <a:cs typeface="Yu Gothic"/>
               </a:rPr>
-              <a:t>会話をサーバー側で制御する</a:t>
-            </a:r>
-          </a:p>
-        </p:txBody>
-      </p:sp>
-      <p:sp>
-        <p:nvSpPr>
-          <p:cNvPr id="7" name="Rounded Rectangle 6"/>
+              <a:t>会話をサーバー側で制御し、</a:t>
+            </a:r>
+          </a:p>
+          <a:p>
+            <a:pPr algn="l">
+              <a:spcAft>
+                <a:spcPts val="500"/>
+              </a:spcAft>
+            </a:pPr>
+            <a:r>
+              <a:rPr sz="1500" b="0">
+                <a:solidFill>
+                  <a:srgbClr val="222222"/>
+                </a:solidFill>
+                <a:latin typeface="Yu Gothic"/>
+                <a:ea typeface="Yu Gothic"/>
+                <a:cs typeface="Yu Gothic"/>
+              </a:rPr>
+              <a:t>構成を差し替えられるようにする</a:t>
+            </a:r>
+          </a:p>
+        </p:txBody>
+      </p:sp>
+      <p:sp>
+        <p:nvSpPr>
+          <p:cNvPr id="8" name="Rounded Rectangle 7"/>
           <p:cNvSpPr/>
           <p:nvPr/>
         </p:nvSpPr>
         <p:spPr>
           <a:xfrm>
-            <a:off x="8046720" y="3017520"/>
-            <a:ext cx="3383280" cy="2194560"/>
+            <a:off x="8046720" y="3520440"/>
+            <a:ext cx="3383280" cy="2103120"/>
           </a:xfrm>
           <a:prstGeom prst="roundRect">
             <a:avLst/>
@@ -13587,7 +13211,7 @@
               </a:spcAft>
             </a:pPr>
             <a:r>
-              <a:rPr sz="1600" b="0">
+              <a:rPr sz="1500" b="0">
                 <a:solidFill>
                   <a:srgbClr val="222222"/>
                 </a:solidFill>
@@ -13605,7 +13229,7 @@
               </a:spcAft>
             </a:pPr>
             <a:r>
-              <a:rPr sz="1600" b="0">
+              <a:rPr sz="1500" b="0">
                 <a:solidFill>
                   <a:srgbClr val="222222"/>
                 </a:solidFill>
@@ -15446,7 +15070,7 @@
                 <a:ea typeface="Yu Gothic"/>
                 <a:cs typeface="Yu Gothic"/>
               </a:rPr>
-              <a:t>動作映像 ①　単体AIとの往復</a:t>
+              <a:t>動作映像　複数AIの会話</a:t>
             </a:r>
           </a:p>
         </p:txBody>
@@ -15500,8 +15124,8 @@
         </p:nvSpPr>
         <p:spPr>
           <a:xfrm>
-            <a:off x="1463040" y="1234440"/>
-            <a:ext cx="9235440" cy="4206240"/>
+            <a:off x="548640" y="1143000"/>
+            <a:ext cx="6583680" cy="3931920"/>
           </a:xfrm>
           <a:prstGeom prst="rect">
             <a:avLst/>
@@ -15549,7 +15173,7 @@
                 <a:ea typeface="Yu Gothic"/>
                 <a:cs typeface="Yu Gothic"/>
               </a:rPr>
-              <a:t>▶  動画① をここに挿入（30秒）</a:t>
+              <a:t>▶  ここに動画を挿入</a:t>
             </a:r>
           </a:p>
           <a:p>
@@ -15567,7 +15191,7 @@
                 <a:ea typeface="Yu Gothic"/>
                 <a:cs typeface="Yu Gothic"/>
               </a:rPr>
-              <a:t>撮影手順: docs/presentation_video_guide.md の 3-3</a:t>
+              <a:t>挿入 → ビデオ → このデバイス（埋め込み）</a:t>
             </a:r>
           </a:p>
           <a:p>
@@ -15598,8 +15222,8 @@
         </p:nvSpPr>
         <p:spPr>
           <a:xfrm>
-            <a:off x="1463040" y="5623560"/>
-            <a:ext cx="9235440" cy="548640"/>
+            <a:off x="548640" y="5212080"/>
+            <a:ext cx="6583680" cy="1188720"/>
           </a:xfrm>
           <a:prstGeom prst="rect">
             <a:avLst/>
@@ -15612,21 +15236,555 @@
           </a:bodyPr>
           <a:lstStyle/>
           <a:p>
-            <a:pPr algn="ctr">
+            <a:pPr algn="l">
               <a:spcAft>
                 <a:spcPts val="600"/>
               </a:spcAft>
             </a:pPr>
             <a:r>
-              <a:rPr sz="1900" b="1">
-                <a:solidFill>
-                  <a:srgbClr val="1F3A5F"/>
-                </a:solidFill>
-                <a:latin typeface="Yu Gothic"/>
-                <a:ea typeface="Yu Gothic"/>
-                <a:cs typeface="Yu Gothic"/>
-              </a:rPr>
-              <a:t>LabVIEWで入力 → サーバー経由でLLMへ → 返信がLabVIEWに表示される</a:t>
+              <a:rPr sz="1500" b="1">
+                <a:solidFill>
+                  <a:srgbClr val="595A5C"/>
+                </a:solidFill>
+                <a:latin typeface="Yu Gothic"/>
+                <a:ea typeface="Yu Gothic"/>
+                <a:cs typeface="Yu Gothic"/>
+              </a:rPr>
+              <a:t>入力（LabVIEWから1回送信するだけ）</a:t>
+            </a:r>
+          </a:p>
+          <a:p>
+            <a:pPr algn="l">
+              <a:spcAft>
+                <a:spcPts val="600"/>
+              </a:spcAft>
+            </a:pPr>
+            <a:r>
+              <a:rPr sz="1600" b="0">
+                <a:solidFill>
+                  <a:srgbClr val="222222"/>
+                </a:solidFill>
+                <a:latin typeface="Yu Gothic"/>
+                <a:ea typeface="Yu Gothic"/>
+                <a:cs typeface="Yu Gothic"/>
+              </a:rPr>
+              <a:t>「リハビリのトレーニングを終えました。指が少し動きやすくなった気がして、続けられそうです。」</a:t>
+            </a:r>
+          </a:p>
+        </p:txBody>
+      </p:sp>
+      <p:graphicFrame>
+        <p:nvGraphicFramePr>
+          <p:cNvPr id="6" name="Table 5"/>
+          <p:cNvGraphicFramePr>
+            <a:graphicFrameLocks noGrp="1"/>
+          </p:cNvGraphicFramePr>
+          <p:nvPr/>
+        </p:nvGraphicFramePr>
+        <p:xfrm>
+          <a:off x="7406640" y="1325880"/>
+          <a:ext cx="4206239" cy="2990088"/>
+        </p:xfrm>
+        <a:graphic>
+          <a:graphicData uri="http://schemas.openxmlformats.org/drawingml/2006/table">
+            <a:tbl>
+              <a:tblPr firstRow="1" bandRow="1">
+                <a:tableStyleId>{5C22544A-7EE6-4342-B048-85BDC9FD1C3A}</a:tableStyleId>
+              </a:tblPr>
+              <a:tblGrid>
+                <a:gridCol w="359069"/>
+                <a:gridCol w="769434"/>
+                <a:gridCol w="3077736"/>
+              </a:tblGrid>
+              <a:tr h="384048">
+                <a:tc>
+                  <a:txBody>
+                    <a:bodyPr wrap="square"/>
+                    <a:lstStyle/>
+                    <a:p>
+                      <a:pPr algn="l">
+                        <a:spcAft>
+                          <a:spcPts val="0"/>
+                        </a:spcAft>
+                      </a:pPr>
+                      <a:r>
+                        <a:rPr sz="1400" b="1">
+                          <a:solidFill>
+                            <a:srgbClr val="FFFFFF"/>
+                          </a:solidFill>
+                          <a:latin typeface="Yu Gothic"/>
+                          <a:ea typeface="Yu Gothic"/>
+                          <a:cs typeface="Yu Gothic"/>
+                        </a:rPr>
+                        <a:t>順</a:t>
+                      </a:r>
+                    </a:p>
+                  </a:txBody>
+                  <a:tcPr marL="91440" marR="91440" anchor="ctr">
+                    <a:solidFill>
+                      <a:srgbClr val="1F3A5F"/>
+                    </a:solidFill>
+                  </a:tcPr>
+                </a:tc>
+                <a:tc>
+                  <a:txBody>
+                    <a:bodyPr wrap="square"/>
+                    <a:lstStyle/>
+                    <a:p>
+                      <a:pPr algn="l">
+                        <a:spcAft>
+                          <a:spcPts val="0"/>
+                        </a:spcAft>
+                      </a:pPr>
+                      <a:r>
+                        <a:rPr sz="1400" b="1">
+                          <a:solidFill>
+                            <a:srgbClr val="FFFFFF"/>
+                          </a:solidFill>
+                          <a:latin typeface="Yu Gothic"/>
+                          <a:ea typeface="Yu Gothic"/>
+                          <a:cs typeface="Yu Gothic"/>
+                        </a:rPr>
+                        <a:t>AI</a:t>
+                      </a:r>
+                    </a:p>
+                  </a:txBody>
+                  <a:tcPr marL="91440" marR="91440" anchor="ctr">
+                    <a:solidFill>
+                      <a:srgbClr val="1F3A5F"/>
+                    </a:solidFill>
+                  </a:tcPr>
+                </a:tc>
+                <a:tc>
+                  <a:txBody>
+                    <a:bodyPr wrap="square"/>
+                    <a:lstStyle/>
+                    <a:p>
+                      <a:pPr algn="l">
+                        <a:spcAft>
+                          <a:spcPts val="0"/>
+                        </a:spcAft>
+                      </a:pPr>
+                      <a:r>
+                        <a:rPr sz="1400" b="1">
+                          <a:solidFill>
+                            <a:srgbClr val="FFFFFF"/>
+                          </a:solidFill>
+                          <a:latin typeface="Yu Gothic"/>
+                          <a:ea typeface="Yu Gothic"/>
+                          <a:cs typeface="Yu Gothic"/>
+                        </a:rPr>
+                        <a:t>発言の要旨</a:t>
+                      </a:r>
+                    </a:p>
+                  </a:txBody>
+                  <a:tcPr marL="91440" marR="91440" anchor="ctr">
+                    <a:solidFill>
+                      <a:srgbClr val="1F3A5F"/>
+                    </a:solidFill>
+                  </a:tcPr>
+                </a:tc>
+              </a:tr>
+              <a:tr h="868680">
+                <a:tc>
+                  <a:txBody>
+                    <a:bodyPr wrap="square"/>
+                    <a:lstStyle/>
+                    <a:p>
+                      <a:pPr algn="l">
+                        <a:spcAft>
+                          <a:spcPts val="0"/>
+                        </a:spcAft>
+                      </a:pPr>
+                      <a:r>
+                        <a:rPr sz="1300" b="0">
+                          <a:solidFill>
+                            <a:srgbClr val="222222"/>
+                          </a:solidFill>
+                          <a:latin typeface="Yu Gothic"/>
+                          <a:ea typeface="Yu Gothic"/>
+                          <a:cs typeface="Yu Gothic"/>
+                        </a:rPr>
+                        <a:t>1</a:t>
+                      </a:r>
+                    </a:p>
+                  </a:txBody>
+                  <a:tcPr marL="91440" marR="91440" anchor="ctr">
+                    <a:solidFill>
+                      <a:srgbClr val="FFFFFF"/>
+                    </a:solidFill>
+                  </a:tcPr>
+                </a:tc>
+                <a:tc>
+                  <a:txBody>
+                    <a:bodyPr wrap="square"/>
+                    <a:lstStyle/>
+                    <a:p>
+                      <a:pPr algn="l">
+                        <a:spcAft>
+                          <a:spcPts val="0"/>
+                        </a:spcAft>
+                      </a:pPr>
+                      <a:r>
+                        <a:rPr sz="1300" b="0">
+                          <a:solidFill>
+                            <a:srgbClr val="222222"/>
+                          </a:solidFill>
+                          <a:latin typeface="Yu Gothic"/>
+                          <a:ea typeface="Yu Gothic"/>
+                          <a:cs typeface="Yu Gothic"/>
+                        </a:rPr>
+                        <a:t>Alpha</a:t>
+                      </a:r>
+                    </a:p>
+                  </a:txBody>
+                  <a:tcPr marL="91440" marR="91440" anchor="ctr">
+                    <a:solidFill>
+                      <a:srgbClr val="FFFFFF"/>
+                    </a:solidFill>
+                  </a:tcPr>
+                </a:tc>
+                <a:tc>
+                  <a:txBody>
+                    <a:bodyPr wrap="square"/>
+                    <a:lstStyle/>
+                    <a:p>
+                      <a:pPr algn="l">
+                        <a:spcAft>
+                          <a:spcPts val="0"/>
+                        </a:spcAft>
+                      </a:pPr>
+                      <a:r>
+                        <a:rPr sz="1300" b="0">
+                          <a:solidFill>
+                            <a:srgbClr val="222222"/>
+                          </a:solidFill>
+                          <a:latin typeface="Yu Gothic"/>
+                          <a:ea typeface="Yu Gothic"/>
+                          <a:cs typeface="Yu Gothic"/>
+                        </a:rPr>
+                        <a:t>素晴らしいですね。改善を実感できることは励みになります</a:t>
+                      </a:r>
+                    </a:p>
+                  </a:txBody>
+                  <a:tcPr marL="91440" marR="91440" anchor="ctr">
+                    <a:solidFill>
+                      <a:srgbClr val="FFFFFF"/>
+                    </a:solidFill>
+                  </a:tcPr>
+                </a:tc>
+              </a:tr>
+              <a:tr h="868680">
+                <a:tc>
+                  <a:txBody>
+                    <a:bodyPr wrap="square"/>
+                    <a:lstStyle/>
+                    <a:p>
+                      <a:pPr algn="l">
+                        <a:spcAft>
+                          <a:spcPts val="0"/>
+                        </a:spcAft>
+                      </a:pPr>
+                      <a:r>
+                        <a:rPr sz="1300" b="1">
+                          <a:solidFill>
+                            <a:srgbClr val="C0392B"/>
+                          </a:solidFill>
+                          <a:latin typeface="Yu Gothic"/>
+                          <a:ea typeface="Yu Gothic"/>
+                          <a:cs typeface="Yu Gothic"/>
+                        </a:rPr>
+                        <a:t>2</a:t>
+                      </a:r>
+                    </a:p>
+                  </a:txBody>
+                  <a:tcPr marL="91440" marR="91440" anchor="ctr">
+                    <a:solidFill>
+                      <a:srgbClr val="FDECEA"/>
+                    </a:solidFill>
+                  </a:tcPr>
+                </a:tc>
+                <a:tc>
+                  <a:txBody>
+                    <a:bodyPr wrap="square"/>
+                    <a:lstStyle/>
+                    <a:p>
+                      <a:pPr algn="l">
+                        <a:spcAft>
+                          <a:spcPts val="0"/>
+                        </a:spcAft>
+                      </a:pPr>
+                      <a:r>
+                        <a:rPr sz="1300" b="1">
+                          <a:solidFill>
+                            <a:srgbClr val="C0392B"/>
+                          </a:solidFill>
+                          <a:latin typeface="Yu Gothic"/>
+                          <a:ea typeface="Yu Gothic"/>
+                          <a:cs typeface="Yu Gothic"/>
+                        </a:rPr>
+                        <a:t>Beta</a:t>
+                      </a:r>
+                    </a:p>
+                  </a:txBody>
+                  <a:tcPr marL="91440" marR="91440" anchor="ctr">
+                    <a:solidFill>
+                      <a:srgbClr val="FDECEA"/>
+                    </a:solidFill>
+                  </a:tcPr>
+                </a:tc>
+                <a:tc>
+                  <a:txBody>
+                    <a:bodyPr wrap="square"/>
+                    <a:lstStyle/>
+                    <a:p>
+                      <a:pPr algn="l">
+                        <a:spcAft>
+                          <a:spcPts val="0"/>
+                        </a:spcAft>
+                      </a:pPr>
+                      <a:r>
+                        <a:rPr sz="1300" b="1">
+                          <a:solidFill>
+                            <a:srgbClr val="C0392B"/>
+                          </a:solidFill>
+                          <a:latin typeface="Yu Gothic"/>
+                          <a:ea typeface="Yu Gothic"/>
+                          <a:cs typeface="Yu Gothic"/>
+                        </a:rPr>
+                        <a:t>良い兆候です。ただし無理をせず、専門家の指導を仰ぐことも大切です</a:t>
+                      </a:r>
+                    </a:p>
+                  </a:txBody>
+                  <a:tcPr marL="91440" marR="91440" anchor="ctr">
+                    <a:solidFill>
+                      <a:srgbClr val="FDECEA"/>
+                    </a:solidFill>
+                  </a:tcPr>
+                </a:tc>
+              </a:tr>
+              <a:tr h="868680">
+                <a:tc>
+                  <a:txBody>
+                    <a:bodyPr wrap="square"/>
+                    <a:lstStyle/>
+                    <a:p>
+                      <a:pPr algn="l">
+                        <a:spcAft>
+                          <a:spcPts val="0"/>
+                        </a:spcAft>
+                      </a:pPr>
+                      <a:r>
+                        <a:rPr sz="1300" b="0">
+                          <a:solidFill>
+                            <a:srgbClr val="222222"/>
+                          </a:solidFill>
+                          <a:latin typeface="Yu Gothic"/>
+                          <a:ea typeface="Yu Gothic"/>
+                          <a:cs typeface="Yu Gothic"/>
+                        </a:rPr>
+                        <a:t>3</a:t>
+                      </a:r>
+                    </a:p>
+                  </a:txBody>
+                  <a:tcPr marL="91440" marR="91440" anchor="ctr">
+                    <a:solidFill>
+                      <a:srgbClr val="FFFFFF"/>
+                    </a:solidFill>
+                  </a:tcPr>
+                </a:tc>
+                <a:tc>
+                  <a:txBody>
+                    <a:bodyPr wrap="square"/>
+                    <a:lstStyle/>
+                    <a:p>
+                      <a:pPr algn="l">
+                        <a:spcAft>
+                          <a:spcPts val="0"/>
+                        </a:spcAft>
+                      </a:pPr>
+                      <a:r>
+                        <a:rPr sz="1300" b="0">
+                          <a:solidFill>
+                            <a:srgbClr val="222222"/>
+                          </a:solidFill>
+                          <a:latin typeface="Yu Gothic"/>
+                          <a:ea typeface="Yu Gothic"/>
+                          <a:cs typeface="Yu Gothic"/>
+                        </a:rPr>
+                        <a:t>Gamma</a:t>
+                      </a:r>
+                    </a:p>
+                  </a:txBody>
+                  <a:tcPr marL="91440" marR="91440" anchor="ctr">
+                    <a:solidFill>
+                      <a:srgbClr val="FFFFFF"/>
+                    </a:solidFill>
+                  </a:tcPr>
+                </a:tc>
+                <a:tc>
+                  <a:txBody>
+                    <a:bodyPr wrap="square"/>
+                    <a:lstStyle/>
+                    <a:p>
+                      <a:pPr algn="l">
+                        <a:spcAft>
+                          <a:spcPts val="0"/>
+                        </a:spcAft>
+                      </a:pPr>
+                      <a:r>
+                        <a:rPr sz="1300" b="0">
+                          <a:solidFill>
+                            <a:srgbClr val="222222"/>
+                          </a:solidFill>
+                          <a:latin typeface="Yu Gothic"/>
+                          <a:ea typeface="Yu Gothic"/>
+                          <a:cs typeface="Yu Gothic"/>
+                        </a:rPr>
+                        <a:t>その体験を他の挑戦にも生かすと、日常生活にも可能性が広がります</a:t>
+                      </a:r>
+                    </a:p>
+                  </a:txBody>
+                  <a:tcPr marL="91440" marR="91440" anchor="ctr">
+                    <a:solidFill>
+                      <a:srgbClr val="FFFFFF"/>
+                    </a:solidFill>
+                  </a:tcPr>
+                </a:tc>
+              </a:tr>
+            </a:tbl>
+          </a:graphicData>
+        </a:graphic>
+      </p:graphicFrame>
+      <p:sp>
+        <p:nvSpPr>
+          <p:cNvPr id="7" name="Rounded Rectangle 6"/>
+          <p:cNvSpPr/>
+          <p:nvPr/>
+        </p:nvSpPr>
+        <p:spPr>
+          <a:xfrm>
+            <a:off x="7406640" y="4572000"/>
+            <a:ext cx="4206240" cy="1737360"/>
+          </a:xfrm>
+          <a:prstGeom prst="roundRect">
+            <a:avLst/>
+          </a:prstGeom>
+          <a:solidFill>
+            <a:srgbClr val="EFF3F7"/>
+          </a:solidFill>
+          <a:ln w="19050">
+            <a:solidFill>
+              <a:srgbClr val="C0392B"/>
+            </a:solidFill>
+          </a:ln>
+          <a:effectLst/>
+        </p:spPr>
+        <p:style>
+          <a:lnRef idx="1">
+            <a:schemeClr val="accent1"/>
+          </a:lnRef>
+          <a:fillRef idx="3">
+            <a:schemeClr val="accent1"/>
+          </a:fillRef>
+          <a:effectRef idx="2">
+            <a:schemeClr val="accent1"/>
+          </a:effectRef>
+          <a:fontRef idx="minor">
+            <a:schemeClr val="lt1"/>
+          </a:fontRef>
+        </p:style>
+        <p:txBody>
+          <a:bodyPr rtlCol="0" anchor="ctr" wrap="square" lIns="228600" rIns="228600" tIns="164592"/>
+          <a:lstStyle/>
+          <a:p>
+            <a:pPr algn="l">
+              <a:spcAft>
+                <a:spcPts val="800"/>
+              </a:spcAft>
+            </a:pPr>
+            <a:r>
+              <a:rPr sz="1800" b="1">
+                <a:solidFill>
+                  <a:srgbClr val="C0392B"/>
+                </a:solidFill>
+                <a:latin typeface="Yu Gothic"/>
+                <a:ea typeface="Yu Gothic"/>
+                <a:cs typeface="Yu Gothic"/>
+              </a:rPr>
+              <a:t>注目点</a:t>
+            </a:r>
+          </a:p>
+          <a:p>
+            <a:pPr algn="l">
+              <a:spcAft>
+                <a:spcPts val="500"/>
+              </a:spcAft>
+            </a:pPr>
+            <a:r>
+              <a:rPr sz="1400" b="0">
+                <a:solidFill>
+                  <a:srgbClr val="222222"/>
+                </a:solidFill>
+                <a:latin typeface="Yu Gothic"/>
+                <a:ea typeface="Yu Gothic"/>
+                <a:cs typeface="Yu Gothic"/>
+              </a:rPr>
+              <a:t>同じ質問への答えを並べたのではなく、</a:t>
+            </a:r>
+          </a:p>
+          <a:p>
+            <a:pPr algn="l">
+              <a:spcAft>
+                <a:spcPts val="500"/>
+              </a:spcAft>
+            </a:pPr>
+            <a:r>
+              <a:rPr sz="1400" b="0">
+                <a:solidFill>
+                  <a:srgbClr val="222222"/>
+                </a:solidFill>
+                <a:latin typeface="Yu Gothic"/>
+                <a:ea typeface="Yu Gothic"/>
+                <a:cs typeface="Yu Gothic"/>
+              </a:rPr>
+              <a:t>前の発言を読んだうえで発言しているため、</a:t>
+            </a:r>
+          </a:p>
+          <a:p>
+            <a:pPr algn="l">
+              <a:spcAft>
+                <a:spcPts val="500"/>
+              </a:spcAft>
+            </a:pPr>
+            <a:r>
+              <a:rPr sz="1400" b="0">
+                <a:solidFill>
+                  <a:srgbClr val="222222"/>
+                </a:solidFill>
+                <a:latin typeface="Yu Gothic"/>
+                <a:ea typeface="Yu Gothic"/>
+                <a:cs typeface="Yu Gothic"/>
+              </a:rPr>
+              <a:t>内容が重複せず視点が加わっている。</a:t>
+            </a:r>
+          </a:p>
+          <a:p>
+            <a:pPr algn="l">
+              <a:spcAft>
+                <a:spcPts val="500"/>
+              </a:spcAft>
+            </a:pPr>
+            <a:r>
+              <a:rPr sz="1400" b="0">
+                <a:solidFill>
+                  <a:srgbClr val="222222"/>
+                </a:solidFill>
+                <a:latin typeface="Yu Gothic"/>
+                <a:ea typeface="Yu Gothic"/>
+                <a:cs typeface="Yu Gothic"/>
+              </a:rPr>
+              <a:t>※ この3体構成は比較条件の一つ（条件B）。</a:t>
             </a:r>
           </a:p>
         </p:txBody>

--- a/docs/export/中間発表_柴尾.pptx
+++ b/docs/export/中間発表_柴尾.pptx
@@ -596,7 +596,7 @@
           </a:p>
           <a:p>
             <a:r>
-              <a:t>AIが3体の場合で約6.3秒です。内訳を見ると、自作サーバー側の処理は7ミリ秒で、残りはすべてLLM側の応答待ちでした。つまり遅延の原因はほぼ外部APIであり、自作部分のオーバーヘッドは無視できる水準です。</a:t>
+              <a:t>AIが3体の場合で約6秒です。先ほどの動画のログでは、1体目が2.0秒、2体目が2.9秒、3体目が1.1秒で、合計6.0秒でした。内訳を見ると、自作サーバー側の処理は7ミリ秒で、残りはすべてLLM側の応答待ちでした。つまり遅延の原因はほぼ外部APIであり、自作部分のオーバーヘッドは無視できる水準です。</a:t>
             </a:r>
           </a:p>
           <a:p>
@@ -1511,7 +1511,7 @@
           </a:p>
           <a:p>
             <a:r>
-              <a:t>結果がこちらです。注目していただきたいのは、2体目以降が前の発言を受けている点です。3体に同じ質問を投げて答えを並べたのではなく、前の発言を読んだうえで発言しているので、内容が重複せず、慎重な視点や発想を広げる視点が加わっています。</a:t>
+              <a:t>結果がこちらです。1体目は「特に効果を感じたトレーニングはありましたか」と問い返し、2体目は継続とフィードバックという条件を補い、3体目は具体的な目標設定や日常生活での挑戦へと話を広げています。3体に同じ質問を投げて答えを並べたのではなく、前の発言を読んだうえで発言しているので、内容が重複していません。</a:t>
             </a:r>
           </a:p>
           <a:p>
@@ -5182,7 +5182,7 @@
                           <a:ea typeface="Yu Gothic"/>
                           <a:cs typeface="Yu Gothic"/>
                         </a:rPr>
-                        <a:t>約 6.3 秒</a:t>
+                        <a:t>約 6.0 〜 6.3 秒</a:t>
                       </a:r>
                     </a:p>
                   </a:txBody>
@@ -5211,7 +5211,7 @@
                           <a:ea typeface="Yu Gothic"/>
                           <a:cs typeface="Yu Gothic"/>
                         </a:rPr>
-                        <a:t>サーバー処理 7ms ＋ LLM応答待ち 6.3秒</a:t>
+                        <a:t>サーバー処理 7ms ＋ LLM応答待ち（2.0 / 2.9 / 1.1 秒）</a:t>
                       </a:r>
                     </a:p>
                   </a:txBody>
@@ -15268,7 +15268,7 @@
                 <a:ea typeface="Yu Gothic"/>
                 <a:cs typeface="Yu Gothic"/>
               </a:rPr>
-              <a:t>「リハビリのトレーニングを終えました。指が少し動きやすくなった気がして、続けられそうです。」</a:t>
+              <a:t>「リハビリのトレーニングを終えました。指が少し動きやすくなった気がします。」</a:t>
             </a:r>
           </a:p>
         </p:txBody>
@@ -15463,7 +15463,7 @@
                           <a:ea typeface="Yu Gothic"/>
                           <a:cs typeface="Yu Gothic"/>
                         </a:rPr>
-                        <a:t>素晴らしいですね。改善を実感できることは励みになります</a:t>
+                        <a:t>改善が見られるのは励みになる。特に効果を感じたトレーニングはあったかと聞き返す</a:t>
                       </a:r>
                     </a:p>
                   </a:txBody>
@@ -15552,7 +15552,7 @@
                           <a:ea typeface="Yu Gothic"/>
                           <a:cs typeface="Yu Gothic"/>
                         </a:rPr>
-                        <a:t>良い兆候です。ただし無理をせず、専門家の指導を仰ぐことも大切です</a:t>
+                        <a:t>継続的な取り組みと適切なフィードバックが必要。共有し合える環境を整えることも大切</a:t>
                       </a:r>
                     </a:p>
                   </a:txBody>
@@ -15641,7 +15641,7 @@
                           <a:ea typeface="Yu Gothic"/>
                           <a:cs typeface="Yu Gothic"/>
                         </a:rPr>
-                        <a:t>その体験を他の挑戦にも生かすと、日常生活にも可能性が広がります</a:t>
+                        <a:t>具体的な目標を設定すると効果を引き出せる。日常生活で指を使う作業への挑戦を提案</a:t>
                       </a:r>
                     </a:p>
                   </a:txBody>
@@ -15730,7 +15730,7 @@
                 <a:ea typeface="Yu Gothic"/>
                 <a:cs typeface="Yu Gothic"/>
               </a:rPr>
-              <a:t>同じ質問への答えを並べたのではなく、</a:t>
+              <a:t>1体目は問い返し、2体目は条件を補い、</a:t>
             </a:r>
           </a:p>
           <a:p>
@@ -15748,7 +15748,7 @@
                 <a:ea typeface="Yu Gothic"/>
                 <a:cs typeface="Yu Gothic"/>
               </a:rPr>
-              <a:t>前の発言を読んだうえで発言しているため、</a:t>
+              <a:t>3体目は次の行動へ広げている。</a:t>
             </a:r>
           </a:p>
           <a:p>
@@ -15766,7 +15766,7 @@
                 <a:ea typeface="Yu Gothic"/>
                 <a:cs typeface="Yu Gothic"/>
               </a:rPr>
-              <a:t>内容が重複せず視点が加わっている。</a:t>
+              <a:t>前の発言を読んだうえで話すため重複しない。</a:t>
             </a:r>
           </a:p>
           <a:p>
